--- a/Presentation Document ppt.pptx
+++ b/Presentation Document ppt.pptx
@@ -5,40 +5,39 @@
     <p:sldMasterId id="2147483648" r:id="rId1"/>
   </p:sldMasterIdLst>
   <p:notesMasterIdLst>
-    <p:notesMasterId r:id="rId33"/>
+    <p:notesMasterId r:id="rId32"/>
   </p:notesMasterIdLst>
   <p:sldIdLst>
     <p:sldId id="292" r:id="rId2"/>
     <p:sldId id="279" r:id="rId3"/>
-    <p:sldId id="327" r:id="rId4"/>
-    <p:sldId id="328" r:id="rId5"/>
-    <p:sldId id="335" r:id="rId6"/>
-    <p:sldId id="342" r:id="rId7"/>
-    <p:sldId id="343" r:id="rId8"/>
-    <p:sldId id="309" r:id="rId9"/>
-    <p:sldId id="348" r:id="rId10"/>
-    <p:sldId id="329" r:id="rId11"/>
-    <p:sldId id="330" r:id="rId12"/>
-    <p:sldId id="344" r:id="rId13"/>
-    <p:sldId id="312" r:id="rId14"/>
-    <p:sldId id="283" r:id="rId15"/>
-    <p:sldId id="336" r:id="rId16"/>
-    <p:sldId id="338" r:id="rId17"/>
-    <p:sldId id="339" r:id="rId18"/>
-    <p:sldId id="337" r:id="rId19"/>
-    <p:sldId id="340" r:id="rId20"/>
-    <p:sldId id="282" r:id="rId21"/>
-    <p:sldId id="290" r:id="rId22"/>
-    <p:sldId id="317" r:id="rId23"/>
+    <p:sldId id="349" r:id="rId4"/>
+    <p:sldId id="335" r:id="rId5"/>
+    <p:sldId id="342" r:id="rId6"/>
+    <p:sldId id="343" r:id="rId7"/>
+    <p:sldId id="309" r:id="rId8"/>
+    <p:sldId id="348" r:id="rId9"/>
+    <p:sldId id="329" r:id="rId10"/>
+    <p:sldId id="330" r:id="rId11"/>
+    <p:sldId id="344" r:id="rId12"/>
+    <p:sldId id="312" r:id="rId13"/>
+    <p:sldId id="283" r:id="rId14"/>
+    <p:sldId id="336" r:id="rId15"/>
+    <p:sldId id="338" r:id="rId16"/>
+    <p:sldId id="339" r:id="rId17"/>
+    <p:sldId id="337" r:id="rId18"/>
+    <p:sldId id="340" r:id="rId19"/>
+    <p:sldId id="282" r:id="rId20"/>
+    <p:sldId id="290" r:id="rId21"/>
+    <p:sldId id="317" r:id="rId22"/>
+    <p:sldId id="341" r:id="rId23"/>
     <p:sldId id="318" r:id="rId24"/>
     <p:sldId id="333" r:id="rId25"/>
     <p:sldId id="334" r:id="rId26"/>
-    <p:sldId id="341" r:id="rId27"/>
-    <p:sldId id="347" r:id="rId28"/>
-    <p:sldId id="291" r:id="rId29"/>
-    <p:sldId id="345" r:id="rId30"/>
-    <p:sldId id="346" r:id="rId31"/>
-    <p:sldId id="275" r:id="rId32"/>
+    <p:sldId id="347" r:id="rId27"/>
+    <p:sldId id="291" r:id="rId28"/>
+    <p:sldId id="345" r:id="rId29"/>
+    <p:sldId id="346" r:id="rId30"/>
+    <p:sldId id="275" r:id="rId31"/>
   </p:sldIdLst>
   <p:sldSz cx="12192000" cy="6858000"/>
   <p:notesSz cx="6858000" cy="9144000"/>
@@ -630,29 +629,69 @@
           <a:lstStyle/>
           <a:p>
             <a:r>
-              <a:rPr lang="en-GB" b="1" i="0" dirty="0">
-                <a:solidFill>
-                  <a:srgbClr val="E6E8F0"/>
-                </a:solidFill>
-                <a:effectLst/>
-                <a:latin typeface="Google Sans"/>
-              </a:rPr>
-              <a:t>LSOA: </a:t>
-            </a:r>
-            <a:r>
-              <a:rPr lang="en-GB" b="0" i="0" dirty="0">
-                <a:solidFill>
-                  <a:srgbClr val="E6E8F0"/>
-                </a:solidFill>
-                <a:effectLst/>
-                <a:latin typeface="Google Sans"/>
-              </a:rPr>
-              <a:t>Lower Layer Super Output Areas (LSOAs) are </a:t>
-            </a:r>
-            <a:r>
-              <a:rPr lang="en-GB" dirty="0"/>
-              <a:t>small, consistent geographic units used in England and Wales for collecting and publishing statistical data</a:t>
-            </a:r>
+              <a:rPr lang="en-GB" sz="1200" dirty="0"/>
+              <a:t>Crime affects people’s </a:t>
+            </a:r>
+            <a:r>
+              <a:rPr lang="en-GB" sz="1200" b="1" dirty="0"/>
+              <a:t>safety and daily life</a:t>
+            </a:r>
+            <a:r>
+              <a:rPr lang="en-GB" sz="1200" dirty="0"/>
+              <a:t>. Police collect large amounts of crime data, but it is difficult to study it manually.</a:t>
+            </a:r>
+          </a:p>
+          <a:p>
+            <a:r>
+              <a:rPr lang="en-GB" sz="1200" dirty="0"/>
+              <a:t>Machine learning can help by:</a:t>
+            </a:r>
+          </a:p>
+          <a:p>
+            <a:r>
+              <a:rPr lang="en-GB" sz="1200" dirty="0"/>
+              <a:t>Finding </a:t>
+            </a:r>
+            <a:r>
+              <a:rPr lang="en-GB" sz="1200" b="1" dirty="0"/>
+              <a:t>patterns</a:t>
+            </a:r>
+            <a:r>
+              <a:rPr lang="en-GB" sz="1200" dirty="0"/>
+              <a:t> in crime data </a:t>
+            </a:r>
+          </a:p>
+          <a:p>
+            <a:r>
+              <a:rPr lang="en-GB" sz="1200" dirty="0"/>
+              <a:t>Identifying </a:t>
+            </a:r>
+            <a:r>
+              <a:rPr lang="en-GB" sz="1200" b="1" dirty="0"/>
+              <a:t>high-risk areas </a:t>
+            </a:r>
+          </a:p>
+          <a:p>
+            <a:r>
+              <a:rPr lang="en-GB" sz="1200" dirty="0"/>
+              <a:t>Predicting </a:t>
+            </a:r>
+            <a:r>
+              <a:rPr lang="en-GB" sz="1200" b="1" dirty="0"/>
+              <a:t>future</a:t>
+            </a:r>
+            <a:r>
+              <a:rPr lang="en-GB" sz="1200" dirty="0"/>
+              <a:t> crime levels </a:t>
+            </a:r>
+          </a:p>
+          <a:p>
+            <a:r>
+              <a:rPr lang="en-GB" sz="1200" dirty="0"/>
+              <a:t>This project uses real crime data to support better decisions for safety and planning.</a:t>
+            </a:r>
+          </a:p>
+          <a:p>
             <a:endParaRPr lang="en-PK" dirty="0"/>
           </a:p>
         </p:txBody>
@@ -674,7 +713,7 @@
           <a:p>
             <a:fld id="{A9A0EA98-5831-4853-B862-C702E6EB345C}" type="slidenum">
               <a:rPr lang="en-US" smtClean="0"/>
-              <a:t>5</a:t>
+              <a:t>2</a:t>
             </a:fld>
             <a:endParaRPr lang="en-US"/>
           </a:p>
@@ -683,7 +722,7 @@
     </p:spTree>
     <p:extLst>
       <p:ext uri="{BB962C8B-B14F-4D97-AF65-F5344CB8AC3E}">
-        <p14:creationId xmlns:p14="http://schemas.microsoft.com/office/powerpoint/2010/main" val="3700240494"/>
+        <p14:creationId xmlns:p14="http://schemas.microsoft.com/office/powerpoint/2010/main" val="2660106228"/>
       </p:ext>
     </p:extLst>
   </p:cSld>
@@ -742,16 +781,51 @@
           <a:bodyPr/>
           <a:lstStyle/>
           <a:p>
+            <a:pPr marL="0" marR="0" lvl="0" indent="0" algn="l" defTabSz="914400" rtl="0" eaLnBrk="1" fontAlgn="base" latinLnBrk="0" hangingPunct="1">
+              <a:lnSpc>
+                <a:spcPct val="100000"/>
+              </a:lnSpc>
+              <a:spcBef>
+                <a:spcPct val="30000"/>
+              </a:spcBef>
+              <a:spcAft>
+                <a:spcPct val="0"/>
+              </a:spcAft>
+              <a:buClrTx/>
+              <a:buSzTx/>
+              <a:buFontTx/>
+              <a:buNone/>
+              <a:tabLst/>
+              <a:defRPr/>
+            </a:pPr>
             <a:r>
               <a:rPr lang="en-GB" dirty="0"/>
-              <a:t>SHAP explains how much each feature pushes a prediction up or down.</a:t>
-            </a:r>
-          </a:p>
-          <a:p>
+              <a:t>DBSCAN performed much better than </a:t>
+            </a:r>
+            <a:r>
+              <a:rPr lang="en-GB" dirty="0" err="1"/>
+              <a:t>KMeans</a:t>
+            </a:r>
             <a:r>
               <a:rPr lang="en-GB" dirty="0"/>
-              <a:t>The SHAP analysis provides a detailed explanation of how each feature influences predictions. The summary plot shows that higher values of dominant crime type and previous crime significantly increase predicted crime levels. The global importance plot confirms that these features have the largest overall impact, while location features contribute less. This demonstrates that both temporal and crime-type factors are the main drivers of the model’s predictions.</a:t>
-            </a:r>
+              <a:t>.</a:t>
+            </a:r>
+            <a:br>
+              <a:rPr lang="en-GB" dirty="0"/>
+            </a:br>
+            <a:r>
+              <a:rPr lang="en-GB" dirty="0"/>
+              <a:t>It identifies dense crime hotspots and also detects outliers.</a:t>
+            </a:r>
+            <a:br>
+              <a:rPr lang="en-GB" dirty="0"/>
+            </a:br>
+            <a:r>
+              <a:rPr lang="en-GB" dirty="0"/>
+              <a:t>Cluster 2 clearly represents high-crime areas, while -1 shows unusual or isolated regions.”</a:t>
+            </a:r>
+          </a:p>
+          <a:p>
             <a:endParaRPr lang="en-PK" dirty="0"/>
           </a:p>
         </p:txBody>
@@ -773,7 +847,7 @@
           <a:p>
             <a:fld id="{A9A0EA98-5831-4853-B862-C702E6EB345C}" type="slidenum">
               <a:rPr lang="en-US" smtClean="0"/>
-              <a:t>24</a:t>
+              <a:t>16</a:t>
             </a:fld>
             <a:endParaRPr lang="en-US"/>
           </a:p>
@@ -782,7 +856,7 @@
     </p:spTree>
     <p:extLst>
       <p:ext uri="{BB962C8B-B14F-4D97-AF65-F5344CB8AC3E}">
-        <p14:creationId xmlns:p14="http://schemas.microsoft.com/office/powerpoint/2010/main" val="1360943121"/>
+        <p14:creationId xmlns:p14="http://schemas.microsoft.com/office/powerpoint/2010/main" val="2546560172"/>
       </p:ext>
     </p:extLst>
   </p:cSld>
@@ -842,6 +916,1064 @@
           <a:lstStyle/>
           <a:p>
             <a:r>
+              <a:rPr lang="en-GB" dirty="0"/>
+              <a:t>To answer Research Question 2, we tested two models. Linear Regression was used as a simple baseline, while Random Forest was used because crime data is often complex and non-linear</a:t>
+            </a:r>
+          </a:p>
+          <a:p>
+            <a:endParaRPr lang="en-GB" dirty="0"/>
+          </a:p>
+          <a:p>
+            <a:r>
+              <a:rPr lang="en-GB" dirty="0"/>
+              <a:t>For RQ2, two regression models were used: Linear Regression and Random Forest. The goal is to predict crime count for the next month based on </a:t>
+            </a:r>
+            <a:r>
+              <a:rPr lang="en-GB" b="1" dirty="0"/>
+              <a:t>historical and spatial features</a:t>
+            </a:r>
+            <a:r>
+              <a:rPr lang="en-GB" dirty="0"/>
+              <a:t>. Linear Regression provides a simple baseline by </a:t>
+            </a:r>
+            <a:r>
+              <a:rPr lang="en-GB" dirty="0" err="1"/>
+              <a:t>modeling</a:t>
+            </a:r>
+            <a:r>
+              <a:rPr lang="en-GB" dirty="0"/>
+              <a:t> linear relationships, while Random Forest captures more complex patterns and interactions in the data. This comparison helps evaluate whether crime patterns are simple or require more advanced </a:t>
+            </a:r>
+            <a:r>
+              <a:rPr lang="en-GB" dirty="0" err="1"/>
+              <a:t>modeling</a:t>
+            </a:r>
+            <a:r>
+              <a:rPr lang="en-GB" dirty="0"/>
+              <a:t> techniques.</a:t>
+            </a:r>
+          </a:p>
+          <a:p>
+            <a:endParaRPr lang="en-GB" b="1" dirty="0"/>
+          </a:p>
+          <a:p>
+            <a:r>
+              <a:rPr lang="en-GB" b="1" dirty="0"/>
+              <a:t>Strengths</a:t>
+            </a:r>
+          </a:p>
+          <a:p>
+            <a:pPr>
+              <a:buFont typeface="Arial" panose="020B0604020202020204" pitchFamily="34" charset="0"/>
+              <a:buChar char="•"/>
+            </a:pPr>
+            <a:r>
+              <a:rPr lang="en-GB" dirty="0"/>
+              <a:t>Simple and easy to understand </a:t>
+            </a:r>
+          </a:p>
+          <a:p>
+            <a:pPr>
+              <a:buFont typeface="Arial" panose="020B0604020202020204" pitchFamily="34" charset="0"/>
+              <a:buChar char="•"/>
+            </a:pPr>
+            <a:r>
+              <a:rPr lang="en-GB" dirty="0"/>
+              <a:t>Fast </a:t>
+            </a:r>
+          </a:p>
+          <a:p>
+            <a:pPr>
+              <a:buFont typeface="Arial" panose="020B0604020202020204" pitchFamily="34" charset="0"/>
+              <a:buChar char="•"/>
+            </a:pPr>
+            <a:r>
+              <a:rPr lang="en-GB" dirty="0"/>
+              <a:t>Good baseline model </a:t>
+            </a:r>
+          </a:p>
+          <a:p>
+            <a:r>
+              <a:rPr lang="en-GB" b="1" dirty="0"/>
+              <a:t>Weaknesses (important)</a:t>
+            </a:r>
+          </a:p>
+          <a:p>
+            <a:pPr>
+              <a:buFont typeface="Arial" panose="020B0604020202020204" pitchFamily="34" charset="0"/>
+              <a:buChar char="•"/>
+            </a:pPr>
+            <a:r>
+              <a:rPr lang="en-GB" dirty="0"/>
+              <a:t>Cannot capture complex patterns </a:t>
+            </a:r>
+          </a:p>
+          <a:p>
+            <a:pPr>
+              <a:buFont typeface="Arial" panose="020B0604020202020204" pitchFamily="34" charset="0"/>
+              <a:buChar char="•"/>
+            </a:pPr>
+            <a:r>
+              <a:rPr lang="en-GB" dirty="0"/>
+              <a:t>Struggles with: </a:t>
+            </a:r>
+          </a:p>
+          <a:p>
+            <a:pPr marL="742950" lvl="1" indent="-285750">
+              <a:buFont typeface="Arial" panose="020B0604020202020204" pitchFamily="34" charset="0"/>
+              <a:buChar char="•"/>
+            </a:pPr>
+            <a:r>
+              <a:rPr lang="en-GB" dirty="0"/>
+              <a:t>Non-linear data </a:t>
+            </a:r>
+          </a:p>
+          <a:p>
+            <a:pPr marL="742950" lvl="1" indent="-285750">
+              <a:buFont typeface="Arial" panose="020B0604020202020204" pitchFamily="34" charset="0"/>
+              <a:buChar char="•"/>
+            </a:pPr>
+            <a:r>
+              <a:rPr lang="en-GB" dirty="0"/>
+              <a:t>Interactions between features </a:t>
+            </a:r>
+          </a:p>
+          <a:p>
+            <a:pPr>
+              <a:buFont typeface="Arial" panose="020B0604020202020204" pitchFamily="34" charset="0"/>
+              <a:buChar char="•"/>
+            </a:pPr>
+            <a:r>
+              <a:rPr lang="en-GB" dirty="0"/>
+              <a:t>Sensitive to multicollinearity (you saw this in heatmap)</a:t>
+            </a:r>
+          </a:p>
+          <a:p>
+            <a:endParaRPr lang="en-PK" dirty="0"/>
+          </a:p>
+          <a:p>
+            <a:endParaRPr lang="en-GB" b="1" dirty="0"/>
+          </a:p>
+          <a:p>
+            <a:r>
+              <a:rPr lang="en-GB" b="1" dirty="0"/>
+              <a:t>What it does</a:t>
+            </a:r>
+          </a:p>
+          <a:p>
+            <a:r>
+              <a:rPr lang="en-GB" dirty="0"/>
+              <a:t>Random Forest is:</a:t>
+            </a:r>
+          </a:p>
+          <a:p>
+            <a:r>
+              <a:rPr lang="en-GB" dirty="0"/>
+              <a:t>A collection of many decision trees</a:t>
+            </a:r>
+          </a:p>
+          <a:p>
+            <a:r>
+              <a:rPr lang="en-GB" dirty="0"/>
+              <a:t>Each tree:</a:t>
+            </a:r>
+          </a:p>
+          <a:p>
+            <a:pPr>
+              <a:buFont typeface="Arial" panose="020B0604020202020204" pitchFamily="34" charset="0"/>
+              <a:buChar char="•"/>
+            </a:pPr>
+            <a:r>
+              <a:rPr lang="en-GB" dirty="0"/>
+              <a:t>Makes a prediction </a:t>
+            </a:r>
+          </a:p>
+          <a:p>
+            <a:pPr>
+              <a:buFont typeface="Arial" panose="020B0604020202020204" pitchFamily="34" charset="0"/>
+              <a:buChar char="•"/>
+            </a:pPr>
+            <a:r>
+              <a:rPr lang="en-GB" dirty="0"/>
+              <a:t>Final result = average of all trees </a:t>
+            </a:r>
+          </a:p>
+          <a:p>
+            <a:endParaRPr lang="en-PK" dirty="0"/>
+          </a:p>
+        </p:txBody>
+      </p:sp>
+      <p:sp>
+        <p:nvSpPr>
+          <p:cNvPr id="4" name="Slide Number Placeholder 3"/>
+          <p:cNvSpPr>
+            <a:spLocks noGrp="1"/>
+          </p:cNvSpPr>
+          <p:nvPr>
+            <p:ph type="sldNum" sz="quarter" idx="5"/>
+          </p:nvPr>
+        </p:nvSpPr>
+        <p:spPr/>
+        <p:txBody>
+          <a:bodyPr/>
+          <a:lstStyle/>
+          <a:p>
+            <a:fld id="{A9A0EA98-5831-4853-B862-C702E6EB345C}" type="slidenum">
+              <a:rPr lang="en-US" smtClean="0"/>
+              <a:t>17</a:t>
+            </a:fld>
+            <a:endParaRPr lang="en-US"/>
+          </a:p>
+        </p:txBody>
+      </p:sp>
+    </p:spTree>
+    <p:extLst>
+      <p:ext uri="{BB962C8B-B14F-4D97-AF65-F5344CB8AC3E}">
+        <p14:creationId xmlns:p14="http://schemas.microsoft.com/office/powerpoint/2010/main" val="1419939535"/>
+      </p:ext>
+    </p:extLst>
+  </p:cSld>
+  <p:clrMapOvr>
+    <a:masterClrMapping/>
+  </p:clrMapOvr>
+</p:notes>
+</file>
+
+<file path=ppt/notesSlides/notesSlide12.xml><?xml version="1.0" encoding="utf-8"?>
+<p:notes xmlns:a="http://schemas.openxmlformats.org/drawingml/2006/main" xmlns:r="http://schemas.openxmlformats.org/officeDocument/2006/relationships" xmlns:p="http://schemas.openxmlformats.org/presentationml/2006/main">
+  <p:cSld>
+    <p:spTree>
+      <p:nvGrpSpPr>
+        <p:cNvPr id="1" name=""/>
+        <p:cNvGrpSpPr/>
+        <p:nvPr/>
+      </p:nvGrpSpPr>
+      <p:grpSpPr>
+        <a:xfrm>
+          <a:off x="0" y="0"/>
+          <a:ext cx="0" cy="0"/>
+          <a:chOff x="0" y="0"/>
+          <a:chExt cx="0" cy="0"/>
+        </a:xfrm>
+      </p:grpSpPr>
+      <p:sp>
+        <p:nvSpPr>
+          <p:cNvPr id="2" name="Slide Image Placeholder 1"/>
+          <p:cNvSpPr>
+            <a:spLocks noGrp="1" noRot="1" noChangeAspect="1"/>
+          </p:cNvSpPr>
+          <p:nvPr>
+            <p:ph type="sldImg"/>
+          </p:nvPr>
+        </p:nvSpPr>
+        <p:spPr>
+          <a:xfrm>
+            <a:off x="138113" y="766763"/>
+            <a:ext cx="6823075" cy="3838575"/>
+          </a:xfrm>
+        </p:spPr>
+      </p:sp>
+      <p:sp>
+        <p:nvSpPr>
+          <p:cNvPr id="3" name="Notes Placeholder 2"/>
+          <p:cNvSpPr>
+            <a:spLocks noGrp="1"/>
+          </p:cNvSpPr>
+          <p:nvPr>
+            <p:ph type="body" idx="1"/>
+          </p:nvPr>
+        </p:nvSpPr>
+        <p:spPr/>
+        <p:txBody>
+          <a:bodyPr/>
+          <a:lstStyle/>
+          <a:p>
+            <a:r>
+              <a:rPr lang="en-GB" b="1" dirty="0"/>
+              <a:t>How to understand RMSE</a:t>
+            </a:r>
+          </a:p>
+          <a:p>
+            <a:pPr>
+              <a:buFont typeface="Arial" panose="020B0604020202020204" pitchFamily="34" charset="0"/>
+              <a:buChar char="•"/>
+            </a:pPr>
+            <a:r>
+              <a:rPr lang="en-GB" dirty="0"/>
+              <a:t>Lower RMSE = </a:t>
+            </a:r>
+            <a:r>
+              <a:rPr lang="en-GB" b="1" dirty="0"/>
+              <a:t>better model</a:t>
+            </a:r>
+            <a:r>
+              <a:rPr lang="en-GB" dirty="0"/>
+              <a:t> </a:t>
+            </a:r>
+          </a:p>
+          <a:p>
+            <a:pPr>
+              <a:buFont typeface="Arial" panose="020B0604020202020204" pitchFamily="34" charset="0"/>
+              <a:buChar char="•"/>
+            </a:pPr>
+            <a:r>
+              <a:rPr lang="en-GB" dirty="0"/>
+              <a:t>Higher RMSE = </a:t>
+            </a:r>
+            <a:r>
+              <a:rPr lang="en-GB" b="1" dirty="0"/>
+              <a:t>worse model</a:t>
+            </a:r>
+            <a:r>
+              <a:rPr lang="en-GB" dirty="0"/>
+              <a:t> </a:t>
+            </a:r>
+          </a:p>
+          <a:p>
+            <a:endParaRPr lang="en-PK" dirty="0"/>
+          </a:p>
+        </p:txBody>
+      </p:sp>
+      <p:sp>
+        <p:nvSpPr>
+          <p:cNvPr id="4" name="Slide Number Placeholder 3"/>
+          <p:cNvSpPr>
+            <a:spLocks noGrp="1"/>
+          </p:cNvSpPr>
+          <p:nvPr>
+            <p:ph type="sldNum" sz="quarter" idx="5"/>
+          </p:nvPr>
+        </p:nvSpPr>
+        <p:spPr/>
+        <p:txBody>
+          <a:bodyPr/>
+          <a:lstStyle/>
+          <a:p>
+            <a:fld id="{A9A0EA98-5831-4853-B862-C702E6EB345C}" type="slidenum">
+              <a:rPr lang="en-US" smtClean="0"/>
+              <a:t>18</a:t>
+            </a:fld>
+            <a:endParaRPr lang="en-US"/>
+          </a:p>
+        </p:txBody>
+      </p:sp>
+    </p:spTree>
+    <p:extLst>
+      <p:ext uri="{BB962C8B-B14F-4D97-AF65-F5344CB8AC3E}">
+        <p14:creationId xmlns:p14="http://schemas.microsoft.com/office/powerpoint/2010/main" val="1110769567"/>
+      </p:ext>
+    </p:extLst>
+  </p:cSld>
+  <p:clrMapOvr>
+    <a:masterClrMapping/>
+  </p:clrMapOvr>
+</p:notes>
+</file>
+
+<file path=ppt/notesSlides/notesSlide13.xml><?xml version="1.0" encoding="utf-8"?>
+<p:notes xmlns:a="http://schemas.openxmlformats.org/drawingml/2006/main" xmlns:r="http://schemas.openxmlformats.org/officeDocument/2006/relationships" xmlns:p="http://schemas.openxmlformats.org/presentationml/2006/main">
+  <p:cSld>
+    <p:spTree>
+      <p:nvGrpSpPr>
+        <p:cNvPr id="1" name=""/>
+        <p:cNvGrpSpPr/>
+        <p:nvPr/>
+      </p:nvGrpSpPr>
+      <p:grpSpPr>
+        <a:xfrm>
+          <a:off x="0" y="0"/>
+          <a:ext cx="0" cy="0"/>
+          <a:chOff x="0" y="0"/>
+          <a:chExt cx="0" cy="0"/>
+        </a:xfrm>
+      </p:grpSpPr>
+      <p:sp>
+        <p:nvSpPr>
+          <p:cNvPr id="2" name="Slide Image Placeholder 1"/>
+          <p:cNvSpPr>
+            <a:spLocks noGrp="1" noRot="1" noChangeAspect="1"/>
+          </p:cNvSpPr>
+          <p:nvPr>
+            <p:ph type="sldImg"/>
+          </p:nvPr>
+        </p:nvSpPr>
+        <p:spPr>
+          <a:xfrm>
+            <a:off x="138113" y="766763"/>
+            <a:ext cx="6823075" cy="3838575"/>
+          </a:xfrm>
+        </p:spPr>
+      </p:sp>
+      <p:sp>
+        <p:nvSpPr>
+          <p:cNvPr id="3" name="Notes Placeholder 2"/>
+          <p:cNvSpPr>
+            <a:spLocks noGrp="1"/>
+          </p:cNvSpPr>
+          <p:nvPr>
+            <p:ph type="body" idx="1"/>
+          </p:nvPr>
+        </p:nvSpPr>
+        <p:spPr/>
+        <p:txBody>
+          <a:bodyPr/>
+          <a:lstStyle/>
+          <a:p>
+            <a:r>
+              <a:rPr lang="en-GB" dirty="0"/>
+              <a:t>This plot compares actual and predicted crime values for the Random Forest model. The red line represents perfect predictions. Most points lie close to this line, indicating strong model performance, especially for low and medium crime levels. However, at higher crime values, the points are more spread out and often fall below the line, showing that the model tends to underestimate extreme cases. This suggests that while the model performs well overall, predicting very high crime levels remains more challenging.</a:t>
+            </a:r>
+            <a:endParaRPr lang="en-PK" dirty="0"/>
+          </a:p>
+        </p:txBody>
+      </p:sp>
+      <p:sp>
+        <p:nvSpPr>
+          <p:cNvPr id="4" name="Slide Number Placeholder 3"/>
+          <p:cNvSpPr>
+            <a:spLocks noGrp="1"/>
+          </p:cNvSpPr>
+          <p:nvPr>
+            <p:ph type="sldNum" sz="quarter" idx="5"/>
+          </p:nvPr>
+        </p:nvSpPr>
+        <p:spPr/>
+        <p:txBody>
+          <a:bodyPr/>
+          <a:lstStyle/>
+          <a:p>
+            <a:fld id="{A9A0EA98-5831-4853-B862-C702E6EB345C}" type="slidenum">
+              <a:rPr lang="en-US" smtClean="0"/>
+              <a:t>19</a:t>
+            </a:fld>
+            <a:endParaRPr lang="en-US"/>
+          </a:p>
+        </p:txBody>
+      </p:sp>
+    </p:spTree>
+    <p:extLst>
+      <p:ext uri="{BB962C8B-B14F-4D97-AF65-F5344CB8AC3E}">
+        <p14:creationId xmlns:p14="http://schemas.microsoft.com/office/powerpoint/2010/main" val="641247418"/>
+      </p:ext>
+    </p:extLst>
+  </p:cSld>
+  <p:clrMapOvr>
+    <a:masterClrMapping/>
+  </p:clrMapOvr>
+</p:notes>
+</file>
+
+<file path=ppt/notesSlides/notesSlide14.xml><?xml version="1.0" encoding="utf-8"?>
+<p:notes xmlns:a="http://schemas.openxmlformats.org/drawingml/2006/main" xmlns:r="http://schemas.openxmlformats.org/officeDocument/2006/relationships" xmlns:p="http://schemas.openxmlformats.org/presentationml/2006/main">
+  <p:cSld>
+    <p:spTree>
+      <p:nvGrpSpPr>
+        <p:cNvPr id="1" name=""/>
+        <p:cNvGrpSpPr/>
+        <p:nvPr/>
+      </p:nvGrpSpPr>
+      <p:grpSpPr>
+        <a:xfrm>
+          <a:off x="0" y="0"/>
+          <a:ext cx="0" cy="0"/>
+          <a:chOff x="0" y="0"/>
+          <a:chExt cx="0" cy="0"/>
+        </a:xfrm>
+      </p:grpSpPr>
+      <p:sp>
+        <p:nvSpPr>
+          <p:cNvPr id="2" name="Slide Image Placeholder 1"/>
+          <p:cNvSpPr>
+            <a:spLocks noGrp="1" noRot="1" noChangeAspect="1"/>
+          </p:cNvSpPr>
+          <p:nvPr>
+            <p:ph type="sldImg"/>
+          </p:nvPr>
+        </p:nvSpPr>
+        <p:spPr>
+          <a:xfrm>
+            <a:off x="138113" y="766763"/>
+            <a:ext cx="6823075" cy="3838575"/>
+          </a:xfrm>
+        </p:spPr>
+      </p:sp>
+      <p:sp>
+        <p:nvSpPr>
+          <p:cNvPr id="3" name="Notes Placeholder 2"/>
+          <p:cNvSpPr>
+            <a:spLocks noGrp="1"/>
+          </p:cNvSpPr>
+          <p:nvPr>
+            <p:ph type="body" idx="1"/>
+          </p:nvPr>
+        </p:nvSpPr>
+        <p:spPr/>
+        <p:txBody>
+          <a:bodyPr/>
+          <a:lstStyle/>
+          <a:p>
+            <a:r>
+              <a:rPr lang="en-GB" dirty="0"/>
+              <a:t>The model performed very well on training data but worse on unseen data, meaning it was overfitting</a:t>
+            </a:r>
+            <a:endParaRPr lang="en-PK" dirty="0"/>
+          </a:p>
+        </p:txBody>
+      </p:sp>
+      <p:sp>
+        <p:nvSpPr>
+          <p:cNvPr id="4" name="Slide Number Placeholder 3"/>
+          <p:cNvSpPr>
+            <a:spLocks noGrp="1"/>
+          </p:cNvSpPr>
+          <p:nvPr>
+            <p:ph type="sldNum" sz="quarter" idx="5"/>
+          </p:nvPr>
+        </p:nvSpPr>
+        <p:spPr/>
+        <p:txBody>
+          <a:bodyPr/>
+          <a:lstStyle/>
+          <a:p>
+            <a:fld id="{A9A0EA98-5831-4853-B862-C702E6EB345C}" type="slidenum">
+              <a:rPr lang="en-US" smtClean="0"/>
+              <a:t>20</a:t>
+            </a:fld>
+            <a:endParaRPr lang="en-US"/>
+          </a:p>
+        </p:txBody>
+      </p:sp>
+    </p:spTree>
+    <p:extLst>
+      <p:ext uri="{BB962C8B-B14F-4D97-AF65-F5344CB8AC3E}">
+        <p14:creationId xmlns:p14="http://schemas.microsoft.com/office/powerpoint/2010/main" val="1883837575"/>
+      </p:ext>
+    </p:extLst>
+  </p:cSld>
+  <p:clrMapOvr>
+    <a:masterClrMapping/>
+  </p:clrMapOvr>
+</p:notes>
+</file>
+
+<file path=ppt/notesSlides/notesSlide15.xml><?xml version="1.0" encoding="utf-8"?>
+<p:notes xmlns:a="http://schemas.openxmlformats.org/drawingml/2006/main" xmlns:r="http://schemas.openxmlformats.org/officeDocument/2006/relationships" xmlns:p="http://schemas.openxmlformats.org/presentationml/2006/main">
+  <p:cSld>
+    <p:spTree>
+      <p:nvGrpSpPr>
+        <p:cNvPr id="1" name=""/>
+        <p:cNvGrpSpPr/>
+        <p:nvPr/>
+      </p:nvGrpSpPr>
+      <p:grpSpPr>
+        <a:xfrm>
+          <a:off x="0" y="0"/>
+          <a:ext cx="0" cy="0"/>
+          <a:chOff x="0" y="0"/>
+          <a:chExt cx="0" cy="0"/>
+        </a:xfrm>
+      </p:grpSpPr>
+      <p:sp>
+        <p:nvSpPr>
+          <p:cNvPr id="2" name="Slide Image Placeholder 1"/>
+          <p:cNvSpPr>
+            <a:spLocks noGrp="1" noRot="1" noChangeAspect="1"/>
+          </p:cNvSpPr>
+          <p:nvPr>
+            <p:ph type="sldImg"/>
+          </p:nvPr>
+        </p:nvSpPr>
+        <p:spPr>
+          <a:xfrm>
+            <a:off x="138113" y="766763"/>
+            <a:ext cx="6823075" cy="3838575"/>
+          </a:xfrm>
+        </p:spPr>
+      </p:sp>
+      <p:sp>
+        <p:nvSpPr>
+          <p:cNvPr id="3" name="Notes Placeholder 2"/>
+          <p:cNvSpPr>
+            <a:spLocks noGrp="1"/>
+          </p:cNvSpPr>
+          <p:nvPr>
+            <p:ph type="body" idx="1"/>
+          </p:nvPr>
+        </p:nvSpPr>
+        <p:spPr/>
+        <p:txBody>
+          <a:bodyPr/>
+          <a:lstStyle/>
+          <a:p>
+            <a:pPr marL="0" marR="0" lvl="0" indent="0" algn="l" defTabSz="914400" rtl="0" eaLnBrk="1" fontAlgn="base" latinLnBrk="0" hangingPunct="1">
+              <a:lnSpc>
+                <a:spcPct val="100000"/>
+              </a:lnSpc>
+              <a:spcBef>
+                <a:spcPct val="30000"/>
+              </a:spcBef>
+              <a:spcAft>
+                <a:spcPct val="0"/>
+              </a:spcAft>
+              <a:buClrTx/>
+              <a:buSzTx/>
+              <a:buFontTx/>
+              <a:buNone/>
+              <a:tabLst/>
+              <a:defRPr/>
+            </a:pPr>
+            <a:r>
+              <a:rPr lang="en-GB" b="1" dirty="0"/>
+              <a:t>We tested → We compared → We validated → We found issue → We improved it</a:t>
+            </a:r>
+            <a:endParaRPr lang="en-GB" dirty="0"/>
+          </a:p>
+          <a:p>
+            <a:endParaRPr lang="en-GB" dirty="0"/>
+          </a:p>
+          <a:p>
+            <a:r>
+              <a:rPr lang="en-GB" dirty="0"/>
+              <a:t>Regularisation means:</a:t>
+            </a:r>
+          </a:p>
+          <a:p>
+            <a:pPr>
+              <a:buFont typeface="Arial" panose="020B0604020202020204" pitchFamily="34" charset="0"/>
+              <a:buChar char="•"/>
+            </a:pPr>
+            <a:r>
+              <a:rPr lang="en-GB" dirty="0"/>
+              <a:t>Limiting tree depth </a:t>
+            </a:r>
+          </a:p>
+          <a:p>
+            <a:pPr>
+              <a:buFont typeface="Arial" panose="020B0604020202020204" pitchFamily="34" charset="0"/>
+              <a:buChar char="•"/>
+            </a:pPr>
+            <a:r>
+              <a:rPr lang="en-GB" dirty="0"/>
+              <a:t>Reducing splits </a:t>
+            </a:r>
+          </a:p>
+          <a:p>
+            <a:pPr>
+              <a:buFont typeface="Arial" panose="020B0604020202020204" pitchFamily="34" charset="0"/>
+              <a:buChar char="•"/>
+            </a:pPr>
+            <a:r>
+              <a:rPr lang="en-GB" dirty="0"/>
+              <a:t>Making trees less complex</a:t>
+            </a:r>
+          </a:p>
+          <a:p>
+            <a:pPr>
+              <a:buFont typeface="Arial" panose="020B0604020202020204" pitchFamily="34" charset="0"/>
+              <a:buChar char="•"/>
+            </a:pPr>
+            <a:endParaRPr lang="en-GB" dirty="0"/>
+          </a:p>
+          <a:p>
+            <a:r>
+              <a:rPr lang="en-GB" dirty="0"/>
+              <a:t>So instead of memorising data, the model:</a:t>
+            </a:r>
+          </a:p>
+          <a:p>
+            <a:r>
+              <a:rPr lang="en-GB" dirty="0"/>
+              <a:t>Learns more general patterns</a:t>
+            </a:r>
+          </a:p>
+          <a:p>
+            <a:endParaRPr lang="en-PK" dirty="0"/>
+          </a:p>
+          <a:p>
+            <a:endParaRPr lang="en-PK" dirty="0"/>
+          </a:p>
+          <a:p>
+            <a:r>
+              <a:rPr lang="en-GB" b="1" dirty="0"/>
+              <a:t>Your results </a:t>
+            </a:r>
+          </a:p>
+          <a:p>
+            <a:r>
+              <a:rPr lang="en-GB" b="1" dirty="0"/>
+              <a:t>Before (Overfitting slide)</a:t>
+            </a:r>
+          </a:p>
+          <a:p>
+            <a:pPr>
+              <a:buFont typeface="Arial" panose="020B0604020202020204" pitchFamily="34" charset="0"/>
+              <a:buChar char="•"/>
+            </a:pPr>
+            <a:r>
+              <a:rPr lang="en-GB" dirty="0"/>
+              <a:t>Train RMSE = </a:t>
+            </a:r>
+            <a:r>
+              <a:rPr lang="en-GB" b="1" dirty="0"/>
+              <a:t>1.83</a:t>
+            </a:r>
+            <a:r>
+              <a:rPr lang="en-GB" dirty="0"/>
+              <a:t> </a:t>
+            </a:r>
+          </a:p>
+          <a:p>
+            <a:pPr>
+              <a:buFont typeface="Arial" panose="020B0604020202020204" pitchFamily="34" charset="0"/>
+              <a:buChar char="•"/>
+            </a:pPr>
+            <a:r>
+              <a:rPr lang="en-GB" dirty="0"/>
+              <a:t>Test RMSE = </a:t>
+            </a:r>
+            <a:r>
+              <a:rPr lang="en-GB" b="1" dirty="0"/>
+              <a:t>4.84</a:t>
+            </a:r>
+            <a:r>
+              <a:rPr lang="en-GB" dirty="0"/>
+              <a:t> </a:t>
+            </a:r>
+          </a:p>
+          <a:p>
+            <a:r>
+              <a:rPr lang="en-PK" dirty="0"/>
+              <a:t>👉 </a:t>
+            </a:r>
+            <a:r>
+              <a:rPr lang="en-GB" dirty="0"/>
+              <a:t>Big gap → overfitting</a:t>
+            </a:r>
+          </a:p>
+          <a:p>
+            <a:r>
+              <a:rPr lang="en-GB" b="1" dirty="0"/>
+              <a:t>After Regularisation</a:t>
+            </a:r>
+          </a:p>
+          <a:p>
+            <a:pPr>
+              <a:buFont typeface="Arial" panose="020B0604020202020204" pitchFamily="34" charset="0"/>
+              <a:buChar char="•"/>
+            </a:pPr>
+            <a:r>
+              <a:rPr lang="en-GB" dirty="0"/>
+              <a:t>Train RMSE = </a:t>
+            </a:r>
+            <a:r>
+              <a:rPr lang="en-GB" b="1" dirty="0"/>
+              <a:t>3.98</a:t>
+            </a:r>
+            <a:r>
+              <a:rPr lang="en-GB" dirty="0"/>
+              <a:t> </a:t>
+            </a:r>
+          </a:p>
+          <a:p>
+            <a:pPr>
+              <a:buFont typeface="Arial" panose="020B0604020202020204" pitchFamily="34" charset="0"/>
+              <a:buChar char="•"/>
+            </a:pPr>
+            <a:r>
+              <a:rPr lang="en-GB" dirty="0"/>
+              <a:t>Test RMSE = </a:t>
+            </a:r>
+            <a:r>
+              <a:rPr lang="en-GB" b="1" dirty="0"/>
+              <a:t>4.85</a:t>
+            </a:r>
+            <a:endParaRPr lang="en-GB" dirty="0"/>
+          </a:p>
+          <a:p>
+            <a:endParaRPr lang="en-PK" dirty="0"/>
+          </a:p>
+        </p:txBody>
+      </p:sp>
+      <p:sp>
+        <p:nvSpPr>
+          <p:cNvPr id="4" name="Slide Number Placeholder 3"/>
+          <p:cNvSpPr>
+            <a:spLocks noGrp="1"/>
+          </p:cNvSpPr>
+          <p:nvPr>
+            <p:ph type="sldNum" sz="quarter" idx="5"/>
+          </p:nvPr>
+        </p:nvSpPr>
+        <p:spPr/>
+        <p:txBody>
+          <a:bodyPr/>
+          <a:lstStyle/>
+          <a:p>
+            <a:fld id="{A9A0EA98-5831-4853-B862-C702E6EB345C}" type="slidenum">
+              <a:rPr lang="en-US" smtClean="0"/>
+              <a:t>21</a:t>
+            </a:fld>
+            <a:endParaRPr lang="en-US"/>
+          </a:p>
+        </p:txBody>
+      </p:sp>
+    </p:spTree>
+    <p:extLst>
+      <p:ext uri="{BB962C8B-B14F-4D97-AF65-F5344CB8AC3E}">
+        <p14:creationId xmlns:p14="http://schemas.microsoft.com/office/powerpoint/2010/main" val="1396846287"/>
+      </p:ext>
+    </p:extLst>
+  </p:cSld>
+  <p:clrMapOvr>
+    <a:masterClrMapping/>
+  </p:clrMapOvr>
+</p:notes>
+</file>
+
+<file path=ppt/notesSlides/notesSlide16.xml><?xml version="1.0" encoding="utf-8"?>
+<p:notes xmlns:a="http://schemas.openxmlformats.org/drawingml/2006/main" xmlns:r="http://schemas.openxmlformats.org/officeDocument/2006/relationships" xmlns:p="http://schemas.openxmlformats.org/presentationml/2006/main">
+  <p:cSld>
+    <p:spTree>
+      <p:nvGrpSpPr>
+        <p:cNvPr id="1" name=""/>
+        <p:cNvGrpSpPr/>
+        <p:nvPr/>
+      </p:nvGrpSpPr>
+      <p:grpSpPr>
+        <a:xfrm>
+          <a:off x="0" y="0"/>
+          <a:ext cx="0" cy="0"/>
+          <a:chOff x="0" y="0"/>
+          <a:chExt cx="0" cy="0"/>
+        </a:xfrm>
+      </p:grpSpPr>
+      <p:sp>
+        <p:nvSpPr>
+          <p:cNvPr id="2" name="Slide Image Placeholder 1"/>
+          <p:cNvSpPr>
+            <a:spLocks noGrp="1" noRot="1" noChangeAspect="1"/>
+          </p:cNvSpPr>
+          <p:nvPr>
+            <p:ph type="sldImg"/>
+          </p:nvPr>
+        </p:nvSpPr>
+        <p:spPr>
+          <a:xfrm>
+            <a:off x="138113" y="766763"/>
+            <a:ext cx="6823075" cy="3838575"/>
+          </a:xfrm>
+        </p:spPr>
+      </p:sp>
+      <p:sp>
+        <p:nvSpPr>
+          <p:cNvPr id="3" name="Notes Placeholder 2"/>
+          <p:cNvSpPr>
+            <a:spLocks noGrp="1"/>
+          </p:cNvSpPr>
+          <p:nvPr>
+            <p:ph type="body" idx="1"/>
+          </p:nvPr>
+        </p:nvSpPr>
+        <p:spPr/>
+        <p:txBody>
+          <a:bodyPr/>
+          <a:lstStyle/>
+          <a:p>
+            <a:r>
+              <a:rPr lang="en-GB" dirty="0"/>
+              <a:t>The feature importance results show that the most influential factor in predicting crime is the previous crime count (lag1), indicating strong temporal dependency. The dominant crime type and location features also contribute significantly, reflecting spatial clustering and crime patterns. Other features such as month, year, and seasonal indicators have relatively low importance, suggesting they have a weaker direct impact on crime prediction.</a:t>
+            </a:r>
+          </a:p>
+          <a:p>
+            <a:endParaRPr lang="en-PK" dirty="0"/>
+          </a:p>
+        </p:txBody>
+      </p:sp>
+      <p:sp>
+        <p:nvSpPr>
+          <p:cNvPr id="4" name="Slide Number Placeholder 3"/>
+          <p:cNvSpPr>
+            <a:spLocks noGrp="1"/>
+          </p:cNvSpPr>
+          <p:nvPr>
+            <p:ph type="sldNum" sz="quarter" idx="5"/>
+          </p:nvPr>
+        </p:nvSpPr>
+        <p:spPr/>
+        <p:txBody>
+          <a:bodyPr/>
+          <a:lstStyle/>
+          <a:p>
+            <a:fld id="{A9A0EA98-5831-4853-B862-C702E6EB345C}" type="slidenum">
+              <a:rPr lang="en-US" smtClean="0"/>
+              <a:t>23</a:t>
+            </a:fld>
+            <a:endParaRPr lang="en-US"/>
+          </a:p>
+        </p:txBody>
+      </p:sp>
+    </p:spTree>
+    <p:extLst>
+      <p:ext uri="{BB962C8B-B14F-4D97-AF65-F5344CB8AC3E}">
+        <p14:creationId xmlns:p14="http://schemas.microsoft.com/office/powerpoint/2010/main" val="3476076382"/>
+      </p:ext>
+    </p:extLst>
+  </p:cSld>
+  <p:clrMapOvr>
+    <a:masterClrMapping/>
+  </p:clrMapOvr>
+</p:notes>
+</file>
+
+<file path=ppt/notesSlides/notesSlide17.xml><?xml version="1.0" encoding="utf-8"?>
+<p:notes xmlns:a="http://schemas.openxmlformats.org/drawingml/2006/main" xmlns:r="http://schemas.openxmlformats.org/officeDocument/2006/relationships" xmlns:p="http://schemas.openxmlformats.org/presentationml/2006/main">
+  <p:cSld>
+    <p:spTree>
+      <p:nvGrpSpPr>
+        <p:cNvPr id="1" name=""/>
+        <p:cNvGrpSpPr/>
+        <p:nvPr/>
+      </p:nvGrpSpPr>
+      <p:grpSpPr>
+        <a:xfrm>
+          <a:off x="0" y="0"/>
+          <a:ext cx="0" cy="0"/>
+          <a:chOff x="0" y="0"/>
+          <a:chExt cx="0" cy="0"/>
+        </a:xfrm>
+      </p:grpSpPr>
+      <p:sp>
+        <p:nvSpPr>
+          <p:cNvPr id="2" name="Slide Image Placeholder 1"/>
+          <p:cNvSpPr>
+            <a:spLocks noGrp="1" noRot="1" noChangeAspect="1"/>
+          </p:cNvSpPr>
+          <p:nvPr>
+            <p:ph type="sldImg"/>
+          </p:nvPr>
+        </p:nvSpPr>
+        <p:spPr>
+          <a:xfrm>
+            <a:off x="138113" y="766763"/>
+            <a:ext cx="6823075" cy="3838575"/>
+          </a:xfrm>
+        </p:spPr>
+      </p:sp>
+      <p:sp>
+        <p:nvSpPr>
+          <p:cNvPr id="3" name="Notes Placeholder 2"/>
+          <p:cNvSpPr>
+            <a:spLocks noGrp="1"/>
+          </p:cNvSpPr>
+          <p:nvPr>
+            <p:ph type="body" idx="1"/>
+          </p:nvPr>
+        </p:nvSpPr>
+        <p:spPr/>
+        <p:txBody>
+          <a:bodyPr/>
+          <a:lstStyle/>
+          <a:p>
+            <a:r>
+              <a:rPr lang="en-GB" dirty="0"/>
+              <a:t>SHAP explains how much each feature pushes a prediction up or down.</a:t>
+            </a:r>
+          </a:p>
+          <a:p>
+            <a:r>
+              <a:rPr lang="en-GB" dirty="0"/>
+              <a:t>The SHAP analysis provides a detailed explanation of how each feature influences predictions. The summary plot shows that higher values of dominant crime type and previous crime significantly increase predicted crime levels. The global importance plot confirms that these features have the largest overall impact, while location features contribute less. This demonstrates that both temporal and crime-type factors are the main drivers of the model’s predictions.</a:t>
+            </a:r>
+            <a:endParaRPr lang="en-PK" dirty="0"/>
+          </a:p>
+        </p:txBody>
+      </p:sp>
+      <p:sp>
+        <p:nvSpPr>
+          <p:cNvPr id="4" name="Slide Number Placeholder 3"/>
+          <p:cNvSpPr>
+            <a:spLocks noGrp="1"/>
+          </p:cNvSpPr>
+          <p:nvPr>
+            <p:ph type="sldNum" sz="quarter" idx="5"/>
+          </p:nvPr>
+        </p:nvSpPr>
+        <p:spPr/>
+        <p:txBody>
+          <a:bodyPr/>
+          <a:lstStyle/>
+          <a:p>
+            <a:fld id="{A9A0EA98-5831-4853-B862-C702E6EB345C}" type="slidenum">
+              <a:rPr lang="en-US" smtClean="0"/>
+              <a:t>24</a:t>
+            </a:fld>
+            <a:endParaRPr lang="en-US"/>
+          </a:p>
+        </p:txBody>
+      </p:sp>
+    </p:spTree>
+    <p:extLst>
+      <p:ext uri="{BB962C8B-B14F-4D97-AF65-F5344CB8AC3E}">
+        <p14:creationId xmlns:p14="http://schemas.microsoft.com/office/powerpoint/2010/main" val="1360943121"/>
+      </p:ext>
+    </p:extLst>
+  </p:cSld>
+  <p:clrMapOvr>
+    <a:masterClrMapping/>
+  </p:clrMapOvr>
+</p:notes>
+</file>
+
+<file path=ppt/notesSlides/notesSlide18.xml><?xml version="1.0" encoding="utf-8"?>
+<p:notes xmlns:a="http://schemas.openxmlformats.org/drawingml/2006/main" xmlns:r="http://schemas.openxmlformats.org/officeDocument/2006/relationships" xmlns:p="http://schemas.openxmlformats.org/presentationml/2006/main">
+  <p:cSld>
+    <p:spTree>
+      <p:nvGrpSpPr>
+        <p:cNvPr id="1" name=""/>
+        <p:cNvGrpSpPr/>
+        <p:nvPr/>
+      </p:nvGrpSpPr>
+      <p:grpSpPr>
+        <a:xfrm>
+          <a:off x="0" y="0"/>
+          <a:ext cx="0" cy="0"/>
+          <a:chOff x="0" y="0"/>
+          <a:chExt cx="0" cy="0"/>
+        </a:xfrm>
+      </p:grpSpPr>
+      <p:sp>
+        <p:nvSpPr>
+          <p:cNvPr id="2" name="Slide Image Placeholder 1"/>
+          <p:cNvSpPr>
+            <a:spLocks noGrp="1" noRot="1" noChangeAspect="1"/>
+          </p:cNvSpPr>
+          <p:nvPr>
+            <p:ph type="sldImg"/>
+          </p:nvPr>
+        </p:nvSpPr>
+        <p:spPr>
+          <a:xfrm>
+            <a:off x="138113" y="766763"/>
+            <a:ext cx="6823075" cy="3838575"/>
+          </a:xfrm>
+        </p:spPr>
+      </p:sp>
+      <p:sp>
+        <p:nvSpPr>
+          <p:cNvPr id="3" name="Notes Placeholder 2"/>
+          <p:cNvSpPr>
+            <a:spLocks noGrp="1"/>
+          </p:cNvSpPr>
+          <p:nvPr>
+            <p:ph type="body" idx="1"/>
+          </p:nvPr>
+        </p:nvSpPr>
+        <p:spPr/>
+        <p:txBody>
+          <a:bodyPr/>
+          <a:lstStyle/>
+          <a:p>
+            <a:r>
               <a:rPr lang="en-GB" b="1" dirty="0"/>
               <a:t>Symmetrical shape</a:t>
             </a:r>
@@ -1016,7 +2148,13 @@
   <p:cSld>
     <p:spTree>
       <p:nvGrpSpPr>
-        <p:cNvPr id="1" name=""/>
+        <p:cNvPr id="1" name="">
+          <a:extLst>
+            <a:ext uri="{FF2B5EF4-FFF2-40B4-BE49-F238E27FC236}">
+              <a16:creationId xmlns:a16="http://schemas.microsoft.com/office/drawing/2014/main" id="{3B25B25E-1D5A-D85C-B15B-FF1BC508522A}"/>
+            </a:ext>
+          </a:extLst>
+        </p:cNvPr>
         <p:cNvGrpSpPr/>
         <p:nvPr/>
       </p:nvGrpSpPr>
@@ -1030,7 +2168,13 @@
       </p:grpSpPr>
       <p:sp>
         <p:nvSpPr>
-          <p:cNvPr id="2" name="Slide Image Placeholder 1"/>
+          <p:cNvPr id="2" name="Slide Image Placeholder 1">
+            <a:extLst>
+              <a:ext uri="{FF2B5EF4-FFF2-40B4-BE49-F238E27FC236}">
+                <a16:creationId xmlns:a16="http://schemas.microsoft.com/office/drawing/2014/main" id="{8FBE9BC6-2493-69E9-E1AA-CA281F6A0597}"/>
+              </a:ext>
+            </a:extLst>
+          </p:cNvPr>
           <p:cNvSpPr>
             <a:spLocks noGrp="1" noRot="1" noChangeAspect="1"/>
           </p:cNvSpPr>
@@ -1047,7 +2191,13 @@
       </p:sp>
       <p:sp>
         <p:nvSpPr>
-          <p:cNvPr id="3" name="Notes Placeholder 2"/>
+          <p:cNvPr id="3" name="Notes Placeholder 2">
+            <a:extLst>
+              <a:ext uri="{FF2B5EF4-FFF2-40B4-BE49-F238E27FC236}">
+                <a16:creationId xmlns:a16="http://schemas.microsoft.com/office/drawing/2014/main" id="{99791357-A708-A659-56DD-E8F11E8CB713}"/>
+              </a:ext>
+            </a:extLst>
+          </p:cNvPr>
           <p:cNvSpPr>
             <a:spLocks noGrp="1"/>
           </p:cNvSpPr>
@@ -1061,158 +2211,52 @@
           <a:lstStyle/>
           <a:p>
             <a:r>
-              <a:rPr lang="en-GB" b="1" dirty="0"/>
-              <a:t>Longitude (X-axis)</a:t>
-            </a:r>
-          </a:p>
-          <a:p>
-            <a:pPr>
-              <a:buFont typeface="Arial" panose="020B0604020202020204" pitchFamily="34" charset="0"/>
-              <a:buChar char="•"/>
-            </a:pPr>
-            <a:r>
-              <a:rPr lang="en-GB" dirty="0"/>
-              <a:t>Moves </a:t>
-            </a:r>
-            <a:r>
-              <a:rPr lang="en-GB" b="1" dirty="0"/>
-              <a:t>left → west</a:t>
-            </a:r>
-            <a:r>
-              <a:rPr lang="en-GB" dirty="0"/>
-              <a:t> </a:t>
-            </a:r>
-          </a:p>
-          <a:p>
-            <a:pPr>
-              <a:buFont typeface="Arial" panose="020B0604020202020204" pitchFamily="34" charset="0"/>
-              <a:buChar char="•"/>
-            </a:pPr>
-            <a:r>
-              <a:rPr lang="en-GB" dirty="0"/>
-              <a:t>Moves </a:t>
-            </a:r>
-            <a:r>
-              <a:rPr lang="en-GB" b="1" dirty="0"/>
-              <a:t>right → east</a:t>
-            </a:r>
-            <a:r>
-              <a:rPr lang="en-GB" dirty="0"/>
-              <a:t> </a:t>
-            </a:r>
-          </a:p>
-          <a:p>
-            <a:r>
-              <a:rPr lang="en-GB" dirty="0"/>
-              <a:t>Examples:</a:t>
-            </a:r>
-          </a:p>
-          <a:p>
-            <a:pPr>
-              <a:buFont typeface="Arial" panose="020B0604020202020204" pitchFamily="34" charset="0"/>
-              <a:buChar char="•"/>
-            </a:pPr>
-            <a:r>
-              <a:rPr lang="en-GB" dirty="0"/>
-              <a:t>-5 = far west (like Wales side) </a:t>
-            </a:r>
-          </a:p>
-          <a:p>
-            <a:pPr>
-              <a:buFont typeface="Arial" panose="020B0604020202020204" pitchFamily="34" charset="0"/>
-              <a:buChar char="•"/>
-            </a:pPr>
-            <a:r>
-              <a:rPr lang="en-GB" dirty="0"/>
-              <a:t>-2 = central UK (Manchester area) </a:t>
-            </a:r>
-          </a:p>
-          <a:p>
-            <a:pPr>
-              <a:buFont typeface="Arial" panose="020B0604020202020204" pitchFamily="34" charset="0"/>
-              <a:buChar char="•"/>
-            </a:pPr>
-            <a:r>
-              <a:rPr lang="en-GB" dirty="0"/>
-              <a:t>0 = east side (London region) </a:t>
-            </a:r>
-          </a:p>
-          <a:p>
-            <a:r>
-              <a:rPr lang="en-GB" b="1" dirty="0"/>
-              <a:t>Latitude (Y-axis)</a:t>
-            </a:r>
-          </a:p>
-          <a:p>
-            <a:pPr>
-              <a:buFont typeface="Arial" panose="020B0604020202020204" pitchFamily="34" charset="0"/>
-              <a:buChar char="•"/>
-            </a:pPr>
-            <a:r>
-              <a:rPr lang="en-GB" dirty="0"/>
-              <a:t>Moves </a:t>
-            </a:r>
-            <a:r>
-              <a:rPr lang="en-GB" b="1" dirty="0"/>
-              <a:t>down → south</a:t>
-            </a:r>
-            <a:r>
-              <a:rPr lang="en-GB" dirty="0"/>
-              <a:t> </a:t>
-            </a:r>
-          </a:p>
-          <a:p>
-            <a:pPr>
-              <a:buFont typeface="Arial" panose="020B0604020202020204" pitchFamily="34" charset="0"/>
-              <a:buChar char="•"/>
-            </a:pPr>
-            <a:r>
-              <a:rPr lang="en-GB" dirty="0"/>
-              <a:t>Moves </a:t>
-            </a:r>
-            <a:r>
-              <a:rPr lang="en-GB" b="1" dirty="0"/>
-              <a:t>up → north</a:t>
-            </a:r>
-            <a:r>
-              <a:rPr lang="en-GB" dirty="0"/>
-              <a:t> </a:t>
-            </a:r>
-          </a:p>
-          <a:p>
-            <a:r>
-              <a:rPr lang="en-GB" dirty="0"/>
-              <a:t>Examples:</a:t>
-            </a:r>
-          </a:p>
-          <a:p>
-            <a:pPr>
-              <a:buFont typeface="Arial" panose="020B0604020202020204" pitchFamily="34" charset="0"/>
-              <a:buChar char="•"/>
-            </a:pPr>
-            <a:r>
-              <a:rPr lang="en-GB" dirty="0"/>
-              <a:t>51.5 = London area </a:t>
-            </a:r>
-          </a:p>
-          <a:p>
-            <a:pPr>
-              <a:buFont typeface="Arial" panose="020B0604020202020204" pitchFamily="34" charset="0"/>
-              <a:buChar char="•"/>
-            </a:pPr>
-            <a:r>
-              <a:rPr lang="en-GB" dirty="0"/>
-              <a:t>52.5 = Midlands / Manchester </a:t>
-            </a:r>
-          </a:p>
-          <a:p>
-            <a:pPr>
-              <a:buFont typeface="Arial" panose="020B0604020202020204" pitchFamily="34" charset="0"/>
-              <a:buChar char="•"/>
-            </a:pPr>
-            <a:r>
-              <a:rPr lang="en-GB" dirty="0"/>
-              <a:t>54+ = northern UK</a:t>
+              <a:rPr lang="en-GB" sz="1200" dirty="0"/>
+              <a:t>Machine learning can help by:</a:t>
+            </a:r>
+          </a:p>
+          <a:p>
+            <a:r>
+              <a:rPr lang="en-GB" sz="1200" dirty="0"/>
+              <a:t>Finding </a:t>
+            </a:r>
+            <a:r>
+              <a:rPr lang="en-GB" sz="1200" b="1" dirty="0"/>
+              <a:t>patterns</a:t>
+            </a:r>
+            <a:r>
+              <a:rPr lang="en-GB" sz="1200" dirty="0"/>
+              <a:t> in crime data </a:t>
+            </a:r>
+          </a:p>
+          <a:p>
+            <a:r>
+              <a:rPr lang="en-GB" sz="1200" dirty="0"/>
+              <a:t>Identifying </a:t>
+            </a:r>
+            <a:r>
+              <a:rPr lang="en-GB" sz="1200" b="1" dirty="0"/>
+              <a:t>high-risk areas </a:t>
+            </a:r>
+          </a:p>
+          <a:p>
+            <a:r>
+              <a:rPr lang="en-GB" sz="1200" dirty="0"/>
+              <a:t>Predicting </a:t>
+            </a:r>
+            <a:r>
+              <a:rPr lang="en-GB" sz="1200" b="1" dirty="0"/>
+              <a:t>future</a:t>
+            </a:r>
+            <a:r>
+              <a:rPr lang="en-GB" sz="1200" dirty="0"/>
+              <a:t> crime levels </a:t>
+            </a:r>
+          </a:p>
+          <a:p>
+            <a:r>
+              <a:rPr lang="en-GB" sz="1200" dirty="0"/>
+              <a:t>This project uses real crime data to support better decisions for safety and planning.</a:t>
             </a:r>
           </a:p>
           <a:p>
@@ -1222,7 +2266,13 @@
       </p:sp>
       <p:sp>
         <p:nvSpPr>
-          <p:cNvPr id="4" name="Slide Number Placeholder 3"/>
+          <p:cNvPr id="4" name="Slide Number Placeholder 3">
+            <a:extLst>
+              <a:ext uri="{FF2B5EF4-FFF2-40B4-BE49-F238E27FC236}">
+                <a16:creationId xmlns:a16="http://schemas.microsoft.com/office/drawing/2014/main" id="{C338111F-5EBF-CF91-B158-047CE28E1849}"/>
+              </a:ext>
+            </a:extLst>
+          </p:cNvPr>
           <p:cNvSpPr>
             <a:spLocks noGrp="1"/>
           </p:cNvSpPr>
@@ -1237,7 +2287,7 @@
           <a:p>
             <a:fld id="{A9A0EA98-5831-4853-B862-C702E6EB345C}" type="slidenum">
               <a:rPr lang="en-US" smtClean="0"/>
-              <a:t>14</a:t>
+              <a:t>3</a:t>
             </a:fld>
             <a:endParaRPr lang="en-US"/>
           </a:p>
@@ -1246,7 +2296,7 @@
     </p:spTree>
     <p:extLst>
       <p:ext uri="{BB962C8B-B14F-4D97-AF65-F5344CB8AC3E}">
-        <p14:creationId xmlns:p14="http://schemas.microsoft.com/office/powerpoint/2010/main" val="2721712962"/>
+        <p14:creationId xmlns:p14="http://schemas.microsoft.com/office/powerpoint/2010/main" val="1799000157"/>
       </p:ext>
     </p:extLst>
   </p:cSld>
@@ -1306,202 +2356,28 @@
           <a:lstStyle/>
           <a:p>
             <a:r>
-              <a:rPr lang="en-GB" b="1" dirty="0"/>
-              <a:t>What K-Means does</a:t>
-            </a:r>
-          </a:p>
-          <a:p>
-            <a:r>
-              <a:rPr lang="en-GB" dirty="0"/>
-              <a:t>K-Means:</a:t>
-            </a:r>
-          </a:p>
-          <a:p>
-            <a:pPr>
-              <a:buFont typeface="Arial" panose="020B0604020202020204" pitchFamily="34" charset="0"/>
-              <a:buChar char="•"/>
-            </a:pPr>
-            <a:r>
-              <a:rPr lang="en-GB" dirty="0"/>
-              <a:t>Divides data into </a:t>
-            </a:r>
-            <a:r>
-              <a:rPr lang="en-GB" b="1" dirty="0"/>
-              <a:t>K fixed clusters</a:t>
-            </a:r>
-            <a:r>
-              <a:rPr lang="en-GB" dirty="0"/>
-              <a:t> </a:t>
-            </a:r>
-          </a:p>
-          <a:p>
-            <a:pPr>
-              <a:buFont typeface="Arial" panose="020B0604020202020204" pitchFamily="34" charset="0"/>
-              <a:buChar char="•"/>
-            </a:pPr>
-            <a:r>
-              <a:rPr lang="en-GB" b="1" dirty="0"/>
-              <a:t>Each cluster has a </a:t>
-            </a:r>
-            <a:r>
-              <a:rPr lang="en-GB" b="1" dirty="0" err="1"/>
-              <a:t>center</a:t>
-            </a:r>
-            <a:r>
-              <a:rPr lang="en-GB" b="1" dirty="0"/>
-              <a:t> (</a:t>
-            </a:r>
-            <a:r>
-              <a:rPr lang="en-GB" b="1" i="1" dirty="0"/>
-              <a:t>centroid</a:t>
-            </a:r>
-            <a:r>
-              <a:rPr lang="en-GB" b="1" dirty="0"/>
-              <a:t>) </a:t>
-            </a:r>
-          </a:p>
-          <a:p>
-            <a:pPr>
-              <a:buFont typeface="Arial" panose="020B0604020202020204" pitchFamily="34" charset="0"/>
-              <a:buChar char="•"/>
-            </a:pPr>
-            <a:r>
-              <a:rPr lang="en-GB" dirty="0"/>
-              <a:t>Points are assigned to the nearest </a:t>
-            </a:r>
-            <a:r>
-              <a:rPr lang="en-GB" dirty="0" err="1"/>
-              <a:t>center</a:t>
-            </a:r>
-            <a:r>
-              <a:rPr lang="en-GB" dirty="0"/>
-              <a:t> </a:t>
-            </a:r>
-          </a:p>
-          <a:p>
-            <a:r>
-              <a:rPr lang="en-GB" b="1" dirty="0"/>
-              <a:t>Key assumption:</a:t>
-            </a:r>
-          </a:p>
-          <a:p>
-            <a:r>
-              <a:rPr lang="en-GB" dirty="0"/>
-              <a:t>Clusters are:</a:t>
-            </a:r>
-          </a:p>
-          <a:p>
-            <a:pPr>
-              <a:buFont typeface="Arial" panose="020B0604020202020204" pitchFamily="34" charset="0"/>
-              <a:buChar char="•"/>
-            </a:pPr>
-            <a:r>
-              <a:rPr lang="en-GB" dirty="0"/>
-              <a:t>Circular </a:t>
-            </a:r>
-          </a:p>
-          <a:p>
-            <a:pPr>
-              <a:buFont typeface="Arial" panose="020B0604020202020204" pitchFamily="34" charset="0"/>
-              <a:buChar char="•"/>
-            </a:pPr>
-            <a:r>
-              <a:rPr lang="en-GB" dirty="0"/>
-              <a:t>Similar size </a:t>
-            </a:r>
-          </a:p>
-          <a:p>
-            <a:pPr>
-              <a:buFont typeface="Arial" panose="020B0604020202020204" pitchFamily="34" charset="0"/>
-              <a:buChar char="•"/>
-            </a:pPr>
-            <a:r>
-              <a:rPr lang="en-GB" dirty="0"/>
-              <a:t>Evenly distributed</a:t>
-            </a:r>
-          </a:p>
-          <a:p>
-            <a:endParaRPr lang="en-PK" dirty="0"/>
-          </a:p>
-          <a:p>
-            <a:endParaRPr lang="en-PK" dirty="0"/>
-          </a:p>
-          <a:p>
-            <a:r>
-              <a:rPr lang="en-GB" b="1" dirty="0"/>
-              <a:t>What DBSCAN does</a:t>
-            </a:r>
-          </a:p>
-          <a:p>
-            <a:r>
-              <a:rPr lang="en-GB" dirty="0"/>
-              <a:t>DBSCAN groups points based on </a:t>
-            </a:r>
-            <a:r>
-              <a:rPr lang="en-GB" b="1" dirty="0"/>
-              <a:t>density</a:t>
-            </a:r>
-            <a:r>
-              <a:rPr lang="en-GB" dirty="0"/>
-              <a:t>, not distance to a </a:t>
-            </a:r>
-            <a:r>
-              <a:rPr lang="en-GB" dirty="0" err="1"/>
-              <a:t>center</a:t>
-            </a:r>
-            <a:r>
-              <a:rPr lang="en-GB" dirty="0"/>
-              <a:t>.</a:t>
-            </a:r>
-          </a:p>
-          <a:p>
-            <a:r>
-              <a:rPr lang="en-GB" dirty="0"/>
-              <a:t>It uses two main ideas:</a:t>
-            </a:r>
-          </a:p>
-          <a:p>
-            <a:pPr>
-              <a:buFont typeface="Arial" panose="020B0604020202020204" pitchFamily="34" charset="0"/>
-              <a:buChar char="•"/>
-            </a:pPr>
-            <a:r>
-              <a:rPr lang="en-GB" dirty="0"/>
-              <a:t> Points close together → cluster </a:t>
-            </a:r>
-          </a:p>
-          <a:p>
-            <a:pPr>
-              <a:buFont typeface="Arial" panose="020B0604020202020204" pitchFamily="34" charset="0"/>
-              <a:buChar char="•"/>
-            </a:pPr>
-            <a:r>
-              <a:rPr lang="en-GB" dirty="0"/>
-              <a:t> Sparse points → noise</a:t>
-            </a:r>
-          </a:p>
-          <a:p>
-            <a:endParaRPr lang="en-PK" dirty="0"/>
-          </a:p>
-          <a:p>
-            <a:endParaRPr lang="en-PK" dirty="0"/>
-          </a:p>
-          <a:p>
-            <a:r>
-              <a:rPr lang="en-PK" dirty="0"/>
-              <a:t>Silhouette Score: Goodness of clustering.</a:t>
-            </a:r>
-          </a:p>
-          <a:p>
-            <a:r>
-              <a:rPr lang="en-GB" b="0" i="0" dirty="0">
+              <a:rPr lang="en-GB" b="1" i="0" dirty="0">
                 <a:solidFill>
-                  <a:srgbClr val="EEF0FF"/>
+                  <a:srgbClr val="E6E8F0"/>
                 </a:solidFill>
                 <a:effectLst/>
                 <a:latin typeface="Google Sans"/>
               </a:rPr>
-              <a:t>how similar a data point is to its own cluster</a:t>
+              <a:t>LSOA: </a:t>
+            </a:r>
+            <a:r>
+              <a:rPr lang="en-GB" b="0" i="0" dirty="0">
+                <a:solidFill>
+                  <a:srgbClr val="E6E8F0"/>
+                </a:solidFill>
+                <a:effectLst/>
+                <a:latin typeface="Google Sans"/>
+              </a:rPr>
+              <a:t>Lower Layer Super Output Areas (LSOAs) are </a:t>
+            </a:r>
+            <a:r>
+              <a:rPr lang="en-GB" dirty="0"/>
+              <a:t>small, consistent geographic units used in England and Wales for collecting and publishing statistical data</a:t>
             </a:r>
             <a:endParaRPr lang="en-PK" dirty="0"/>
           </a:p>
@@ -1524,7 +2400,7 @@
           <a:p>
             <a:fld id="{A9A0EA98-5831-4853-B862-C702E6EB345C}" type="slidenum">
               <a:rPr lang="en-US" smtClean="0"/>
-              <a:t>15</a:t>
+              <a:t>4</a:t>
             </a:fld>
             <a:endParaRPr lang="en-US"/>
           </a:p>
@@ -1533,7 +2409,7 @@
     </p:spTree>
     <p:extLst>
       <p:ext uri="{BB962C8B-B14F-4D97-AF65-F5344CB8AC3E}">
-        <p14:creationId xmlns:p14="http://schemas.microsoft.com/office/powerpoint/2010/main" val="3338981148"/>
+        <p14:creationId xmlns:p14="http://schemas.microsoft.com/office/powerpoint/2010/main" val="3700240494"/>
       </p:ext>
     </p:extLst>
   </p:cSld>
@@ -1593,181 +2469,20 @@
           <a:lstStyle/>
           <a:p>
             <a:r>
-              <a:rPr lang="en-GB" dirty="0"/>
-              <a:t>For RQ2, two regression models were used: Linear Regression and Random Forest. The goal is to predict crime count for the next month based on </a:t>
-            </a:r>
-            <a:r>
-              <a:rPr lang="en-GB" b="1" dirty="0"/>
-              <a:t>historical and spatial features</a:t>
-            </a:r>
-            <a:r>
-              <a:rPr lang="en-GB" dirty="0"/>
-              <a:t>. Linear Regression provides a simple baseline by </a:t>
-            </a:r>
-            <a:r>
-              <a:rPr lang="en-GB" dirty="0" err="1"/>
-              <a:t>modeling</a:t>
-            </a:r>
-            <a:r>
-              <a:rPr lang="en-GB" dirty="0"/>
-              <a:t> linear relationships, while Random Forest captures more complex patterns and interactions in the data. This comparison helps evaluate whether crime patterns are simple or require more advanced </a:t>
-            </a:r>
-            <a:r>
-              <a:rPr lang="en-GB" dirty="0" err="1"/>
-              <a:t>modeling</a:t>
-            </a:r>
-            <a:r>
-              <a:rPr lang="en-GB" dirty="0"/>
-              <a:t> techniques.</a:t>
-            </a:r>
-          </a:p>
-          <a:p>
-            <a:endParaRPr lang="en-GB" b="1" dirty="0"/>
-          </a:p>
-          <a:p>
-            <a:r>
-              <a:rPr lang="en-GB" b="1" dirty="0"/>
-              <a:t>Strengths</a:t>
-            </a:r>
-          </a:p>
-          <a:p>
-            <a:pPr>
-              <a:buFont typeface="Arial" panose="020B0604020202020204" pitchFamily="34" charset="0"/>
-              <a:buChar char="•"/>
-            </a:pPr>
-            <a:r>
-              <a:rPr lang="en-GB" dirty="0"/>
-              <a:t>Simple and easy to understand </a:t>
-            </a:r>
-          </a:p>
-          <a:p>
-            <a:pPr>
-              <a:buFont typeface="Arial" panose="020B0604020202020204" pitchFamily="34" charset="0"/>
-              <a:buChar char="•"/>
-            </a:pPr>
-            <a:r>
-              <a:rPr lang="en-GB" dirty="0"/>
-              <a:t>Fast </a:t>
-            </a:r>
-          </a:p>
-          <a:p>
-            <a:pPr>
-              <a:buFont typeface="Arial" panose="020B0604020202020204" pitchFamily="34" charset="0"/>
-              <a:buChar char="•"/>
-            </a:pPr>
-            <a:r>
-              <a:rPr lang="en-GB" dirty="0"/>
-              <a:t>Good baseline model </a:t>
-            </a:r>
-          </a:p>
-          <a:p>
-            <a:r>
-              <a:rPr lang="en-GB" b="1" dirty="0"/>
-              <a:t>Weaknesses (important)</a:t>
-            </a:r>
-          </a:p>
-          <a:p>
-            <a:pPr>
-              <a:buFont typeface="Arial" panose="020B0604020202020204" pitchFamily="34" charset="0"/>
-              <a:buChar char="•"/>
-            </a:pPr>
-            <a:r>
-              <a:rPr lang="en-GB" dirty="0"/>
-              <a:t>Cannot capture complex patterns </a:t>
-            </a:r>
-          </a:p>
-          <a:p>
-            <a:pPr>
-              <a:buFont typeface="Arial" panose="020B0604020202020204" pitchFamily="34" charset="0"/>
-              <a:buChar char="•"/>
-            </a:pPr>
-            <a:r>
-              <a:rPr lang="en-GB" dirty="0"/>
-              <a:t>Struggles with: </a:t>
-            </a:r>
-          </a:p>
-          <a:p>
-            <a:pPr marL="742950" lvl="1" indent="-285750">
-              <a:buFont typeface="Arial" panose="020B0604020202020204" pitchFamily="34" charset="0"/>
-              <a:buChar char="•"/>
-            </a:pPr>
-            <a:r>
-              <a:rPr lang="en-GB" dirty="0"/>
-              <a:t>Non-linear data </a:t>
-            </a:r>
-          </a:p>
-          <a:p>
-            <a:pPr marL="742950" lvl="1" indent="-285750">
-              <a:buFont typeface="Arial" panose="020B0604020202020204" pitchFamily="34" charset="0"/>
-              <a:buChar char="•"/>
-            </a:pPr>
-            <a:r>
-              <a:rPr lang="en-GB" dirty="0"/>
-              <a:t>Interactions between features </a:t>
-            </a:r>
-          </a:p>
-          <a:p>
-            <a:pPr>
-              <a:buFont typeface="Arial" panose="020B0604020202020204" pitchFamily="34" charset="0"/>
-              <a:buChar char="•"/>
-            </a:pPr>
-            <a:r>
-              <a:rPr lang="en-GB" dirty="0"/>
-              <a:t>Sensitive to multicollinearity (you saw this in heatmap)</a:t>
-            </a:r>
-          </a:p>
-          <a:p>
-            <a:endParaRPr lang="en-PK" dirty="0"/>
-          </a:p>
-          <a:p>
-            <a:endParaRPr lang="en-GB" b="1" dirty="0"/>
-          </a:p>
-          <a:p>
-            <a:r>
-              <a:rPr lang="en-GB" b="1" dirty="0"/>
-              <a:t>What it does</a:t>
-            </a:r>
-          </a:p>
-          <a:p>
-            <a:r>
-              <a:rPr lang="en-GB" dirty="0"/>
-              <a:t>Random Forest is:</a:t>
-            </a:r>
-          </a:p>
-          <a:p>
-            <a:r>
-              <a:rPr lang="en-GB" dirty="0"/>
-              <a:t>A collection of many decision trees</a:t>
-            </a:r>
-          </a:p>
-          <a:p>
-            <a:r>
-              <a:rPr lang="en-GB" dirty="0"/>
-              <a:t>Each tree:</a:t>
-            </a:r>
-          </a:p>
-          <a:p>
-            <a:pPr>
-              <a:buFont typeface="Arial" panose="020B0604020202020204" pitchFamily="34" charset="0"/>
-              <a:buChar char="•"/>
-            </a:pPr>
-            <a:r>
-              <a:rPr lang="en-GB" dirty="0"/>
-              <a:t>Makes a prediction </a:t>
-            </a:r>
-          </a:p>
-          <a:p>
-            <a:pPr>
-              <a:buFont typeface="Arial" panose="020B0604020202020204" pitchFamily="34" charset="0"/>
-              <a:buChar char="•"/>
-            </a:pPr>
-            <a:r>
-              <a:rPr lang="en-GB" dirty="0"/>
-              <a:t>Final result = average of all trees </a:t>
-            </a:r>
-          </a:p>
-          <a:p>
-            <a:endParaRPr lang="en-PK" dirty="0"/>
+              <a:rPr lang="en-PK" b="1" dirty="0"/>
+              <a:t>SelectKBest: </a:t>
+            </a:r>
+            <a:r>
+              <a:rPr lang="en-GB" b="0" i="0" dirty="0">
+                <a:solidFill>
+                  <a:srgbClr val="FFFFFF"/>
+                </a:solidFill>
+                <a:effectLst/>
+                <a:latin typeface="Google Sans"/>
+              </a:rPr>
+              <a:t>Use statistical measures to score each feature based on its relationship with the target variable</a:t>
+            </a:r>
+            <a:endParaRPr lang="en-PK" b="1" dirty="0"/>
           </a:p>
         </p:txBody>
       </p:sp>
@@ -1788,7 +2503,7 @@
           <a:p>
             <a:fld id="{A9A0EA98-5831-4853-B862-C702E6EB345C}" type="slidenum">
               <a:rPr lang="en-US" smtClean="0"/>
-              <a:t>18</a:t>
+              <a:t>5</a:t>
             </a:fld>
             <a:endParaRPr lang="en-US"/>
           </a:p>
@@ -1797,7 +2512,7 @@
     </p:spTree>
     <p:extLst>
       <p:ext uri="{BB962C8B-B14F-4D97-AF65-F5344CB8AC3E}">
-        <p14:creationId xmlns:p14="http://schemas.microsoft.com/office/powerpoint/2010/main" val="1419939535"/>
+        <p14:creationId xmlns:p14="http://schemas.microsoft.com/office/powerpoint/2010/main" val="3706423097"/>
       </p:ext>
     </p:extLst>
   </p:cSld>
@@ -1857,44 +2572,69 @@
           <a:lstStyle/>
           <a:p>
             <a:r>
+              <a:rPr lang="en-GB" b="1" dirty="0">
+                <a:effectLst/>
+                <a:latin typeface="Google Sans Text"/>
+              </a:rPr>
+              <a:t>Pearson Correlation Coefficient</a:t>
+            </a:r>
+            <a:r>
+              <a:rPr lang="en-GB" dirty="0"/>
+              <a:t> (</a:t>
+            </a:r>
+            <a:r>
+              <a:rPr lang="en-GB" dirty="0">
+                <a:effectLst/>
+                <a:latin typeface="Google Sans Text"/>
+              </a:rPr>
+              <a:t>r</a:t>
+            </a:r>
+            <a:r>
+              <a:rPr lang="en-GB" dirty="0"/>
+              <a:t>), which measures the linear relationship between two variables. The values always range from </a:t>
+            </a:r>
+            <a:r>
+              <a:rPr lang="en-GB" b="1" dirty="0">
+                <a:effectLst/>
+                <a:latin typeface="Google Sans Text"/>
+              </a:rPr>
+              <a:t>-1 to 1</a:t>
+            </a:r>
+          </a:p>
+          <a:p>
+            <a:endParaRPr lang="en-GB" b="1" dirty="0">
+              <a:effectLst/>
+              <a:latin typeface="Google Sans Text"/>
+            </a:endParaRPr>
+          </a:p>
+          <a:p>
+            <a:r>
               <a:rPr lang="en-GB" b="1" dirty="0"/>
-              <a:t>How to understand RMSE</a:t>
-            </a:r>
-          </a:p>
-          <a:p>
-            <a:pPr>
-              <a:buFont typeface="Arial" panose="020B0604020202020204" pitchFamily="34" charset="0"/>
-              <a:buChar char="•"/>
-            </a:pPr>
+              <a:t>+1.00 (Dark Red):</a:t>
+            </a:r>
             <a:r>
               <a:rPr lang="en-GB" dirty="0"/>
-              <a:t>Lower RMSE = </a:t>
-            </a:r>
+              <a:t> Perfect positive correlation. As one variable goes up, the other goes up in a perfectly predictable way.</a:t>
+            </a:r>
+          </a:p>
+          <a:p>
             <a:r>
               <a:rPr lang="en-GB" b="1" dirty="0"/>
-              <a:t>better model</a:t>
+              <a:t>0.00 (Light Blue/Grey):</a:t>
             </a:r>
             <a:r>
               <a:rPr lang="en-GB" dirty="0"/>
-              <a:t> </a:t>
-            </a:r>
-          </a:p>
-          <a:p>
-            <a:pPr>
-              <a:buFont typeface="Arial" panose="020B0604020202020204" pitchFamily="34" charset="0"/>
-              <a:buChar char="•"/>
-            </a:pPr>
+              <a:t> No linear relationship. The variables don't seem to influence each other.</a:t>
+            </a:r>
+          </a:p>
+          <a:p>
+            <a:r>
+              <a:rPr lang="en-GB" b="1" dirty="0"/>
+              <a:t>-1.00 (Dark Blue):</a:t>
+            </a:r>
             <a:r>
               <a:rPr lang="en-GB" dirty="0"/>
-              <a:t>Higher RMSE = </a:t>
-            </a:r>
-            <a:r>
-              <a:rPr lang="en-GB" b="1" dirty="0"/>
-              <a:t>worse model</a:t>
-            </a:r>
-            <a:r>
-              <a:rPr lang="en-GB" dirty="0"/>
-              <a:t> </a:t>
+              <a:t> Perfect negative correlation. As one variable goes up, the other goes down.</a:t>
             </a:r>
           </a:p>
           <a:p>
@@ -1919,7 +2659,7 @@
           <a:p>
             <a:fld id="{A9A0EA98-5831-4853-B862-C702E6EB345C}" type="slidenum">
               <a:rPr lang="en-US" smtClean="0"/>
-              <a:t>19</a:t>
+              <a:t>7</a:t>
             </a:fld>
             <a:endParaRPr lang="en-US"/>
           </a:p>
@@ -1928,7 +2668,7 @@
     </p:spTree>
     <p:extLst>
       <p:ext uri="{BB962C8B-B14F-4D97-AF65-F5344CB8AC3E}">
-        <p14:creationId xmlns:p14="http://schemas.microsoft.com/office/powerpoint/2010/main" val="1110769567"/>
+        <p14:creationId xmlns:p14="http://schemas.microsoft.com/office/powerpoint/2010/main" val="2604415118"/>
       </p:ext>
     </p:extLst>
   </p:cSld>
@@ -1989,7 +2729,7 @@
           <a:p>
             <a:r>
               <a:rPr lang="en-GB" dirty="0"/>
-              <a:t>This plot compares actual and predicted crime values for the Random Forest model. The red line represents perfect predictions. Most points lie close to this line, indicating strong model performance, especially for low and medium crime levels. However, at higher crime values, the points are more spread out and often fall below the line, showing that the model tends to underestimate extreme cases. This suggests that while the model performs well overall, predicting very high crime levels remains more challenging.</a:t>
+              <a:t>Crime peaks in mid-2024 and drops in early 2025.</a:t>
             </a:r>
             <a:endParaRPr lang="en-PK" dirty="0"/>
           </a:p>
@@ -2012,7 +2752,7 @@
           <a:p>
             <a:fld id="{A9A0EA98-5831-4853-B862-C702E6EB345C}" type="slidenum">
               <a:rPr lang="en-US" smtClean="0"/>
-              <a:t>20</a:t>
+              <a:t>9</a:t>
             </a:fld>
             <a:endParaRPr lang="en-US"/>
           </a:p>
@@ -2021,7 +2761,7 @@
     </p:spTree>
     <p:extLst>
       <p:ext uri="{BB962C8B-B14F-4D97-AF65-F5344CB8AC3E}">
-        <p14:creationId xmlns:p14="http://schemas.microsoft.com/office/powerpoint/2010/main" val="641247418"/>
+        <p14:creationId xmlns:p14="http://schemas.microsoft.com/office/powerpoint/2010/main" val="2783526272"/>
       </p:ext>
     </p:extLst>
   </p:cSld>
@@ -2081,9 +2821,161 @@
           <a:lstStyle/>
           <a:p>
             <a:r>
+              <a:rPr lang="en-GB" b="1" dirty="0"/>
+              <a:t>Longitude (X-axis)</a:t>
+            </a:r>
+          </a:p>
+          <a:p>
+            <a:pPr>
+              <a:buFont typeface="Arial" panose="020B0604020202020204" pitchFamily="34" charset="0"/>
+              <a:buChar char="•"/>
+            </a:pPr>
+            <a:r>
               <a:rPr lang="en-GB" dirty="0"/>
-              <a:t>Overfitting = model learns training data too well but fails on new data</a:t>
-            </a:r>
+              <a:t>Moves </a:t>
+            </a:r>
+            <a:r>
+              <a:rPr lang="en-GB" b="1" dirty="0"/>
+              <a:t>left → west</a:t>
+            </a:r>
+            <a:r>
+              <a:rPr lang="en-GB" dirty="0"/>
+              <a:t> </a:t>
+            </a:r>
+          </a:p>
+          <a:p>
+            <a:pPr>
+              <a:buFont typeface="Arial" panose="020B0604020202020204" pitchFamily="34" charset="0"/>
+              <a:buChar char="•"/>
+            </a:pPr>
+            <a:r>
+              <a:rPr lang="en-GB" dirty="0"/>
+              <a:t>Moves </a:t>
+            </a:r>
+            <a:r>
+              <a:rPr lang="en-GB" b="1" dirty="0"/>
+              <a:t>right → east</a:t>
+            </a:r>
+            <a:r>
+              <a:rPr lang="en-GB" dirty="0"/>
+              <a:t> </a:t>
+            </a:r>
+          </a:p>
+          <a:p>
+            <a:r>
+              <a:rPr lang="en-GB" dirty="0"/>
+              <a:t>Examples:</a:t>
+            </a:r>
+          </a:p>
+          <a:p>
+            <a:pPr>
+              <a:buFont typeface="Arial" panose="020B0604020202020204" pitchFamily="34" charset="0"/>
+              <a:buChar char="•"/>
+            </a:pPr>
+            <a:r>
+              <a:rPr lang="en-GB" dirty="0"/>
+              <a:t>-5 = far west (like Wales side) </a:t>
+            </a:r>
+          </a:p>
+          <a:p>
+            <a:pPr>
+              <a:buFont typeface="Arial" panose="020B0604020202020204" pitchFamily="34" charset="0"/>
+              <a:buChar char="•"/>
+            </a:pPr>
+            <a:r>
+              <a:rPr lang="en-GB" dirty="0"/>
+              <a:t>-2 = central UK (Manchester area) </a:t>
+            </a:r>
+          </a:p>
+          <a:p>
+            <a:pPr>
+              <a:buFont typeface="Arial" panose="020B0604020202020204" pitchFamily="34" charset="0"/>
+              <a:buChar char="•"/>
+            </a:pPr>
+            <a:r>
+              <a:rPr lang="en-GB" dirty="0"/>
+              <a:t>0 = east side (London region) </a:t>
+            </a:r>
+          </a:p>
+          <a:p>
+            <a:r>
+              <a:rPr lang="en-GB" b="1" dirty="0"/>
+              <a:t>Latitude (Y-axis)</a:t>
+            </a:r>
+          </a:p>
+          <a:p>
+            <a:pPr>
+              <a:buFont typeface="Arial" panose="020B0604020202020204" pitchFamily="34" charset="0"/>
+              <a:buChar char="•"/>
+            </a:pPr>
+            <a:r>
+              <a:rPr lang="en-GB" dirty="0"/>
+              <a:t>Moves </a:t>
+            </a:r>
+            <a:r>
+              <a:rPr lang="en-GB" b="1" dirty="0"/>
+              <a:t>down → south</a:t>
+            </a:r>
+            <a:r>
+              <a:rPr lang="en-GB" dirty="0"/>
+              <a:t> </a:t>
+            </a:r>
+          </a:p>
+          <a:p>
+            <a:pPr>
+              <a:buFont typeface="Arial" panose="020B0604020202020204" pitchFamily="34" charset="0"/>
+              <a:buChar char="•"/>
+            </a:pPr>
+            <a:r>
+              <a:rPr lang="en-GB" dirty="0"/>
+              <a:t>Moves </a:t>
+            </a:r>
+            <a:r>
+              <a:rPr lang="en-GB" b="1" dirty="0"/>
+              <a:t>up → north</a:t>
+            </a:r>
+            <a:r>
+              <a:rPr lang="en-GB" dirty="0"/>
+              <a:t> </a:t>
+            </a:r>
+          </a:p>
+          <a:p>
+            <a:r>
+              <a:rPr lang="en-GB" dirty="0"/>
+              <a:t>Examples:</a:t>
+            </a:r>
+          </a:p>
+          <a:p>
+            <a:pPr>
+              <a:buFont typeface="Arial" panose="020B0604020202020204" pitchFamily="34" charset="0"/>
+              <a:buChar char="•"/>
+            </a:pPr>
+            <a:r>
+              <a:rPr lang="en-GB" dirty="0"/>
+              <a:t>51.5 = London area </a:t>
+            </a:r>
+          </a:p>
+          <a:p>
+            <a:pPr>
+              <a:buFont typeface="Arial" panose="020B0604020202020204" pitchFamily="34" charset="0"/>
+              <a:buChar char="•"/>
+            </a:pPr>
+            <a:r>
+              <a:rPr lang="en-GB" dirty="0"/>
+              <a:t>52.5 = Midlands / Manchester </a:t>
+            </a:r>
+          </a:p>
+          <a:p>
+            <a:pPr>
+              <a:buFont typeface="Arial" panose="020B0604020202020204" pitchFamily="34" charset="0"/>
+              <a:buChar char="•"/>
+            </a:pPr>
+            <a:r>
+              <a:rPr lang="en-GB" dirty="0"/>
+              <a:t>54+ = northern UK</a:t>
+            </a:r>
+          </a:p>
+          <a:p>
             <a:endParaRPr lang="en-PK" dirty="0"/>
           </a:p>
         </p:txBody>
@@ -2105,7 +2997,7 @@
           <a:p>
             <a:fld id="{A9A0EA98-5831-4853-B862-C702E6EB345C}" type="slidenum">
               <a:rPr lang="en-US" smtClean="0"/>
-              <a:t>21</a:t>
+              <a:t>13</a:t>
             </a:fld>
             <a:endParaRPr lang="en-US"/>
           </a:p>
@@ -2114,7 +3006,7 @@
     </p:spTree>
     <p:extLst>
       <p:ext uri="{BB962C8B-B14F-4D97-AF65-F5344CB8AC3E}">
-        <p14:creationId xmlns:p14="http://schemas.microsoft.com/office/powerpoint/2010/main" val="1883837575"/>
+        <p14:creationId xmlns:p14="http://schemas.microsoft.com/office/powerpoint/2010/main" val="2721712962"/>
       </p:ext>
     </p:extLst>
   </p:cSld>
@@ -2175,7 +3067,30 @@
           <a:p>
             <a:r>
               <a:rPr lang="en-GB" dirty="0"/>
-              <a:t>Regularisation means:</a:t>
+              <a:t>Here we answer Research Question 1: Which areas are crime hotspots?</a:t>
+            </a:r>
+            <a:br>
+              <a:rPr lang="en-GB" dirty="0"/>
+            </a:br>
+            <a:r>
+              <a:rPr lang="en-GB" dirty="0"/>
+              <a:t>Since crime is unevenly spread, clustering helps us group similar areas and find regions with high crime concentration</a:t>
+            </a:r>
+            <a:endParaRPr lang="en-GB" b="1" dirty="0"/>
+          </a:p>
+          <a:p>
+            <a:endParaRPr lang="en-GB" b="1" dirty="0"/>
+          </a:p>
+          <a:p>
+            <a:r>
+              <a:rPr lang="en-GB" b="1" dirty="0"/>
+              <a:t>What K-Means does</a:t>
+            </a:r>
+          </a:p>
+          <a:p>
+            <a:r>
+              <a:rPr lang="en-GB" dirty="0"/>
+              <a:t>K-Means:</a:t>
             </a:r>
           </a:p>
           <a:p>
@@ -2185,7 +3100,15 @@
             </a:pPr>
             <a:r>
               <a:rPr lang="en-GB" dirty="0"/>
-              <a:t>Limiting tree depth </a:t>
+              <a:t>Divides data into </a:t>
+            </a:r>
+            <a:r>
+              <a:rPr lang="en-GB" b="1" dirty="0"/>
+              <a:t>K fixed clusters</a:t>
+            </a:r>
+            <a:r>
+              <a:rPr lang="en-GB" dirty="0"/>
+              <a:t> </a:t>
             </a:r>
           </a:p>
           <a:p>
@@ -2194,8 +3117,24 @@
               <a:buChar char="•"/>
             </a:pPr>
             <a:r>
-              <a:rPr lang="en-GB" dirty="0"/>
-              <a:t>Reducing splits </a:t>
+              <a:rPr lang="en-GB" b="1" dirty="0"/>
+              <a:t>Each cluster has a </a:t>
+            </a:r>
+            <a:r>
+              <a:rPr lang="en-GB" b="1" dirty="0" err="1"/>
+              <a:t>center</a:t>
+            </a:r>
+            <a:r>
+              <a:rPr lang="en-GB" b="1" dirty="0"/>
+              <a:t> (</a:t>
+            </a:r>
+            <a:r>
+              <a:rPr lang="en-GB" b="1" i="1" dirty="0"/>
+              <a:t>centroid</a:t>
+            </a:r>
+            <a:r>
+              <a:rPr lang="en-GB" b="1" dirty="0"/>
+              <a:t>) </a:t>
             </a:r>
           </a:p>
           <a:p>
@@ -2205,7 +3144,27 @@
             </a:pPr>
             <a:r>
               <a:rPr lang="en-GB" dirty="0"/>
-              <a:t>Making trees less complex</a:t>
+              <a:t>Points are assigned to the nearest </a:t>
+            </a:r>
+            <a:r>
+              <a:rPr lang="en-GB" dirty="0" err="1"/>
+              <a:t>center</a:t>
+            </a:r>
+            <a:r>
+              <a:rPr lang="en-GB" dirty="0"/>
+              <a:t> </a:t>
+            </a:r>
+          </a:p>
+          <a:p>
+            <a:r>
+              <a:rPr lang="en-GB" b="1" dirty="0"/>
+              <a:t>Key assumption:</a:t>
+            </a:r>
+          </a:p>
+          <a:p>
+            <a:r>
+              <a:rPr lang="en-GB" dirty="0"/>
+              <a:t>Clusters are:</a:t>
             </a:r>
           </a:p>
           <a:p>
@@ -2213,36 +3172,9 @@
               <a:buFont typeface="Arial" panose="020B0604020202020204" pitchFamily="34" charset="0"/>
               <a:buChar char="•"/>
             </a:pPr>
-            <a:endParaRPr lang="en-GB" dirty="0"/>
-          </a:p>
-          <a:p>
             <a:r>
               <a:rPr lang="en-GB" dirty="0"/>
-              <a:t>So instead of memorising data, the model:</a:t>
-            </a:r>
-          </a:p>
-          <a:p>
-            <a:r>
-              <a:rPr lang="en-GB" dirty="0"/>
-              <a:t>Learns more general patterns</a:t>
-            </a:r>
-          </a:p>
-          <a:p>
-            <a:endParaRPr lang="en-PK" dirty="0"/>
-          </a:p>
-          <a:p>
-            <a:endParaRPr lang="en-PK" dirty="0"/>
-          </a:p>
-          <a:p>
-            <a:r>
-              <a:rPr lang="en-GB" b="1" dirty="0"/>
-              <a:t>Your results </a:t>
-            </a:r>
-          </a:p>
-          <a:p>
-            <a:r>
-              <a:rPr lang="en-GB" b="1" dirty="0"/>
-              <a:t>Before (Overfitting slide)</a:t>
+              <a:t>Circular </a:t>
             </a:r>
           </a:p>
           <a:p>
@@ -2252,15 +3184,7 @@
             </a:pPr>
             <a:r>
               <a:rPr lang="en-GB" dirty="0"/>
-              <a:t>Train RMSE = </a:t>
-            </a:r>
-            <a:r>
-              <a:rPr lang="en-GB" b="1" dirty="0"/>
-              <a:t>1.83</a:t>
-            </a:r>
-            <a:r>
-              <a:rPr lang="en-GB" dirty="0"/>
-              <a:t> </a:t>
+              <a:t>Similar size </a:t>
             </a:r>
           </a:p>
           <a:p>
@@ -2270,31 +3194,47 @@
             </a:pPr>
             <a:r>
               <a:rPr lang="en-GB" dirty="0"/>
-              <a:t>Test RMSE = </a:t>
-            </a:r>
+              <a:t>Evenly distributed</a:t>
+            </a:r>
+          </a:p>
+          <a:p>
+            <a:endParaRPr lang="en-PK" dirty="0"/>
+          </a:p>
+          <a:p>
+            <a:endParaRPr lang="en-PK" dirty="0"/>
+          </a:p>
+          <a:p>
             <a:r>
               <a:rPr lang="en-GB" b="1" dirty="0"/>
-              <a:t>4.84</a:t>
-            </a:r>
+              <a:t>What DBSCAN does</a:t>
+            </a:r>
+          </a:p>
+          <a:p>
             <a:r>
               <a:rPr lang="en-GB" dirty="0"/>
-              <a:t> </a:t>
-            </a:r>
-          </a:p>
-          <a:p>
-            <a:r>
-              <a:rPr lang="en-PK" dirty="0"/>
-              <a:t>👉 </a:t>
+              <a:t>DBSCAN groups points based on </a:t>
+            </a:r>
+            <a:r>
+              <a:rPr lang="en-GB" b="1" dirty="0"/>
+              <a:t>density</a:t>
             </a:r>
             <a:r>
               <a:rPr lang="en-GB" dirty="0"/>
-              <a:t>Big gap → overfitting</a:t>
-            </a:r>
-          </a:p>
-          <a:p>
-            <a:r>
-              <a:rPr lang="en-GB" b="1" dirty="0"/>
-              <a:t>After Regularisation</a:t>
+              <a:t>, not distance to a </a:t>
+            </a:r>
+            <a:r>
+              <a:rPr lang="en-GB" dirty="0" err="1"/>
+              <a:t>center</a:t>
+            </a:r>
+            <a:r>
+              <a:rPr lang="en-GB" dirty="0"/>
+              <a:t>.</a:t>
+            </a:r>
+          </a:p>
+          <a:p>
+            <a:r>
+              <a:rPr lang="en-GB" dirty="0"/>
+              <a:t>It uses two main ideas:</a:t>
             </a:r>
           </a:p>
           <a:p>
@@ -2304,15 +3244,7 @@
             </a:pPr>
             <a:r>
               <a:rPr lang="en-GB" dirty="0"/>
-              <a:t>Train RMSE = </a:t>
-            </a:r>
-            <a:r>
-              <a:rPr lang="en-GB" b="1" dirty="0"/>
-              <a:t>3.98</a:t>
-            </a:r>
-            <a:r>
-              <a:rPr lang="en-GB" dirty="0"/>
-              <a:t> </a:t>
+              <a:t> Points close together → cluster </a:t>
             </a:r>
           </a:p>
           <a:p>
@@ -2322,15 +3254,32 @@
             </a:pPr>
             <a:r>
               <a:rPr lang="en-GB" dirty="0"/>
-              <a:t>Test RMSE = </a:t>
-            </a:r>
-            <a:r>
-              <a:rPr lang="en-GB" b="1" dirty="0"/>
-              <a:t>4.85</a:t>
-            </a:r>
-            <a:endParaRPr lang="en-GB" dirty="0"/>
-          </a:p>
-          <a:p>
+              <a:t> Sparse points → noise</a:t>
+            </a:r>
+          </a:p>
+          <a:p>
+            <a:endParaRPr lang="en-PK" dirty="0"/>
+          </a:p>
+          <a:p>
+            <a:endParaRPr lang="en-PK" dirty="0"/>
+          </a:p>
+          <a:p>
+            <a:r>
+              <a:rPr lang="en-PK" dirty="0"/>
+              <a:t>Silhouette Score: Goodness of clustering.</a:t>
+            </a:r>
+          </a:p>
+          <a:p>
+            <a:r>
+              <a:rPr lang="en-GB" b="0" i="0" dirty="0">
+                <a:solidFill>
+                  <a:srgbClr val="EEF0FF"/>
+                </a:solidFill>
+                <a:effectLst/>
+                <a:latin typeface="Google Sans"/>
+              </a:rPr>
+              <a:t>how similar a data point is to its own cluster</a:t>
+            </a:r>
             <a:endParaRPr lang="en-PK" dirty="0"/>
           </a:p>
         </p:txBody>
@@ -2352,7 +3301,7 @@
           <a:p>
             <a:fld id="{A9A0EA98-5831-4853-B862-C702E6EB345C}" type="slidenum">
               <a:rPr lang="en-US" smtClean="0"/>
-              <a:t>22</a:t>
+              <a:t>14</a:t>
             </a:fld>
             <a:endParaRPr lang="en-US"/>
           </a:p>
@@ -2361,7 +3310,7 @@
     </p:spTree>
     <p:extLst>
       <p:ext uri="{BB962C8B-B14F-4D97-AF65-F5344CB8AC3E}">
-        <p14:creationId xmlns:p14="http://schemas.microsoft.com/office/powerpoint/2010/main" val="1396846287"/>
+        <p14:creationId xmlns:p14="http://schemas.microsoft.com/office/powerpoint/2010/main" val="3338981148"/>
       </p:ext>
     </p:extLst>
   </p:cSld>
@@ -2421,11 +3370,20 @@
           <a:lstStyle/>
           <a:p>
             <a:r>
+              <a:rPr lang="en-GB" dirty="0" err="1"/>
+              <a:t>KMeans</a:t>
+            </a:r>
+            <a:r>
               <a:rPr lang="en-GB" dirty="0"/>
-              <a:t>The feature importance results show that the most influential factor in predicting crime is the previous crime count (lag1), indicating strong temporal dependency. The dominant crime type and location features also contribute significantly, reflecting spatial clustering and crime patterns. Other features such as month, year, and seasonal indicators have relatively low importance, suggesting they have a weaker direct impact on crime prediction.</a:t>
-            </a:r>
-          </a:p>
-          <a:p>
+              <a:t> divides the data into four groups based on similarity.</a:t>
+            </a:r>
+            <a:br>
+              <a:rPr lang="en-GB" dirty="0"/>
+            </a:br>
+            <a:r>
+              <a:rPr lang="en-GB" dirty="0"/>
+              <a:t>It gives a basic understanding of crime distribution, but the silhouette score is low, meaning the clusters are not very strong.</a:t>
+            </a:r>
             <a:endParaRPr lang="en-PK" dirty="0"/>
           </a:p>
         </p:txBody>
@@ -2447,7 +3405,7 @@
           <a:p>
             <a:fld id="{A9A0EA98-5831-4853-B862-C702E6EB345C}" type="slidenum">
               <a:rPr lang="en-US" smtClean="0"/>
-              <a:t>23</a:t>
+              <a:t>15</a:t>
             </a:fld>
             <a:endParaRPr lang="en-US"/>
           </a:p>
@@ -2456,7 +3414,7 @@
     </p:spTree>
     <p:extLst>
       <p:ext uri="{BB962C8B-B14F-4D97-AF65-F5344CB8AC3E}">
-        <p14:creationId xmlns:p14="http://schemas.microsoft.com/office/powerpoint/2010/main" val="3476076382"/>
+        <p14:creationId xmlns:p14="http://schemas.microsoft.com/office/powerpoint/2010/main" val="3581880193"/>
       </p:ext>
     </p:extLst>
   </p:cSld>
@@ -2654,7 +3612,7 @@
           <a:p>
             <a:fld id="{3D6AE9DE-14C1-42EC-89CF-CB898A150C53}" type="datetime1">
               <a:rPr lang="en-US" smtClean="0"/>
-              <a:t>4/25/26</a:t>
+              <a:t>4/29/26</a:t>
             </a:fld>
             <a:endParaRPr lang="en-US"/>
           </a:p>
@@ -2997,7 +3955,7 @@
           <a:p>
             <a:fld id="{D81304C3-B8E3-446C-91D8-4B24F523B1EE}" type="datetime1">
               <a:rPr lang="en-US" smtClean="0"/>
-              <a:t>4/25/26</a:t>
+              <a:t>4/29/26</a:t>
             </a:fld>
             <a:endParaRPr lang="en-US"/>
           </a:p>
@@ -3392,7 +4350,7 @@
           <a:p>
             <a:fld id="{1C0554CE-59EF-4699-AE39-6FFD206A32FA}" type="datetime1">
               <a:rPr lang="en-US" smtClean="0"/>
-              <a:t>4/25/26</a:t>
+              <a:t>4/29/26</a:t>
             </a:fld>
             <a:endParaRPr lang="en-US"/>
           </a:p>
@@ -3726,7 +4684,7 @@
           <a:p>
             <a:fld id="{6952E827-2AB2-427E-8828-A42F60B2588F}" type="datetime1">
               <a:rPr lang="en-US" smtClean="0"/>
-              <a:t>4/25/26</a:t>
+              <a:t>4/29/26</a:t>
             </a:fld>
             <a:endParaRPr lang="en-US"/>
           </a:p>
@@ -4040,7 +4998,7 @@
           <a:p>
             <a:fld id="{34BA49D2-3DB7-4226-A7DB-AFD9BAA55DEF}" type="datetime1">
               <a:rPr lang="en-US" smtClean="0"/>
-              <a:t>4/25/26</a:t>
+              <a:t>4/29/26</a:t>
             </a:fld>
             <a:endParaRPr lang="en-US"/>
           </a:p>
@@ -4430,7 +5388,7 @@
           <a:p>
             <a:fld id="{F6F66DF9-0589-431D-8672-DC90B910BD17}" type="datetime1">
               <a:rPr lang="en-US" smtClean="0"/>
-              <a:t>4/25/26</a:t>
+              <a:t>4/29/26</a:t>
             </a:fld>
             <a:endParaRPr lang="en-US"/>
           </a:p>
@@ -4685,7 +5643,7 @@
           <a:p>
             <a:fld id="{3A818E7B-2E1C-43C3-A6DD-DC057E6BA6F1}" type="datetime1">
               <a:rPr lang="en-US" smtClean="0"/>
-              <a:t>4/25/26</a:t>
+              <a:t>4/29/26</a:t>
             </a:fld>
             <a:endParaRPr lang="en-US"/>
           </a:p>
@@ -4945,7 +5903,7 @@
           <a:p>
             <a:fld id="{60510C91-D168-484E-8A33-FD7F08A96286}" type="datetime1">
               <a:rPr lang="en-US" smtClean="0"/>
-              <a:t>4/25/26</a:t>
+              <a:t>4/29/26</a:t>
             </a:fld>
             <a:endParaRPr lang="en-US"/>
           </a:p>
@@ -5205,7 +6163,7 @@
           <a:p>
             <a:fld id="{57AE3903-2F96-43E5-B3FD-F3D7F89C074D}" type="datetime1">
               <a:rPr lang="en-US" smtClean="0"/>
-              <a:t>4/25/26</a:t>
+              <a:t>4/29/26</a:t>
             </a:fld>
             <a:endParaRPr lang="en-US"/>
           </a:p>
@@ -5539,7 +6497,7 @@
           <a:p>
             <a:fld id="{C02B9BB9-46B6-4775-AE31-DA327B45056F}" type="datetime1">
               <a:rPr lang="en-US" smtClean="0"/>
-              <a:t>4/25/26</a:t>
+              <a:t>4/29/26</a:t>
             </a:fld>
             <a:endParaRPr lang="en-US"/>
           </a:p>
@@ -5860,7 +6818,7 @@
           <a:p>
             <a:fld id="{50CA13ED-6BF8-4D10-B877-346C758DCD3A}" type="datetime1">
               <a:rPr lang="en-US" smtClean="0"/>
-              <a:t>4/25/26</a:t>
+              <a:t>4/29/26</a:t>
             </a:fld>
             <a:endParaRPr lang="en-US"/>
           </a:p>
@@ -6315,7 +7273,7 @@
           <a:p>
             <a:fld id="{D9817360-F361-4993-BBE6-4A9D23B8696F}" type="datetime1">
               <a:rPr lang="en-US" smtClean="0"/>
-              <a:t>4/25/26</a:t>
+              <a:t>4/29/26</a:t>
             </a:fld>
             <a:endParaRPr lang="en-US"/>
           </a:p>
@@ -6518,7 +7476,7 @@
           <a:p>
             <a:fld id="{868EECFF-6E5F-4144-B1A7-5F715C8B017C}" type="datetime1">
               <a:rPr lang="en-US" smtClean="0"/>
-              <a:t>4/25/26</a:t>
+              <a:t>4/29/26</a:t>
             </a:fld>
             <a:endParaRPr lang="en-US"/>
           </a:p>
@@ -6693,7 +7651,7 @@
           <a:p>
             <a:fld id="{94E2C67B-2D48-4378-BE5B-AFE93FBEE3F7}" type="datetime1">
               <a:rPr lang="en-US" smtClean="0"/>
-              <a:t>4/25/26</a:t>
+              <a:t>4/29/26</a:t>
             </a:fld>
             <a:endParaRPr lang="en-US"/>
           </a:p>
@@ -7024,7 +7982,7 @@
           <a:p>
             <a:fld id="{73DCF2FD-A8F1-4D60-90F2-0DDC7378D159}" type="datetime1">
               <a:rPr lang="en-US" smtClean="0"/>
-              <a:t>4/25/26</a:t>
+              <a:t>4/29/26</a:t>
             </a:fld>
             <a:endParaRPr lang="en-US"/>
           </a:p>
@@ -7367,7 +8325,7 @@
           <a:p>
             <a:fld id="{08167FE4-9878-4871-AC11-DACD246D7D40}" type="datetime1">
               <a:rPr lang="en-US" smtClean="0"/>
-              <a:t>4/25/26</a:t>
+              <a:t>4/29/26</a:t>
             </a:fld>
             <a:endParaRPr lang="en-US"/>
           </a:p>
@@ -9657,7 +10615,7 @@
           <a:p>
             <a:fld id="{D83D06A4-B070-4BFD-AF55-2779036C349E}" type="datetime1">
               <a:rPr lang="en-US" smtClean="0"/>
-              <a:t>4/25/26</a:t>
+              <a:t>4/29/26</a:t>
             </a:fld>
             <a:endParaRPr lang="en-US"/>
           </a:p>
@@ -10192,7 +11150,7 @@
         </p:nvSpPr>
         <p:spPr>
           <a:xfrm>
-            <a:off x="1511615" y="1383282"/>
+            <a:off x="1511615" y="1244737"/>
             <a:ext cx="9168769" cy="1750844"/>
           </a:xfrm>
         </p:spPr>
@@ -10233,8 +11191,8 @@
         </p:nvSpPr>
         <p:spPr>
           <a:xfrm>
-            <a:off x="4431870" y="5145206"/>
-            <a:ext cx="3811588" cy="1110846"/>
+            <a:off x="3448988" y="5057840"/>
+            <a:ext cx="5294021" cy="1110846"/>
           </a:xfrm>
         </p:spPr>
         <p:txBody>
@@ -10244,15 +11202,23 @@
           <a:lstStyle/>
           <a:p>
             <a:r>
+              <a:rPr lang="en-GB" sz="2000" b="1" dirty="0"/>
+              <a:t>Presented by:</a:t>
+            </a:r>
+            <a:r>
               <a:rPr lang="en-GB" sz="2000" dirty="0"/>
-              <a:t>Presented by:</a:t>
+              <a:t> Muhammad Ruslan Babar</a:t>
             </a:r>
             <a:br>
               <a:rPr lang="en-GB" sz="2000" dirty="0"/>
             </a:br>
             <a:r>
+              <a:rPr lang="en-GB" sz="2000" b="1" dirty="0"/>
+              <a:t>Student ID:</a:t>
+            </a:r>
+            <a:r>
               <a:rPr lang="en-GB" sz="2000" dirty="0"/>
-              <a:t>Student ID: </a:t>
+              <a:t> 27079307w</a:t>
             </a:r>
           </a:p>
         </p:txBody>
@@ -10271,193 +11237,6 @@
 </file>
 
 <file path=ppt/slides/slide10.xml><?xml version="1.0" encoding="utf-8"?>
-<p:sld xmlns:a="http://schemas.openxmlformats.org/drawingml/2006/main" xmlns:r="http://schemas.openxmlformats.org/officeDocument/2006/relationships" xmlns:p="http://schemas.openxmlformats.org/presentationml/2006/main">
-  <p:cSld>
-    <p:spTree>
-      <p:nvGrpSpPr>
-        <p:cNvPr id="1" name="">
-          <a:extLst>
-            <a:ext uri="{FF2B5EF4-FFF2-40B4-BE49-F238E27FC236}">
-              <a16:creationId xmlns:a16="http://schemas.microsoft.com/office/drawing/2014/main" id="{72B933DF-7640-D58C-0C1C-2B086F8E5A30}"/>
-            </a:ext>
-          </a:extLst>
-        </p:cNvPr>
-        <p:cNvGrpSpPr/>
-        <p:nvPr/>
-      </p:nvGrpSpPr>
-      <p:grpSpPr>
-        <a:xfrm>
-          <a:off x="0" y="0"/>
-          <a:ext cx="0" cy="0"/>
-          <a:chOff x="0" y="0"/>
-          <a:chExt cx="0" cy="0"/>
-        </a:xfrm>
-      </p:grpSpPr>
-      <p:sp>
-        <p:nvSpPr>
-          <p:cNvPr id="1048627" name="Title 1">
-            <a:extLst>
-              <a:ext uri="{FF2B5EF4-FFF2-40B4-BE49-F238E27FC236}">
-                <a16:creationId xmlns:a16="http://schemas.microsoft.com/office/drawing/2014/main" id="{E24EDD9B-9995-C092-64BF-95B766671D8A}"/>
-              </a:ext>
-            </a:extLst>
-          </p:cNvPr>
-          <p:cNvSpPr>
-            <a:spLocks noGrp="1"/>
-          </p:cNvSpPr>
-          <p:nvPr>
-            <p:ph type="title"/>
-          </p:nvPr>
-        </p:nvSpPr>
-        <p:spPr>
-          <a:xfrm>
-            <a:off x="1724409" y="-4720"/>
-            <a:ext cx="9792676" cy="645836"/>
-          </a:xfrm>
-        </p:spPr>
-        <p:txBody>
-          <a:bodyPr>
-            <a:normAutofit fontScale="90000"/>
-          </a:bodyPr>
-          <a:lstStyle/>
-          <a:p>
-            <a:pPr algn="ctr"/>
-            <a:r>
-              <a:rPr lang="en-GB" sz="4000" b="1" dirty="0"/>
-              <a:t>Seasonal Crime Pattern</a:t>
-            </a:r>
-            <a:endParaRPr lang="en-US" sz="4000" b="1" dirty="0">
-              <a:latin typeface="Times New Roman"/>
-              <a:cs typeface="Times New Roman"/>
-            </a:endParaRPr>
-          </a:p>
-        </p:txBody>
-      </p:sp>
-      <p:sp>
-        <p:nvSpPr>
-          <p:cNvPr id="3" name="Slide Number Placeholder 2">
-            <a:extLst>
-              <a:ext uri="{FF2B5EF4-FFF2-40B4-BE49-F238E27FC236}">
-                <a16:creationId xmlns:a16="http://schemas.microsoft.com/office/drawing/2014/main" id="{61259E8C-1655-C9C9-D4E8-8A49A0D6CCA3}"/>
-              </a:ext>
-            </a:extLst>
-          </p:cNvPr>
-          <p:cNvSpPr>
-            <a:spLocks noGrp="1"/>
-          </p:cNvSpPr>
-          <p:nvPr>
-            <p:ph type="sldNum" sz="quarter" idx="12"/>
-          </p:nvPr>
-        </p:nvSpPr>
-        <p:spPr/>
-        <p:txBody>
-          <a:bodyPr/>
-          <a:lstStyle/>
-          <a:p>
-            <a:fld id="{CB4D3031-0AEB-4687-8E23-04446010D3FF}" type="slidenum">
-              <a:rPr lang="en-US" smtClean="0"/>
-              <a:t>10</a:t>
-            </a:fld>
-            <a:endParaRPr lang="en-US"/>
-          </a:p>
-        </p:txBody>
-      </p:sp>
-      <p:sp>
-        <p:nvSpPr>
-          <p:cNvPr id="12" name="TextBox 11">
-            <a:extLst>
-              <a:ext uri="{FF2B5EF4-FFF2-40B4-BE49-F238E27FC236}">
-                <a16:creationId xmlns:a16="http://schemas.microsoft.com/office/drawing/2014/main" id="{FD755FF8-D04D-95E9-4535-9A5BC0608AD1}"/>
-              </a:ext>
-            </a:extLst>
-          </p:cNvPr>
-          <p:cNvSpPr txBox="1"/>
-          <p:nvPr/>
-        </p:nvSpPr>
-        <p:spPr>
-          <a:xfrm>
-            <a:off x="1724409" y="5798118"/>
-            <a:ext cx="9480403" cy="923330"/>
-          </a:xfrm>
-          <a:prstGeom prst="rect">
-            <a:avLst/>
-          </a:prstGeom>
-          <a:noFill/>
-        </p:spPr>
-        <p:txBody>
-          <a:bodyPr wrap="square">
-            <a:spAutoFit/>
-          </a:bodyPr>
-          <a:lstStyle/>
-          <a:p>
-            <a:r>
-              <a:rPr lang="en-GB" dirty="0"/>
-              <a:t>This graph shows how crime levels vary across different months of the year. Some months, especially towards the end of the year, have higher crime rates compared to others. This indicates that crime follows a seasonal pattern.</a:t>
-            </a:r>
-          </a:p>
-        </p:txBody>
-      </p:sp>
-      <p:pic>
-        <p:nvPicPr>
-          <p:cNvPr id="2050" name="Picture 2">
-            <a:extLst>
-              <a:ext uri="{FF2B5EF4-FFF2-40B4-BE49-F238E27FC236}">
-                <a16:creationId xmlns:a16="http://schemas.microsoft.com/office/drawing/2014/main" id="{81A5D030-9716-1234-5871-6A239C66F8EC}"/>
-              </a:ext>
-            </a:extLst>
-          </p:cNvPr>
-          <p:cNvPicPr>
-            <a:picLocks noChangeAspect="1" noChangeArrowheads="1"/>
-          </p:cNvPicPr>
-          <p:nvPr/>
-        </p:nvPicPr>
-        <p:blipFill>
-          <a:blip r:embed="rId2">
-            <a:extLst>
-              <a:ext uri="{28A0092B-C50C-407E-A947-70E740481C1C}">
-                <a14:useLocalDpi xmlns:a14="http://schemas.microsoft.com/office/drawing/2010/main" val="0"/>
-              </a:ext>
-            </a:extLst>
-          </a:blip>
-          <a:srcRect/>
-          <a:stretch>
-            <a:fillRect/>
-          </a:stretch>
-        </p:blipFill>
-        <p:spPr bwMode="auto">
-          <a:xfrm>
-            <a:off x="2093488" y="787782"/>
-            <a:ext cx="7892439" cy="5010336"/>
-          </a:xfrm>
-          <a:prstGeom prst="rect">
-            <a:avLst/>
-          </a:prstGeom>
-          <a:noFill/>
-          <a:extLst>
-            <a:ext uri="{909E8E84-426E-40DD-AFC4-6F175D3DCCD1}">
-              <a14:hiddenFill xmlns:a14="http://schemas.microsoft.com/office/drawing/2010/main">
-                <a:solidFill>
-                  <a:srgbClr val="FFFFFF"/>
-                </a:solidFill>
-              </a14:hiddenFill>
-            </a:ext>
-          </a:extLst>
-        </p:spPr>
-      </p:pic>
-    </p:spTree>
-    <p:extLst>
-      <p:ext uri="{BB962C8B-B14F-4D97-AF65-F5344CB8AC3E}">
-        <p14:creationId xmlns:p14="http://schemas.microsoft.com/office/powerpoint/2010/main" val="723906387"/>
-      </p:ext>
-    </p:extLst>
-  </p:cSld>
-  <p:clrMapOvr>
-    <a:masterClrMapping/>
-  </p:clrMapOvr>
-</p:sld>
-</file>
-
-<file path=ppt/slides/slide11.xml><?xml version="1.0" encoding="utf-8"?>
 <p:sld xmlns:a="http://schemas.openxmlformats.org/drawingml/2006/main" xmlns:r="http://schemas.openxmlformats.org/officeDocument/2006/relationships" xmlns:p="http://schemas.openxmlformats.org/presentationml/2006/main">
   <p:cSld>
     <p:spTree>
@@ -10543,7 +11322,7 @@
           <a:p>
             <a:fld id="{CB4D3031-0AEB-4687-8E23-04446010D3FF}" type="slidenum">
               <a:rPr lang="en-US" smtClean="0"/>
-              <a:t>11</a:t>
+              <a:t>10</a:t>
             </a:fld>
             <a:endParaRPr lang="en-US"/>
           </a:p>
@@ -10644,7 +11423,7 @@
 </p:sld>
 </file>
 
-<file path=ppt/slides/slide12.xml><?xml version="1.0" encoding="utf-8"?>
+<file path=ppt/slides/slide11.xml><?xml version="1.0" encoding="utf-8"?>
 <p:sld xmlns:a="http://schemas.openxmlformats.org/drawingml/2006/main" xmlns:r="http://schemas.openxmlformats.org/officeDocument/2006/relationships" xmlns:p="http://schemas.openxmlformats.org/presentationml/2006/main">
   <p:cSld>
     <p:spTree>
@@ -10730,7 +11509,7 @@
           <a:p>
             <a:fld id="{CB4D3031-0AEB-4687-8E23-04446010D3FF}" type="slidenum">
               <a:rPr lang="en-US" smtClean="0"/>
-              <a:t>12</a:t>
+              <a:t>11</a:t>
             </a:fld>
             <a:endParaRPr lang="en-US"/>
           </a:p>
@@ -10766,7 +11545,11 @@
           <a:p>
             <a:r>
               <a:rPr lang="en-GB" dirty="0"/>
-              <a:t>This graph shows the outcomes of reported crimes. Most cases end with no suspect identified or are unable to be prosecuted. This highlights limitations in crime resolution.</a:t>
+              <a:t>This graph shows the outcomes of reported crimes. Most cases end with no suspect identified or are unable to be prosecuted. </a:t>
+            </a:r>
+            <a:r>
+              <a:rPr lang="en-GB" b="1" dirty="0"/>
+              <a:t>This highlights limitations in crime resolution by police.</a:t>
             </a:r>
           </a:p>
         </p:txBody>
@@ -10831,7 +11614,7 @@
 </p:sld>
 </file>
 
-<file path=ppt/slides/slide13.xml><?xml version="1.0" encoding="utf-8"?>
+<file path=ppt/slides/slide12.xml><?xml version="1.0" encoding="utf-8"?>
 <p:sld xmlns:a="http://schemas.openxmlformats.org/drawingml/2006/main" xmlns:r="http://schemas.openxmlformats.org/officeDocument/2006/relationships" xmlns:p="http://schemas.openxmlformats.org/presentationml/2006/main">
   <p:cSld>
     <p:spTree>
@@ -10955,7 +11738,7 @@
           <a:p>
             <a:fld id="{CB4D3031-0AEB-4687-8E23-04446010D3FF}" type="slidenum">
               <a:rPr lang="en-US" smtClean="0"/>
-              <a:t>13</a:t>
+              <a:t>12</a:t>
             </a:fld>
             <a:endParaRPr lang="en-US"/>
           </a:p>
@@ -11021,7 +11804,7 @@
 </p:sld>
 </file>
 
-<file path=ppt/slides/slide14.xml><?xml version="1.0" encoding="utf-8"?>
+<file path=ppt/slides/slide13.xml><?xml version="1.0" encoding="utf-8"?>
 <p:sld xmlns:a="http://schemas.openxmlformats.org/drawingml/2006/main" xmlns:r="http://schemas.openxmlformats.org/officeDocument/2006/relationships" xmlns:p="http://schemas.openxmlformats.org/presentationml/2006/main">
   <p:cSld>
     <p:spTree>
@@ -11089,7 +11872,7 @@
           <a:p>
             <a:fld id="{CB4D3031-0AEB-4687-8E23-04446010D3FF}" type="slidenum">
               <a:rPr lang="en-US" smtClean="0"/>
-              <a:t>14</a:t>
+              <a:t>13</a:t>
             </a:fld>
             <a:endParaRPr lang="en-US"/>
           </a:p>
@@ -11193,7 +11976,7 @@
 </p:sld>
 </file>
 
-<file path=ppt/slides/slide15.xml><?xml version="1.0" encoding="utf-8"?>
+<file path=ppt/slides/slide14.xml><?xml version="1.0" encoding="utf-8"?>
 <p:sld xmlns:a="http://schemas.openxmlformats.org/drawingml/2006/main" xmlns:r="http://schemas.openxmlformats.org/officeDocument/2006/relationships" xmlns:p="http://schemas.openxmlformats.org/presentationml/2006/main">
   <p:cSld>
     <p:spTree>
@@ -11279,7 +12062,7 @@
           <a:p>
             <a:fld id="{CB4D3031-0AEB-4687-8E23-04446010D3FF}" type="slidenum">
               <a:rPr lang="en-US" smtClean="0"/>
-              <a:t>15</a:t>
+              <a:t>14</a:t>
             </a:fld>
             <a:endParaRPr lang="en-US"/>
           </a:p>
@@ -11299,8 +12082,8 @@
         </p:nvSpPr>
         <p:spPr>
           <a:xfrm>
-            <a:off x="3473593" y="1400262"/>
-            <a:ext cx="6594745" cy="3363678"/>
+            <a:off x="3128148" y="2338725"/>
+            <a:ext cx="9376133" cy="2117183"/>
           </a:xfrm>
           <a:prstGeom prst="rect">
             <a:avLst/>
@@ -11334,35 +12117,9 @@
             </a:pPr>
             <a:r>
               <a:rPr lang="en-GB" b="1" dirty="0" err="1"/>
-              <a:t>KMeans</a:t>
-            </a:r>
-            <a:endParaRPr lang="en-GB" dirty="0"/>
-          </a:p>
-          <a:p>
-            <a:pPr marL="285750" indent="-285750">
-              <a:lnSpc>
-                <a:spcPct val="150000"/>
-              </a:lnSpc>
-              <a:buFont typeface="Arial" panose="020B0604020202020204" pitchFamily="34" charset="0"/>
-              <a:buChar char="•"/>
-            </a:pPr>
-            <a:r>
-              <a:rPr lang="en-GB" dirty="0"/>
-              <a:t>Silhouette score: 0.26 </a:t>
-            </a:r>
-          </a:p>
-          <a:p>
-            <a:pPr marL="285750" indent="-285750">
-              <a:lnSpc>
-                <a:spcPct val="150000"/>
-              </a:lnSpc>
-              <a:buFont typeface="Arial" panose="020B0604020202020204" pitchFamily="34" charset="0"/>
-              <a:buChar char="•"/>
-            </a:pPr>
-            <a:r>
-              <a:rPr lang="en-GB" dirty="0"/>
-              <a:t>Weak clustering </a:t>
-            </a:r>
+              <a:t>Kmeans</a:t>
+            </a:r>
+            <a:endParaRPr lang="en-GB" b="1" dirty="0"/>
           </a:p>
           <a:p>
             <a:pPr>
@@ -11371,35 +12128,8 @@
               </a:lnSpc>
             </a:pPr>
             <a:r>
-              <a:rPr lang="en-GB" b="1" dirty="0"/>
-              <a:t>DBSCAN</a:t>
-            </a:r>
-            <a:endParaRPr lang="en-GB" dirty="0"/>
-          </a:p>
-          <a:p>
-            <a:pPr marL="285750" indent="-285750">
-              <a:lnSpc>
-                <a:spcPct val="150000"/>
-              </a:lnSpc>
-              <a:buFont typeface="Arial" panose="020B0604020202020204" pitchFamily="34" charset="0"/>
-              <a:buChar char="•"/>
-            </a:pPr>
-            <a:r>
               <a:rPr lang="en-GB" dirty="0"/>
-              <a:t>Silhouette score: 0.74 </a:t>
-            </a:r>
-          </a:p>
-          <a:p>
-            <a:pPr marL="285750" indent="-285750">
-              <a:lnSpc>
-                <a:spcPct val="150000"/>
-              </a:lnSpc>
-              <a:buFont typeface="Arial" panose="020B0604020202020204" pitchFamily="34" charset="0"/>
-              <a:buChar char="•"/>
-            </a:pPr>
-            <a:r>
-              <a:rPr lang="en-GB" dirty="0"/>
-              <a:t>Strong clustering </a:t>
+              <a:t>Groups areas into fixed clusters Based on distance/similarity</a:t>
             </a:r>
           </a:p>
           <a:p>
@@ -11409,9 +12139,70 @@
               </a:lnSpc>
             </a:pPr>
             <a:r>
+              <a:rPr lang="en-GB" b="1" dirty="0"/>
+              <a:t>DBSCAN</a:t>
+            </a:r>
+          </a:p>
+          <a:p>
+            <a:pPr>
+              <a:lnSpc>
+                <a:spcPct val="150000"/>
+              </a:lnSpc>
+            </a:pPr>
+            <a:r>
               <a:rPr lang="en-GB" dirty="0"/>
-              <a:t>DBSCAN performs better for this task.</a:t>
-            </a:r>
+              <a:t>Groups areas based on density Detects hotspots and outliers</a:t>
+            </a:r>
+          </a:p>
+        </p:txBody>
+      </p:sp>
+      <p:sp>
+        <p:nvSpPr>
+          <p:cNvPr id="5" name="TextBox 4">
+            <a:extLst>
+              <a:ext uri="{FF2B5EF4-FFF2-40B4-BE49-F238E27FC236}">
+                <a16:creationId xmlns:a16="http://schemas.microsoft.com/office/drawing/2014/main" id="{3397D997-FBD3-7207-9B28-AEFAF5F6EC18}"/>
+              </a:ext>
+            </a:extLst>
+          </p:cNvPr>
+          <p:cNvSpPr txBox="1"/>
+          <p:nvPr/>
+        </p:nvSpPr>
+        <p:spPr>
+          <a:xfrm>
+            <a:off x="3167282" y="1152907"/>
+            <a:ext cx="6106026" cy="923330"/>
+          </a:xfrm>
+          <a:prstGeom prst="rect">
+            <a:avLst/>
+          </a:prstGeom>
+          <a:noFill/>
+        </p:spPr>
+        <p:txBody>
+          <a:bodyPr wrap="square">
+            <a:spAutoFit/>
+          </a:bodyPr>
+          <a:lstStyle/>
+          <a:p>
+            <a:pPr marL="285750" indent="-285750">
+              <a:buFont typeface="Arial" panose="020B0604020202020204" pitchFamily="34" charset="0"/>
+              <a:buChar char="•"/>
+            </a:pPr>
+            <a:r>
+              <a:rPr lang="en-GB" dirty="0"/>
+              <a:t>Crime is not evenly distributed.</a:t>
+            </a:r>
+          </a:p>
+          <a:p>
+            <a:pPr marL="285750" indent="-285750">
+              <a:buFont typeface="Arial" panose="020B0604020202020204" pitchFamily="34" charset="0"/>
+              <a:buChar char="•"/>
+            </a:pPr>
+            <a:r>
+              <a:rPr lang="en-GB" dirty="0"/>
+              <a:t>Some areas have much higher crime levels than others.</a:t>
+            </a:r>
+            <a:endParaRPr lang="en-PK" dirty="0"/>
           </a:p>
         </p:txBody>
       </p:sp>
@@ -11428,7 +12219,7 @@
 </p:sld>
 </file>
 
-<file path=ppt/slides/slide16.xml><?xml version="1.0" encoding="utf-8"?>
+<file path=ppt/slides/slide15.xml><?xml version="1.0" encoding="utf-8"?>
 <p:sld xmlns:a="http://schemas.openxmlformats.org/drawingml/2006/main" xmlns:r="http://schemas.openxmlformats.org/officeDocument/2006/relationships" xmlns:p="http://schemas.openxmlformats.org/presentationml/2006/main">
   <p:cSld>
     <p:spTree>
@@ -11486,7 +12277,7 @@
             </a:r>
             <a:r>
               <a:rPr lang="en-GB" b="1" dirty="0"/>
-              <a:t> Clusters</a:t>
+              <a:t> Clustering Results</a:t>
             </a:r>
             <a:endParaRPr lang="en-US" b="1" dirty="0">
               <a:latin typeface="Times New Roman" panose="02020603050405020304" pitchFamily="18" charset="0"/>
@@ -11518,7 +12309,7 @@
           <a:p>
             <a:fld id="{CB4D3031-0AEB-4687-8E23-04446010D3FF}" type="slidenum">
               <a:rPr lang="en-US" smtClean="0"/>
-              <a:t>16</a:t>
+              <a:t>15</a:t>
             </a:fld>
             <a:endParaRPr lang="en-US" dirty="0"/>
           </a:p>
@@ -11539,7 +12330,7 @@
         <p:spPr>
           <a:xfrm>
             <a:off x="7216727" y="2345782"/>
-            <a:ext cx="4839285" cy="2862322"/>
+            <a:ext cx="4839285" cy="646331"/>
           </a:xfrm>
           <a:prstGeom prst="rect">
             <a:avLst/>
@@ -11557,16 +12348,23 @@
           <a:p>
             <a:r>
               <a:rPr lang="en-GB" dirty="0"/>
-              <a:t>This graph shows how </a:t>
-            </a:r>
-            <a:r>
-              <a:rPr lang="en-GB" dirty="0" err="1"/>
-              <a:t>KMeans</a:t>
-            </a:r>
+              <a:t>Number of clusters: </a:t>
+            </a:r>
+            <a:r>
+              <a:rPr lang="en-GB" b="1" dirty="0"/>
+              <a:t>4</a:t>
+            </a:r>
+          </a:p>
+          <a:p>
             <a:r>
               <a:rPr lang="en-GB" dirty="0"/>
-              <a:t> groups locations into clusters based on their coordinates. The numbers like 0, 1, 2, and 3 represent different cluster groups, not crime levels. The values on the axes such as 0, -1, and -2 represent longitude and latitude coordinates. Each colour shows a group of nearby locations, but the model does not clearly separate very high-crime areas.</a:t>
-            </a:r>
+              <a:t>Silhouette Score: </a:t>
+            </a:r>
+            <a:r>
+              <a:rPr lang="en-GB" b="1" dirty="0"/>
+              <a:t>0.26</a:t>
+            </a:r>
+            <a:endParaRPr lang="en-GB" dirty="0"/>
           </a:p>
         </p:txBody>
       </p:sp>
@@ -11585,7 +12383,7 @@
           <p:nvPr/>
         </p:nvPicPr>
         <p:blipFill>
-          <a:blip r:embed="rId2">
+          <a:blip r:embed="rId3">
             <a:extLst>
               <a:ext uri="{28A0092B-C50C-407E-A947-70E740481C1C}">
                 <a14:useLocalDpi xmlns:a14="http://schemas.microsoft.com/office/drawing/2010/main" val="0"/>
@@ -11617,6 +12415,72 @@
           </a:extLst>
         </p:spPr>
       </p:pic>
+      <p:sp>
+        <p:nvSpPr>
+          <p:cNvPr id="4" name="TextBox 3">
+            <a:extLst>
+              <a:ext uri="{FF2B5EF4-FFF2-40B4-BE49-F238E27FC236}">
+                <a16:creationId xmlns:a16="http://schemas.microsoft.com/office/drawing/2014/main" id="{0D8780C9-8580-325A-0943-D609FEF105F5}"/>
+              </a:ext>
+            </a:extLst>
+          </p:cNvPr>
+          <p:cNvSpPr txBox="1"/>
+          <p:nvPr/>
+        </p:nvSpPr>
+        <p:spPr>
+          <a:xfrm>
+            <a:off x="7216726" y="3219557"/>
+            <a:ext cx="4839285" cy="1477328"/>
+          </a:xfrm>
+          <a:prstGeom prst="rect">
+            <a:avLst/>
+          </a:prstGeom>
+          <a:noFill/>
+        </p:spPr>
+        <p:txBody>
+          <a:bodyPr rot="0" spcFirstLastPara="0" vertOverflow="overflow" horzOverflow="overflow" vert="horz" wrap="square" lIns="91440" tIns="45720" rIns="91440" bIns="45720" numCol="1" spcCol="0" rtlCol="0" fromWordArt="0" anchor="t" anchorCtr="0" forceAA="0" compatLnSpc="1">
+            <a:prstTxWarp prst="textNoShape">
+              <a:avLst/>
+            </a:prstTxWarp>
+            <a:spAutoFit/>
+          </a:bodyPr>
+          <a:lstStyle/>
+          <a:p>
+            <a:r>
+              <a:rPr lang="en-GB" b="1" dirty="0"/>
+              <a:t>Key Findings:</a:t>
+            </a:r>
+          </a:p>
+          <a:p>
+            <a:r>
+              <a:rPr lang="en-GB" dirty="0"/>
+              <a:t>✔ Groups locations into general regions</a:t>
+            </a:r>
+            <a:br>
+              <a:rPr lang="en-GB" dirty="0"/>
+            </a:br>
+            <a:r>
+              <a:rPr lang="en-PK" dirty="0"/>
+              <a:t>❌ </a:t>
+            </a:r>
+            <a:r>
+              <a:rPr lang="en-GB" dirty="0"/>
+              <a:t>Weak separation between clusters</a:t>
+            </a:r>
+            <a:br>
+              <a:rPr lang="en-GB" dirty="0"/>
+            </a:br>
+            <a:r>
+              <a:rPr lang="en-PK" dirty="0"/>
+              <a:t>❌ </a:t>
+            </a:r>
+            <a:r>
+              <a:rPr lang="en-GB" dirty="0"/>
+              <a:t>Does not clearly isolate extreme hotspots</a:t>
+            </a:r>
+          </a:p>
+        </p:txBody>
+      </p:sp>
     </p:spTree>
     <p:extLst>
       <p:ext uri="{BB962C8B-B14F-4D97-AF65-F5344CB8AC3E}">
@@ -11630,7 +12494,7 @@
 </p:sld>
 </file>
 
-<file path=ppt/slides/slide17.xml><?xml version="1.0" encoding="utf-8"?>
+<file path=ppt/slides/slide16.xml><?xml version="1.0" encoding="utf-8"?>
 <p:sld xmlns:a="http://schemas.openxmlformats.org/drawingml/2006/main" xmlns:r="http://schemas.openxmlformats.org/officeDocument/2006/relationships" xmlns:p="http://schemas.openxmlformats.org/presentationml/2006/main">
   <p:cSld>
     <p:spTree>
@@ -11684,7 +12548,7 @@
             <a:pPr algn="ctr"/>
             <a:r>
               <a:rPr lang="en-GB" b="1" dirty="0"/>
-              <a:t>DBSCAN Hotspots</a:t>
+              <a:t>DBSCAN Hotspot Detection</a:t>
             </a:r>
             <a:endParaRPr lang="en-US" b="1" dirty="0">
               <a:latin typeface="Times New Roman" panose="02020603050405020304" pitchFamily="18" charset="0"/>
@@ -11716,53 +12580,9 @@
           <a:p>
             <a:fld id="{CB4D3031-0AEB-4687-8E23-04446010D3FF}" type="slidenum">
               <a:rPr lang="en-US" smtClean="0"/>
-              <a:t>17</a:t>
+              <a:t>16</a:t>
             </a:fld>
             <a:endParaRPr lang="en-US"/>
-          </a:p>
-        </p:txBody>
-      </p:sp>
-      <p:sp>
-        <p:nvSpPr>
-          <p:cNvPr id="2" name="TextBox 1">
-            <a:extLst>
-              <a:ext uri="{FF2B5EF4-FFF2-40B4-BE49-F238E27FC236}">
-                <a16:creationId xmlns:a16="http://schemas.microsoft.com/office/drawing/2014/main" id="{EF047E84-6682-1F7B-BC12-5035CD9376F9}"/>
-              </a:ext>
-            </a:extLst>
-          </p:cNvPr>
-          <p:cNvSpPr txBox="1"/>
-          <p:nvPr/>
-        </p:nvSpPr>
-        <p:spPr>
-          <a:xfrm>
-            <a:off x="7984364" y="1361660"/>
-            <a:ext cx="4136572" cy="4801314"/>
-          </a:xfrm>
-          <a:prstGeom prst="rect">
-            <a:avLst/>
-          </a:prstGeom>
-          <a:noFill/>
-        </p:spPr>
-        <p:txBody>
-          <a:bodyPr rot="0" spcFirstLastPara="0" vertOverflow="overflow" horzOverflow="overflow" vert="horz" wrap="square" lIns="91440" tIns="45720" rIns="91440" bIns="45720" numCol="1" spcCol="0" rtlCol="0" fromWordArt="0" anchor="t" anchorCtr="0" forceAA="0" compatLnSpc="1">
-            <a:prstTxWarp prst="textNoShape">
-              <a:avLst/>
-            </a:prstTxWarp>
-            <a:spAutoFit/>
-          </a:bodyPr>
-          <a:lstStyle/>
-          <a:p>
-            <a:r>
-              <a:rPr lang="en-GB" dirty="0"/>
-              <a:t>This graph shows crime intensity for each DBSCAN cluster using a boxplot. The numbers (-1, 0, 1, 2) represent different clusters, where </a:t>
-            </a:r>
-          </a:p>
-          <a:p>
-            <a:r>
-              <a:rPr lang="en-GB" dirty="0"/>
-              <a:t>-1 indicates outliers that do not belong to any cluster. The box shows the middle range of data, and the line inside it is the median crime count. The whiskers show the normal spread of values, while the small circles outside the whiskers are outliers. These outliers represent unusual crime counts that are much higher or lower than typical values. One cluster clearly shows very high crime levels, which helps identify strong crime hotspots.</a:t>
-            </a:r>
           </a:p>
         </p:txBody>
       </p:sp>
@@ -11781,7 +12601,7 @@
           <p:nvPr/>
         </p:nvPicPr>
         <p:blipFill>
-          <a:blip r:embed="rId2">
+          <a:blip r:embed="rId3">
             <a:extLst>
               <a:ext uri="{28A0092B-C50C-407E-A947-70E740481C1C}">
                 <a14:useLocalDpi xmlns:a14="http://schemas.microsoft.com/office/drawing/2010/main" val="0"/>
@@ -11796,7 +12616,7 @@
         <p:spPr bwMode="auto">
           <a:xfrm>
             <a:off x="972442" y="1361660"/>
-            <a:ext cx="7011922" cy="4512365"/>
+            <a:ext cx="5618139" cy="4435291"/>
           </a:xfrm>
           <a:prstGeom prst="rect">
             <a:avLst/>
@@ -11813,6 +12633,418 @@
           </a:extLst>
         </p:spPr>
       </p:pic>
+      <p:sp>
+        <p:nvSpPr>
+          <p:cNvPr id="5" name="TextBox 4">
+            <a:extLst>
+              <a:ext uri="{FF2B5EF4-FFF2-40B4-BE49-F238E27FC236}">
+                <a16:creationId xmlns:a16="http://schemas.microsoft.com/office/drawing/2014/main" id="{A31CEFBF-C0E7-52FF-CADF-3E6FF621FBAA}"/>
+              </a:ext>
+            </a:extLst>
+          </p:cNvPr>
+          <p:cNvSpPr txBox="1"/>
+          <p:nvPr/>
+        </p:nvSpPr>
+        <p:spPr>
+          <a:xfrm>
+            <a:off x="6828424" y="1394852"/>
+            <a:ext cx="4136572" cy="369332"/>
+          </a:xfrm>
+          <a:prstGeom prst="rect">
+            <a:avLst/>
+          </a:prstGeom>
+          <a:noFill/>
+        </p:spPr>
+        <p:txBody>
+          <a:bodyPr rot="0" spcFirstLastPara="0" vertOverflow="overflow" horzOverflow="overflow" vert="horz" wrap="square" lIns="91440" tIns="45720" rIns="91440" bIns="45720" numCol="1" spcCol="0" rtlCol="0" fromWordArt="0" anchor="t" anchorCtr="0" forceAA="0" compatLnSpc="1">
+            <a:prstTxWarp prst="textNoShape">
+              <a:avLst/>
+            </a:prstTxWarp>
+            <a:spAutoFit/>
+          </a:bodyPr>
+          <a:lstStyle/>
+          <a:p>
+            <a:r>
+              <a:rPr lang="en-GB" dirty="0"/>
+              <a:t>Silhouette Score: </a:t>
+            </a:r>
+            <a:r>
+              <a:rPr lang="en-GB" b="1" dirty="0"/>
+              <a:t>0.74</a:t>
+            </a:r>
+            <a:endParaRPr lang="en-GB" dirty="0"/>
+          </a:p>
+        </p:txBody>
+      </p:sp>
+      <p:graphicFrame>
+        <p:nvGraphicFramePr>
+          <p:cNvPr id="6" name="Table 5">
+            <a:extLst>
+              <a:ext uri="{FF2B5EF4-FFF2-40B4-BE49-F238E27FC236}">
+                <a16:creationId xmlns:a16="http://schemas.microsoft.com/office/drawing/2014/main" id="{89766FDB-BB5D-C65D-F35F-FB4587DEB971}"/>
+              </a:ext>
+            </a:extLst>
+          </p:cNvPr>
+          <p:cNvGraphicFramePr>
+            <a:graphicFrameLocks noGrp="1"/>
+          </p:cNvGraphicFramePr>
+          <p:nvPr>
+            <p:extLst>
+              <p:ext uri="{D42A27DB-BD31-4B8C-83A1-F6EECF244321}">
+                <p14:modId xmlns:p14="http://schemas.microsoft.com/office/powerpoint/2010/main" val="2557405963"/>
+              </p:ext>
+            </p:extLst>
+          </p:nvPr>
+        </p:nvGraphicFramePr>
+        <p:xfrm>
+          <a:off x="6828423" y="1956897"/>
+          <a:ext cx="4989765" cy="2926080"/>
+        </p:xfrm>
+        <a:graphic>
+          <a:graphicData uri="http://schemas.openxmlformats.org/drawingml/2006/table">
+            <a:tbl>
+              <a:tblPr>
+                <a:tableStyleId>{E8B1032C-EA38-4F05-BA0D-38AFFFC7BED3}</a:tableStyleId>
+              </a:tblPr>
+              <a:tblGrid>
+                <a:gridCol w="1559208">
+                  <a:extLst>
+                    <a:ext uri="{9D8B030D-6E8A-4147-A177-3AD203B41FA5}">
+                      <a16:colId xmlns:a16="http://schemas.microsoft.com/office/drawing/2014/main" val="2428205747"/>
+                    </a:ext>
+                  </a:extLst>
+                </a:gridCol>
+                <a:gridCol w="3430557">
+                  <a:extLst>
+                    <a:ext uri="{9D8B030D-6E8A-4147-A177-3AD203B41FA5}">
+                      <a16:colId xmlns:a16="http://schemas.microsoft.com/office/drawing/2014/main" val="1901363573"/>
+                    </a:ext>
+                  </a:extLst>
+                </a:gridCol>
+              </a:tblGrid>
+              <a:tr h="0">
+                <a:tc>
+                  <a:txBody>
+                    <a:bodyPr/>
+                    <a:lstStyle/>
+                    <a:p>
+                      <a:r>
+                        <a:rPr lang="en-GB" b="1" dirty="0"/>
+                        <a:t>Cluster</a:t>
+                      </a:r>
+                    </a:p>
+                  </a:txBody>
+                  <a:tcPr anchor="ctr"/>
+                </a:tc>
+                <a:tc>
+                  <a:txBody>
+                    <a:bodyPr/>
+                    <a:lstStyle/>
+                    <a:p>
+                      <a:r>
+                        <a:rPr lang="en-GB" b="1" dirty="0"/>
+                        <a:t>Meaning</a:t>
+                      </a:r>
+                    </a:p>
+                  </a:txBody>
+                  <a:tcPr anchor="ctr"/>
+                </a:tc>
+                <a:extLst>
+                  <a:ext uri="{0D108BD9-81ED-4DB2-BD59-A6C34878D82A}">
+                    <a16:rowId xmlns:a16="http://schemas.microsoft.com/office/drawing/2014/main" val="4236703147"/>
+                  </a:ext>
+                </a:extLst>
+              </a:tr>
+              <a:tr h="0">
+                <a:tc>
+                  <a:txBody>
+                    <a:bodyPr/>
+                    <a:lstStyle/>
+                    <a:p>
+                      <a:r>
+                        <a:rPr lang="en-PK" dirty="0"/>
+                        <a:t>2</a:t>
+                      </a:r>
+                    </a:p>
+                  </a:txBody>
+                  <a:tcPr anchor="ctr"/>
+                </a:tc>
+                <a:tc>
+                  <a:txBody>
+                    <a:bodyPr/>
+                    <a:lstStyle/>
+                    <a:p>
+                      <a:r>
+                        <a:rPr lang="en-GB"/>
+                        <a:t>Very High Crime Hotspots</a:t>
+                      </a:r>
+                    </a:p>
+                  </a:txBody>
+                  <a:tcPr anchor="ctr"/>
+                </a:tc>
+                <a:extLst>
+                  <a:ext uri="{0D108BD9-81ED-4DB2-BD59-A6C34878D82A}">
+                    <a16:rowId xmlns:a16="http://schemas.microsoft.com/office/drawing/2014/main" val="3507765213"/>
+                  </a:ext>
+                </a:extLst>
+              </a:tr>
+              <a:tr h="0">
+                <a:tc>
+                  <a:txBody>
+                    <a:bodyPr/>
+                    <a:lstStyle/>
+                    <a:p>
+                      <a:r>
+                        <a:rPr lang="en-PK" dirty="0"/>
+                        <a:t>1</a:t>
+                      </a:r>
+                    </a:p>
+                  </a:txBody>
+                  <a:tcPr anchor="ctr"/>
+                </a:tc>
+                <a:tc>
+                  <a:txBody>
+                    <a:bodyPr/>
+                    <a:lstStyle/>
+                    <a:p>
+                      <a:r>
+                        <a:rPr lang="en-GB"/>
+                        <a:t>Moderate Crime Areas</a:t>
+                      </a:r>
+                    </a:p>
+                  </a:txBody>
+                  <a:tcPr anchor="ctr"/>
+                </a:tc>
+                <a:extLst>
+                  <a:ext uri="{0D108BD9-81ED-4DB2-BD59-A6C34878D82A}">
+                    <a16:rowId xmlns:a16="http://schemas.microsoft.com/office/drawing/2014/main" val="2087852139"/>
+                  </a:ext>
+                </a:extLst>
+              </a:tr>
+              <a:tr h="0">
+                <a:tc>
+                  <a:txBody>
+                    <a:bodyPr/>
+                    <a:lstStyle/>
+                    <a:p>
+                      <a:r>
+                        <a:rPr lang="en-PK"/>
+                        <a:t>0</a:t>
+                      </a:r>
+                    </a:p>
+                  </a:txBody>
+                  <a:tcPr anchor="ctr"/>
+                </a:tc>
+                <a:tc>
+                  <a:txBody>
+                    <a:bodyPr/>
+                    <a:lstStyle/>
+                    <a:p>
+                      <a:r>
+                        <a:rPr lang="en-GB"/>
+                        <a:t>Low Crime Areas</a:t>
+                      </a:r>
+                    </a:p>
+                  </a:txBody>
+                  <a:tcPr anchor="ctr"/>
+                </a:tc>
+                <a:extLst>
+                  <a:ext uri="{0D108BD9-81ED-4DB2-BD59-A6C34878D82A}">
+                    <a16:rowId xmlns:a16="http://schemas.microsoft.com/office/drawing/2014/main" val="2564200236"/>
+                  </a:ext>
+                </a:extLst>
+              </a:tr>
+              <a:tr h="0">
+                <a:tc>
+                  <a:txBody>
+                    <a:bodyPr/>
+                    <a:lstStyle/>
+                    <a:p>
+                      <a:r>
+                        <a:rPr lang="en-PK" dirty="0"/>
+                        <a:t>-1</a:t>
+                      </a:r>
+                    </a:p>
+                  </a:txBody>
+                  <a:tcPr anchor="ctr"/>
+                </a:tc>
+                <a:tc>
+                  <a:txBody>
+                    <a:bodyPr/>
+                    <a:lstStyle/>
+                    <a:p>
+                      <a:r>
+                        <a:rPr lang="en-GB" dirty="0"/>
+                        <a:t>Outliers / Noise</a:t>
+                      </a:r>
+                    </a:p>
+                  </a:txBody>
+                  <a:tcPr anchor="ctr"/>
+                </a:tc>
+                <a:extLst>
+                  <a:ext uri="{0D108BD9-81ED-4DB2-BD59-A6C34878D82A}">
+                    <a16:rowId xmlns:a16="http://schemas.microsoft.com/office/drawing/2014/main" val="2269275299"/>
+                  </a:ext>
+                </a:extLst>
+              </a:tr>
+              <a:tr h="0">
+                <a:tc>
+                  <a:txBody>
+                    <a:bodyPr/>
+                    <a:lstStyle/>
+                    <a:p>
+                      <a:r>
+                        <a:rPr lang="en-PK" dirty="0"/>
+                        <a:t>Box</a:t>
+                      </a:r>
+                    </a:p>
+                  </a:txBody>
+                  <a:tcPr anchor="ctr"/>
+                </a:tc>
+                <a:tc>
+                  <a:txBody>
+                    <a:bodyPr/>
+                    <a:lstStyle/>
+                    <a:p>
+                      <a:r>
+                        <a:rPr lang="en-GB" dirty="0"/>
+                        <a:t>Middle range of Data</a:t>
+                      </a:r>
+                    </a:p>
+                  </a:txBody>
+                  <a:tcPr anchor="ctr"/>
+                </a:tc>
+                <a:extLst>
+                  <a:ext uri="{0D108BD9-81ED-4DB2-BD59-A6C34878D82A}">
+                    <a16:rowId xmlns:a16="http://schemas.microsoft.com/office/drawing/2014/main" val="2099636140"/>
+                  </a:ext>
+                </a:extLst>
+              </a:tr>
+              <a:tr h="0">
+                <a:tc>
+                  <a:txBody>
+                    <a:bodyPr/>
+                    <a:lstStyle/>
+                    <a:p>
+                      <a:r>
+                        <a:rPr lang="en-PK" dirty="0"/>
+                        <a:t>Whiskers</a:t>
+                      </a:r>
+                    </a:p>
+                  </a:txBody>
+                  <a:tcPr anchor="ctr"/>
+                </a:tc>
+                <a:tc>
+                  <a:txBody>
+                    <a:bodyPr/>
+                    <a:lstStyle/>
+                    <a:p>
+                      <a:r>
+                        <a:rPr lang="en-GB" dirty="0"/>
+                        <a:t>Spread of value</a:t>
+                      </a:r>
+                    </a:p>
+                  </a:txBody>
+                  <a:tcPr anchor="ctr"/>
+                </a:tc>
+                <a:extLst>
+                  <a:ext uri="{0D108BD9-81ED-4DB2-BD59-A6C34878D82A}">
+                    <a16:rowId xmlns:a16="http://schemas.microsoft.com/office/drawing/2014/main" val="3135999249"/>
+                  </a:ext>
+                </a:extLst>
+              </a:tr>
+              <a:tr h="0">
+                <a:tc>
+                  <a:txBody>
+                    <a:bodyPr/>
+                    <a:lstStyle/>
+                    <a:p>
+                      <a:r>
+                        <a:rPr lang="en-PK" dirty="0"/>
+                        <a:t>Circles</a:t>
+                      </a:r>
+                    </a:p>
+                  </a:txBody>
+                  <a:tcPr anchor="ctr"/>
+                </a:tc>
+                <a:tc>
+                  <a:txBody>
+                    <a:bodyPr/>
+                    <a:lstStyle/>
+                    <a:p>
+                      <a:r>
+                        <a:rPr lang="en-GB" dirty="0"/>
+                        <a:t>Noise</a:t>
+                      </a:r>
+                    </a:p>
+                  </a:txBody>
+                  <a:tcPr anchor="ctr"/>
+                </a:tc>
+                <a:extLst>
+                  <a:ext uri="{0D108BD9-81ED-4DB2-BD59-A6C34878D82A}">
+                    <a16:rowId xmlns:a16="http://schemas.microsoft.com/office/drawing/2014/main" val="1687795383"/>
+                  </a:ext>
+                </a:extLst>
+              </a:tr>
+            </a:tbl>
+          </a:graphicData>
+        </a:graphic>
+      </p:graphicFrame>
+      <p:sp>
+        <p:nvSpPr>
+          <p:cNvPr id="11" name="TextBox 10">
+            <a:extLst>
+              <a:ext uri="{FF2B5EF4-FFF2-40B4-BE49-F238E27FC236}">
+                <a16:creationId xmlns:a16="http://schemas.microsoft.com/office/drawing/2014/main" id="{0AA7E6D0-9BB9-16AC-ECB6-19E12830A400}"/>
+              </a:ext>
+            </a:extLst>
+          </p:cNvPr>
+          <p:cNvSpPr txBox="1"/>
+          <p:nvPr/>
+        </p:nvSpPr>
+        <p:spPr>
+          <a:xfrm>
+            <a:off x="6828423" y="5196786"/>
+            <a:ext cx="6176512" cy="1200329"/>
+          </a:xfrm>
+          <a:prstGeom prst="rect">
+            <a:avLst/>
+          </a:prstGeom>
+          <a:noFill/>
+        </p:spPr>
+        <p:txBody>
+          <a:bodyPr wrap="square">
+            <a:spAutoFit/>
+          </a:bodyPr>
+          <a:lstStyle/>
+          <a:p>
+            <a:r>
+              <a:rPr lang="en-GB" b="1" dirty="0"/>
+              <a:t>Key Findings:</a:t>
+            </a:r>
+          </a:p>
+          <a:p>
+            <a:r>
+              <a:rPr lang="en-GB" dirty="0"/>
+              <a:t>✔ Better cluster quality</a:t>
+            </a:r>
+            <a:br>
+              <a:rPr lang="en-GB" dirty="0"/>
+            </a:br>
+            <a:r>
+              <a:rPr lang="en-GB" dirty="0"/>
+              <a:t>✔ Detects dense hotspots</a:t>
+            </a:r>
+            <a:br>
+              <a:rPr lang="en-GB" dirty="0"/>
+            </a:br>
+            <a:r>
+              <a:rPr lang="en-GB" dirty="0"/>
+              <a:t>✔ Identifies unusual areas</a:t>
+            </a:r>
+          </a:p>
+        </p:txBody>
+      </p:sp>
     </p:spTree>
     <p:extLst>
       <p:ext uri="{BB962C8B-B14F-4D97-AF65-F5344CB8AC3E}">
@@ -11826,7 +13058,7 @@
 </p:sld>
 </file>
 
-<file path=ppt/slides/slide18.xml><?xml version="1.0" encoding="utf-8"?>
+<file path=ppt/slides/slide17.xml><?xml version="1.0" encoding="utf-8"?>
 <p:sld xmlns:a="http://schemas.openxmlformats.org/drawingml/2006/main" xmlns:r="http://schemas.openxmlformats.org/officeDocument/2006/relationships" xmlns:p="http://schemas.openxmlformats.org/presentationml/2006/main">
   <p:cSld>
     <p:spTree>
@@ -11912,18 +13144,167 @@
           <a:p>
             <a:fld id="{CB4D3031-0AEB-4687-8E23-04446010D3FF}" type="slidenum">
               <a:rPr lang="en-US" smtClean="0"/>
-              <a:t>18</a:t>
+              <a:t>17</a:t>
             </a:fld>
             <a:endParaRPr lang="en-US"/>
           </a:p>
         </p:txBody>
       </p:sp>
-      <p:sp>
-        <p:nvSpPr>
-          <p:cNvPr id="2" name="TextBox 1">
+      <p:graphicFrame>
+        <p:nvGraphicFramePr>
+          <p:cNvPr id="4" name="Table 3">
             <a:extLst>
               <a:ext uri="{FF2B5EF4-FFF2-40B4-BE49-F238E27FC236}">
-                <a16:creationId xmlns:a16="http://schemas.microsoft.com/office/drawing/2014/main" id="{21E3A8FF-EA85-6049-14C6-94FDD2536376}"/>
+                <a16:creationId xmlns:a16="http://schemas.microsoft.com/office/drawing/2014/main" id="{80CBCA2B-DF4E-17F0-6887-4998BB137178}"/>
+              </a:ext>
+            </a:extLst>
+          </p:cNvPr>
+          <p:cNvGraphicFramePr>
+            <a:graphicFrameLocks noGrp="1"/>
+          </p:cNvGraphicFramePr>
+          <p:nvPr>
+            <p:extLst>
+              <p:ext uri="{D42A27DB-BD31-4B8C-83A1-F6EECF244321}">
+                <p14:modId xmlns:p14="http://schemas.microsoft.com/office/powerpoint/2010/main" val="3663290103"/>
+              </p:ext>
+            </p:extLst>
+          </p:nvPr>
+        </p:nvGraphicFramePr>
+        <p:xfrm>
+          <a:off x="2155439" y="2299464"/>
+          <a:ext cx="8915400" cy="1097280"/>
+        </p:xfrm>
+        <a:graphic>
+          <a:graphicData uri="http://schemas.openxmlformats.org/drawingml/2006/table">
+            <a:tbl>
+              <a:tblPr>
+                <a:tableStyleId>{BDBED569-4797-4DF1-A0F4-6AAB3CD982D8}</a:tableStyleId>
+              </a:tblPr>
+              <a:tblGrid>
+                <a:gridCol w="4457700">
+                  <a:extLst>
+                    <a:ext uri="{9D8B030D-6E8A-4147-A177-3AD203B41FA5}">
+                      <a16:colId xmlns:a16="http://schemas.microsoft.com/office/drawing/2014/main" val="2693261582"/>
+                    </a:ext>
+                  </a:extLst>
+                </a:gridCol>
+                <a:gridCol w="4457700">
+                  <a:extLst>
+                    <a:ext uri="{9D8B030D-6E8A-4147-A177-3AD203B41FA5}">
+                      <a16:colId xmlns:a16="http://schemas.microsoft.com/office/drawing/2014/main" val="1593990552"/>
+                    </a:ext>
+                  </a:extLst>
+                </a:gridCol>
+              </a:tblGrid>
+              <a:tr h="0">
+                <a:tc>
+                  <a:txBody>
+                    <a:bodyPr/>
+                    <a:lstStyle/>
+                    <a:p>
+                      <a:r>
+                        <a:rPr lang="en-GB" b="1"/>
+                        <a:t>Model</a:t>
+                      </a:r>
+                    </a:p>
+                  </a:txBody>
+                  <a:tcPr anchor="ctr"/>
+                </a:tc>
+                <a:tc>
+                  <a:txBody>
+                    <a:bodyPr/>
+                    <a:lstStyle/>
+                    <a:p>
+                      <a:r>
+                        <a:rPr lang="en-GB" b="1" dirty="0"/>
+                        <a:t>Purpose</a:t>
+                      </a:r>
+                    </a:p>
+                  </a:txBody>
+                  <a:tcPr anchor="ctr"/>
+                </a:tc>
+                <a:extLst>
+                  <a:ext uri="{0D108BD9-81ED-4DB2-BD59-A6C34878D82A}">
+                    <a16:rowId xmlns:a16="http://schemas.microsoft.com/office/drawing/2014/main" val="55620503"/>
+                  </a:ext>
+                </a:extLst>
+              </a:tr>
+              <a:tr h="0">
+                <a:tc>
+                  <a:txBody>
+                    <a:bodyPr/>
+                    <a:lstStyle/>
+                    <a:p>
+                      <a:r>
+                        <a:rPr lang="en-GB" dirty="0"/>
+                        <a:t>Linear Regression</a:t>
+                      </a:r>
+                    </a:p>
+                  </a:txBody>
+                  <a:tcPr anchor="ctr"/>
+                </a:tc>
+                <a:tc>
+                  <a:txBody>
+                    <a:bodyPr/>
+                    <a:lstStyle/>
+                    <a:p>
+                      <a:r>
+                        <a:rPr lang="en-GB" dirty="0"/>
+                        <a:t>Baseline simple model</a:t>
+                      </a:r>
+                    </a:p>
+                  </a:txBody>
+                  <a:tcPr anchor="ctr"/>
+                </a:tc>
+                <a:extLst>
+                  <a:ext uri="{0D108BD9-81ED-4DB2-BD59-A6C34878D82A}">
+                    <a16:rowId xmlns:a16="http://schemas.microsoft.com/office/drawing/2014/main" val="4070164552"/>
+                  </a:ext>
+                </a:extLst>
+              </a:tr>
+              <a:tr h="0">
+                <a:tc>
+                  <a:txBody>
+                    <a:bodyPr/>
+                    <a:lstStyle/>
+                    <a:p>
+                      <a:r>
+                        <a:rPr lang="en-GB"/>
+                        <a:t>Random Forest</a:t>
+                      </a:r>
+                    </a:p>
+                  </a:txBody>
+                  <a:tcPr anchor="ctr"/>
+                </a:tc>
+                <a:tc>
+                  <a:txBody>
+                    <a:bodyPr/>
+                    <a:lstStyle/>
+                    <a:p>
+                      <a:r>
+                        <a:rPr lang="en-GB" dirty="0"/>
+                        <a:t>Advanced non-linear model</a:t>
+                      </a:r>
+                    </a:p>
+                  </a:txBody>
+                  <a:tcPr anchor="ctr"/>
+                </a:tc>
+                <a:extLst>
+                  <a:ext uri="{0D108BD9-81ED-4DB2-BD59-A6C34878D82A}">
+                    <a16:rowId xmlns:a16="http://schemas.microsoft.com/office/drawing/2014/main" val="1981497774"/>
+                  </a:ext>
+                </a:extLst>
+              </a:tr>
+            </a:tbl>
+          </a:graphicData>
+        </a:graphic>
+      </p:graphicFrame>
+      <p:sp>
+        <p:nvSpPr>
+          <p:cNvPr id="6" name="TextBox 5">
+            <a:extLst>
+              <a:ext uri="{FF2B5EF4-FFF2-40B4-BE49-F238E27FC236}">
+                <a16:creationId xmlns:a16="http://schemas.microsoft.com/office/drawing/2014/main" id="{51444F33-6187-E3D0-8023-8B57BA696357}"/>
               </a:ext>
             </a:extLst>
           </p:cNvPr>
@@ -11932,8 +13313,8 @@
         </p:nvSpPr>
         <p:spPr>
           <a:xfrm>
-            <a:off x="2730631" y="1874605"/>
-            <a:ext cx="6701603" cy="3779176"/>
+            <a:off x="2155439" y="1930132"/>
+            <a:ext cx="6098874" cy="369332"/>
           </a:xfrm>
           <a:prstGeom prst="rect">
             <a:avLst/>
@@ -11941,89 +13322,77 @@
           <a:noFill/>
         </p:spPr>
         <p:txBody>
-          <a:bodyPr rot="0" spcFirstLastPara="0" vertOverflow="overflow" horzOverflow="overflow" vert="horz" wrap="square" lIns="91440" tIns="45720" rIns="91440" bIns="45720" numCol="1" spcCol="0" rtlCol="0" fromWordArt="0" anchor="t" anchorCtr="0" forceAA="0" compatLnSpc="1">
-            <a:prstTxWarp prst="textNoShape">
-              <a:avLst/>
-            </a:prstTxWarp>
+          <a:bodyPr wrap="square">
             <a:spAutoFit/>
           </a:bodyPr>
           <a:lstStyle/>
           <a:p>
-            <a:pPr>
-              <a:lnSpc>
-                <a:spcPct val="150000"/>
-              </a:lnSpc>
-            </a:pPr>
             <a:r>
               <a:rPr lang="en-GB" dirty="0"/>
-              <a:t>Two models were used:</a:t>
+              <a:t>We tested two models to predict future crime levels:</a:t>
+            </a:r>
+            <a:endParaRPr lang="en-PK" dirty="0"/>
+          </a:p>
+        </p:txBody>
+      </p:sp>
+      <p:sp>
+        <p:nvSpPr>
+          <p:cNvPr id="8" name="TextBox 7">
+            <a:extLst>
+              <a:ext uri="{FF2B5EF4-FFF2-40B4-BE49-F238E27FC236}">
+                <a16:creationId xmlns:a16="http://schemas.microsoft.com/office/drawing/2014/main" id="{C0079944-84CB-77AD-B724-7EE5D45C953E}"/>
+              </a:ext>
+            </a:extLst>
+          </p:cNvPr>
+          <p:cNvSpPr txBox="1"/>
+          <p:nvPr/>
+        </p:nvSpPr>
+        <p:spPr>
+          <a:xfrm>
+            <a:off x="2132707" y="3989089"/>
+            <a:ext cx="6098874" cy="1477328"/>
+          </a:xfrm>
+          <a:prstGeom prst="rect">
+            <a:avLst/>
+          </a:prstGeom>
+          <a:noFill/>
+        </p:spPr>
+        <p:txBody>
+          <a:bodyPr wrap="square">
+            <a:spAutoFit/>
+          </a:bodyPr>
+          <a:lstStyle/>
+          <a:p>
+            <a:r>
+              <a:rPr lang="en-GB" b="1" dirty="0"/>
+              <a:t>Key takeaway:</a:t>
             </a:r>
           </a:p>
           <a:p>
             <a:pPr marL="285750" indent="-285750">
-              <a:lnSpc>
-                <a:spcPct val="150000"/>
-              </a:lnSpc>
               <a:buFont typeface="Arial" panose="020B0604020202020204" pitchFamily="34" charset="0"/>
               <a:buChar char="•"/>
             </a:pPr>
-            <a:r>
-              <a:rPr lang="en-GB" dirty="0"/>
-              <a:t>Linear Regression </a:t>
-            </a:r>
+            <a:endParaRPr lang="en-GB" b="1" dirty="0"/>
           </a:p>
           <a:p>
             <a:pPr marL="285750" indent="-285750">
-              <a:lnSpc>
-                <a:spcPct val="150000"/>
-              </a:lnSpc>
               <a:buFont typeface="Arial" panose="020B0604020202020204" pitchFamily="34" charset="0"/>
               <a:buChar char="•"/>
             </a:pPr>
             <a:r>
               <a:rPr lang="en-GB" dirty="0"/>
-              <a:t>Random Forest </a:t>
-            </a:r>
-          </a:p>
-          <a:p>
-            <a:pPr>
-              <a:lnSpc>
-                <a:spcPct val="150000"/>
-              </a:lnSpc>
+              <a:t>Linear Regression checks if crime follows a simple pattern </a:t>
+            </a:r>
+          </a:p>
+          <a:p>
+            <a:pPr marL="285750" indent="-285750">
+              <a:buFont typeface="Arial" panose="020B0604020202020204" pitchFamily="34" charset="0"/>
+              <a:buChar char="•"/>
             </a:pPr>
             <a:r>
               <a:rPr lang="en-GB" dirty="0"/>
-              <a:t>The goal is to predict crime for the next month and for a specific region.</a:t>
-            </a:r>
-          </a:p>
-          <a:p>
-            <a:pPr>
-              <a:lnSpc>
-                <a:spcPct val="150000"/>
-              </a:lnSpc>
-            </a:pPr>
-            <a:endParaRPr lang="en-GB" dirty="0"/>
-          </a:p>
-          <a:p>
-            <a:pPr>
-              <a:lnSpc>
-                <a:spcPct val="150000"/>
-              </a:lnSpc>
-            </a:pPr>
-            <a:r>
-              <a:rPr lang="en-GB" dirty="0"/>
-              <a:t>Why use these two model: </a:t>
-            </a:r>
-          </a:p>
-          <a:p>
-            <a:pPr>
-              <a:lnSpc>
-                <a:spcPct val="150000"/>
-              </a:lnSpc>
-            </a:pPr>
-            <a:r>
-              <a:rPr lang="en-GB" dirty="0"/>
-              <a:t>We are testing whether crime prediction is simple (linear) or complex (non-linear).</a:t>
+              <a:t>Random Forest captures complex relationships</a:t>
             </a:r>
           </a:p>
         </p:txBody>
@@ -12041,7 +13410,7 @@
 </p:sld>
 </file>
 
-<file path=ppt/slides/slide19.xml><?xml version="1.0" encoding="utf-8"?>
+<file path=ppt/slides/slide18.xml><?xml version="1.0" encoding="utf-8"?>
 <p:sld xmlns:a="http://schemas.openxmlformats.org/drawingml/2006/main" xmlns:r="http://schemas.openxmlformats.org/officeDocument/2006/relationships" xmlns:p="http://schemas.openxmlformats.org/presentationml/2006/main">
   <p:cSld>
     <p:spTree>
@@ -12095,7 +13464,7 @@
             <a:pPr algn="ctr"/>
             <a:r>
               <a:rPr lang="en-GB" b="1" dirty="0"/>
-              <a:t>Model Performance</a:t>
+              <a:t>Model Performance &amp; Comparison</a:t>
             </a:r>
             <a:endParaRPr lang="en-US" b="1" dirty="0">
               <a:latin typeface="Times New Roman" panose="02020603050405020304" pitchFamily="18" charset="0"/>
@@ -12127,7 +13496,7 @@
           <a:p>
             <a:fld id="{CB4D3031-0AEB-4687-8E23-04446010D3FF}" type="slidenum">
               <a:rPr lang="en-US" smtClean="0"/>
-              <a:t>19</a:t>
+              <a:t>18</a:t>
             </a:fld>
             <a:endParaRPr lang="en-US"/>
           </a:p>
@@ -12147,8 +13516,8 @@
         </p:nvSpPr>
         <p:spPr>
           <a:xfrm>
-            <a:off x="4001765" y="2016441"/>
-            <a:ext cx="4188469" cy="3363678"/>
+            <a:off x="3067431" y="3582807"/>
+            <a:ext cx="5519618" cy="1285288"/>
           </a:xfrm>
           <a:prstGeom prst="rect">
             <a:avLst/>
@@ -12168,20 +13537,7 @@
             </a:pPr>
             <a:r>
               <a:rPr lang="en-GB" dirty="0"/>
-              <a:t>Linear Regression:</a:t>
-            </a:r>
-          </a:p>
-          <a:p>
-            <a:pPr marL="285750" indent="-285750">
-              <a:lnSpc>
-                <a:spcPct val="150000"/>
-              </a:lnSpc>
-              <a:buFont typeface="Arial" panose="020B0604020202020204" pitchFamily="34" charset="0"/>
-              <a:buChar char="•"/>
-            </a:pPr>
-            <a:r>
-              <a:rPr lang="en-GB" dirty="0"/>
-              <a:t>RMSE: 5.35 </a:t>
+              <a:t>Lower RMSE = Better performance</a:t>
             </a:r>
           </a:p>
           <a:p>
@@ -12191,48 +13547,343 @@
               </a:lnSpc>
             </a:pPr>
             <a:r>
-              <a:rPr lang="en-GB" dirty="0"/>
-              <a:t>Random Forest:</a:t>
-            </a:r>
-          </a:p>
-          <a:p>
-            <a:pPr marL="285750" indent="-285750">
-              <a:lnSpc>
-                <a:spcPct val="150000"/>
-              </a:lnSpc>
-              <a:buFont typeface="Arial" panose="020B0604020202020204" pitchFamily="34" charset="0"/>
-              <a:buChar char="•"/>
-            </a:pPr>
-            <a:r>
-              <a:rPr lang="en-GB" dirty="0"/>
-              <a:t>RMSE: 4.84 </a:t>
-            </a:r>
-          </a:p>
-          <a:p>
-            <a:pPr>
-              <a:lnSpc>
-                <a:spcPct val="150000"/>
-              </a:lnSpc>
-            </a:pPr>
-            <a:endParaRPr lang="en-GB" dirty="0"/>
-          </a:p>
-          <a:p>
-            <a:pPr>
-              <a:lnSpc>
-                <a:spcPct val="150000"/>
-              </a:lnSpc>
-            </a:pPr>
-            <a:r>
               <a:rPr lang="en-GB" b="1" dirty="0"/>
               <a:t>Random Forest performs better because it handles complex patterns.</a:t>
             </a:r>
           </a:p>
         </p:txBody>
       </p:sp>
+      <p:graphicFrame>
+        <p:nvGraphicFramePr>
+          <p:cNvPr id="2" name="Table 1">
+            <a:extLst>
+              <a:ext uri="{FF2B5EF4-FFF2-40B4-BE49-F238E27FC236}">
+                <a16:creationId xmlns:a16="http://schemas.microsoft.com/office/drawing/2014/main" id="{CB4126B2-C153-0BD4-D357-F2BE5C315201}"/>
+              </a:ext>
+            </a:extLst>
+          </p:cNvPr>
+          <p:cNvGraphicFramePr>
+            <a:graphicFrameLocks noGrp="1"/>
+          </p:cNvGraphicFramePr>
+          <p:nvPr>
+            <p:extLst>
+              <p:ext uri="{D42A27DB-BD31-4B8C-83A1-F6EECF244321}">
+                <p14:modId xmlns:p14="http://schemas.microsoft.com/office/powerpoint/2010/main" val="3569924062"/>
+              </p:ext>
+            </p:extLst>
+          </p:nvPr>
+        </p:nvGraphicFramePr>
+        <p:xfrm>
+          <a:off x="3067431" y="2331720"/>
+          <a:ext cx="5519618" cy="1097280"/>
+        </p:xfrm>
+        <a:graphic>
+          <a:graphicData uri="http://schemas.openxmlformats.org/drawingml/2006/table">
+            <a:tbl>
+              <a:tblPr>
+                <a:tableStyleId>{E8B1032C-EA38-4F05-BA0D-38AFFFC7BED3}</a:tableStyleId>
+              </a:tblPr>
+              <a:tblGrid>
+                <a:gridCol w="2759809">
+                  <a:extLst>
+                    <a:ext uri="{9D8B030D-6E8A-4147-A177-3AD203B41FA5}">
+                      <a16:colId xmlns:a16="http://schemas.microsoft.com/office/drawing/2014/main" val="1438965786"/>
+                    </a:ext>
+                  </a:extLst>
+                </a:gridCol>
+                <a:gridCol w="2759809">
+                  <a:extLst>
+                    <a:ext uri="{9D8B030D-6E8A-4147-A177-3AD203B41FA5}">
+                      <a16:colId xmlns:a16="http://schemas.microsoft.com/office/drawing/2014/main" val="2246683725"/>
+                    </a:ext>
+                  </a:extLst>
+                </a:gridCol>
+              </a:tblGrid>
+              <a:tr h="0">
+                <a:tc>
+                  <a:txBody>
+                    <a:bodyPr/>
+                    <a:lstStyle/>
+                    <a:p>
+                      <a:r>
+                        <a:rPr lang="en-GB" b="1" dirty="0"/>
+                        <a:t>Model</a:t>
+                      </a:r>
+                    </a:p>
+                  </a:txBody>
+                  <a:tcPr anchor="ctr"/>
+                </a:tc>
+                <a:tc>
+                  <a:txBody>
+                    <a:bodyPr/>
+                    <a:lstStyle/>
+                    <a:p>
+                      <a:pPr algn="r"/>
+                      <a:r>
+                        <a:rPr lang="en-GB" b="1" dirty="0"/>
+                        <a:t>RMSE</a:t>
+                      </a:r>
+                    </a:p>
+                  </a:txBody>
+                  <a:tcPr anchor="ctr"/>
+                </a:tc>
+                <a:extLst>
+                  <a:ext uri="{0D108BD9-81ED-4DB2-BD59-A6C34878D82A}">
+                    <a16:rowId xmlns:a16="http://schemas.microsoft.com/office/drawing/2014/main" val="2165394422"/>
+                  </a:ext>
+                </a:extLst>
+              </a:tr>
+              <a:tr h="0">
+                <a:tc>
+                  <a:txBody>
+                    <a:bodyPr/>
+                    <a:lstStyle/>
+                    <a:p>
+                      <a:r>
+                        <a:rPr lang="en-GB"/>
+                        <a:t>Linear Regression</a:t>
+                      </a:r>
+                    </a:p>
+                  </a:txBody>
+                  <a:tcPr anchor="ctr"/>
+                </a:tc>
+                <a:tc>
+                  <a:txBody>
+                    <a:bodyPr/>
+                    <a:lstStyle/>
+                    <a:p>
+                      <a:pPr algn="r"/>
+                      <a:r>
+                        <a:rPr lang="en-PK"/>
+                        <a:t>5.35</a:t>
+                      </a:r>
+                    </a:p>
+                  </a:txBody>
+                  <a:tcPr anchor="ctr"/>
+                </a:tc>
+                <a:extLst>
+                  <a:ext uri="{0D108BD9-81ED-4DB2-BD59-A6C34878D82A}">
+                    <a16:rowId xmlns:a16="http://schemas.microsoft.com/office/drawing/2014/main" val="1170216867"/>
+                  </a:ext>
+                </a:extLst>
+              </a:tr>
+              <a:tr h="0">
+                <a:tc>
+                  <a:txBody>
+                    <a:bodyPr/>
+                    <a:lstStyle/>
+                    <a:p>
+                      <a:r>
+                        <a:rPr lang="en-GB"/>
+                        <a:t>Random Forest</a:t>
+                      </a:r>
+                    </a:p>
+                  </a:txBody>
+                  <a:tcPr anchor="ctr"/>
+                </a:tc>
+                <a:tc>
+                  <a:txBody>
+                    <a:bodyPr/>
+                    <a:lstStyle/>
+                    <a:p>
+                      <a:pPr algn="r"/>
+                      <a:r>
+                        <a:rPr lang="en-PK" dirty="0"/>
+                        <a:t>4.84</a:t>
+                      </a:r>
+                    </a:p>
+                  </a:txBody>
+                  <a:tcPr anchor="ctr"/>
+                </a:tc>
+                <a:extLst>
+                  <a:ext uri="{0D108BD9-81ED-4DB2-BD59-A6C34878D82A}">
+                    <a16:rowId xmlns:a16="http://schemas.microsoft.com/office/drawing/2014/main" val="3207202469"/>
+                  </a:ext>
+                </a:extLst>
+              </a:tr>
+            </a:tbl>
+          </a:graphicData>
+        </a:graphic>
+      </p:graphicFrame>
     </p:spTree>
     <p:extLst>
       <p:ext uri="{BB962C8B-B14F-4D97-AF65-F5344CB8AC3E}">
         <p14:creationId xmlns:p14="http://schemas.microsoft.com/office/powerpoint/2010/main" val="3809022379"/>
+      </p:ext>
+    </p:extLst>
+  </p:cSld>
+  <p:clrMapOvr>
+    <a:masterClrMapping/>
+  </p:clrMapOvr>
+</p:sld>
+</file>
+
+<file path=ppt/slides/slide19.xml><?xml version="1.0" encoding="utf-8"?>
+<p:sld xmlns:a="http://schemas.openxmlformats.org/drawingml/2006/main" xmlns:r="http://schemas.openxmlformats.org/officeDocument/2006/relationships" xmlns:p="http://schemas.openxmlformats.org/presentationml/2006/main">
+  <p:cSld>
+    <p:spTree>
+      <p:nvGrpSpPr>
+        <p:cNvPr id="1" name=""/>
+        <p:cNvGrpSpPr/>
+        <p:nvPr/>
+      </p:nvGrpSpPr>
+      <p:grpSpPr>
+        <a:xfrm>
+          <a:off x="0" y="0"/>
+          <a:ext cx="0" cy="0"/>
+          <a:chOff x="0" y="0"/>
+          <a:chExt cx="0" cy="0"/>
+        </a:xfrm>
+      </p:grpSpPr>
+      <p:sp>
+        <p:nvSpPr>
+          <p:cNvPr id="1048628" name="Title 1"/>
+          <p:cNvSpPr>
+            <a:spLocks noGrp="1"/>
+          </p:cNvSpPr>
+          <p:nvPr>
+            <p:ph type="title"/>
+          </p:nvPr>
+        </p:nvSpPr>
+        <p:spPr>
+          <a:xfrm>
+            <a:off x="3529137" y="65932"/>
+            <a:ext cx="4683557" cy="663371"/>
+          </a:xfrm>
+        </p:spPr>
+        <p:txBody>
+          <a:bodyPr>
+            <a:normAutofit fontScale="90000"/>
+          </a:bodyPr>
+          <a:lstStyle/>
+          <a:p>
+            <a:pPr algn="ctr"/>
+            <a:r>
+              <a:rPr lang="en-GB" sz="4000" b="1" dirty="0"/>
+              <a:t>Actual vs Predicted</a:t>
+            </a:r>
+            <a:endParaRPr lang="en-US" sz="4000" b="1" dirty="0">
+              <a:latin typeface="Times New Roman" panose="02020603050405020304" pitchFamily="18" charset="0"/>
+              <a:cs typeface="Times New Roman" panose="02020603050405020304" pitchFamily="18" charset="0"/>
+            </a:endParaRPr>
+          </a:p>
+        </p:txBody>
+      </p:sp>
+      <p:sp>
+        <p:nvSpPr>
+          <p:cNvPr id="1048629" name="Content Placeholder 2"/>
+          <p:cNvSpPr>
+            <a:spLocks noGrp="1"/>
+          </p:cNvSpPr>
+          <p:nvPr>
+            <p:ph idx="1"/>
+          </p:nvPr>
+        </p:nvSpPr>
+        <p:spPr>
+          <a:xfrm>
+            <a:off x="8040165" y="1483521"/>
+            <a:ext cx="3985058" cy="2070562"/>
+          </a:xfrm>
+        </p:spPr>
+        <p:txBody>
+          <a:bodyPr>
+            <a:normAutofit fontScale="91667"/>
+          </a:bodyPr>
+          <a:lstStyle/>
+          <a:p>
+            <a:pPr marL="0" indent="0">
+              <a:buNone/>
+            </a:pPr>
+            <a:r>
+              <a:rPr lang="en-GB" sz="2000" b="1" dirty="0"/>
+              <a:t>Most points lie close to the red line, showing good prediction accuracy. </a:t>
+            </a:r>
+          </a:p>
+          <a:p>
+            <a:pPr marL="0" indent="0">
+              <a:buNone/>
+            </a:pPr>
+            <a:r>
+              <a:rPr lang="en-GB" sz="2000" dirty="0"/>
+              <a:t>A few points further away indicate some prediction errors, especially at higher crime values.</a:t>
+            </a:r>
+          </a:p>
+        </p:txBody>
+      </p:sp>
+      <p:sp>
+        <p:nvSpPr>
+          <p:cNvPr id="3" name="Slide Number Placeholder 2"/>
+          <p:cNvSpPr>
+            <a:spLocks noGrp="1"/>
+          </p:cNvSpPr>
+          <p:nvPr>
+            <p:ph type="sldNum" sz="quarter" idx="12"/>
+          </p:nvPr>
+        </p:nvSpPr>
+        <p:spPr/>
+        <p:txBody>
+          <a:bodyPr/>
+          <a:lstStyle/>
+          <a:p>
+            <a:fld id="{CB4D3031-0AEB-4687-8E23-04446010D3FF}" type="slidenum">
+              <a:rPr lang="en-US" smtClean="0"/>
+              <a:t>19</a:t>
+            </a:fld>
+            <a:endParaRPr lang="en-US"/>
+          </a:p>
+        </p:txBody>
+      </p:sp>
+      <p:pic>
+        <p:nvPicPr>
+          <p:cNvPr id="1026" name="Picture 2">
+            <a:extLst>
+              <a:ext uri="{FF2B5EF4-FFF2-40B4-BE49-F238E27FC236}">
+                <a16:creationId xmlns:a16="http://schemas.microsoft.com/office/drawing/2014/main" id="{3BF853B0-D534-1749-2089-E5CC6ECE5191}"/>
+              </a:ext>
+            </a:extLst>
+          </p:cNvPr>
+          <p:cNvPicPr>
+            <a:picLocks noChangeAspect="1" noChangeArrowheads="1"/>
+          </p:cNvPicPr>
+          <p:nvPr/>
+        </p:nvPicPr>
+        <p:blipFill>
+          <a:blip r:embed="rId3">
+            <a:extLst>
+              <a:ext uri="{28A0092B-C50C-407E-A947-70E740481C1C}">
+                <a14:useLocalDpi xmlns:a14="http://schemas.microsoft.com/office/drawing/2010/main" val="0"/>
+              </a:ext>
+            </a:extLst>
+          </a:blip>
+          <a:srcRect/>
+          <a:stretch>
+            <a:fillRect/>
+          </a:stretch>
+        </p:blipFill>
+        <p:spPr bwMode="auto">
+          <a:xfrm>
+            <a:off x="1543987" y="1332277"/>
+            <a:ext cx="6254854" cy="4922749"/>
+          </a:xfrm>
+          <a:prstGeom prst="rect">
+            <a:avLst/>
+          </a:prstGeom>
+          <a:noFill/>
+          <a:extLst>
+            <a:ext uri="{909E8E84-426E-40DD-AFC4-6F175D3DCCD1}">
+              <a14:hiddenFill xmlns:a14="http://schemas.microsoft.com/office/drawing/2010/main">
+                <a:solidFill>
+                  <a:srgbClr val="FFFFFF"/>
+                </a:solidFill>
+              </a14:hiddenFill>
+            </a:ext>
+          </a:extLst>
+        </p:spPr>
+      </p:pic>
+    </p:spTree>
+    <p:extLst>
+      <p:ext uri="{BB962C8B-B14F-4D97-AF65-F5344CB8AC3E}">
+        <p14:creationId xmlns:p14="http://schemas.microsoft.com/office/powerpoint/2010/main" val="4283816116"/>
       </p:ext>
     </p:extLst>
   </p:cSld>
@@ -12284,7 +13935,7 @@
             <a:pPr algn="ctr"/>
             <a:r>
               <a:rPr lang="en-GB" sz="4800" b="1" dirty="0"/>
-              <a:t>Introduction</a:t>
+              <a:t>Problem</a:t>
             </a:r>
             <a:endParaRPr lang="en-US" sz="4500" b="1" dirty="0">
               <a:solidFill>
@@ -12312,71 +13963,31 @@
         </p:spPr>
         <p:txBody>
           <a:bodyPr>
-            <a:normAutofit fontScale="92500" lnSpcReduction="10000"/>
+            <a:normAutofit/>
           </a:bodyPr>
           <a:lstStyle/>
           <a:p>
             <a:r>
               <a:rPr lang="en-GB" sz="2400" dirty="0"/>
-              <a:t>Crime affects people’s </a:t>
-            </a:r>
-            <a:r>
-              <a:rPr lang="en-GB" sz="2400" b="1" dirty="0"/>
-              <a:t>safety and daily life</a:t>
-            </a:r>
+              <a:t>This project uses real UK Police crime data to support better decisions for safety and planning.</a:t>
+            </a:r>
+          </a:p>
+          <a:p>
             <a:r>
               <a:rPr lang="en-GB" sz="2400" dirty="0"/>
-              <a:t>. Police collect large amounts of crime data, but it is difficult to study it manually.</a:t>
+              <a:t>Crime data is huge.</a:t>
             </a:r>
           </a:p>
           <a:p>
             <a:r>
               <a:rPr lang="en-GB" sz="2400" dirty="0"/>
-              <a:t>Machine learning can help by:</a:t>
+              <a:t>Hard to analyse manually</a:t>
             </a:r>
           </a:p>
           <a:p>
             <a:r>
               <a:rPr lang="en-GB" sz="2400" dirty="0"/>
-              <a:t>Finding </a:t>
-            </a:r>
-            <a:r>
-              <a:rPr lang="en-GB" sz="2400" b="1" dirty="0"/>
-              <a:t>patterns</a:t>
-            </a:r>
-            <a:r>
-              <a:rPr lang="en-GB" sz="2400" dirty="0"/>
-              <a:t> in crime data </a:t>
-            </a:r>
-          </a:p>
-          <a:p>
-            <a:r>
-              <a:rPr lang="en-GB" sz="2400" dirty="0"/>
-              <a:t>Identifying </a:t>
-            </a:r>
-            <a:r>
-              <a:rPr lang="en-GB" sz="2400" b="1" dirty="0"/>
-              <a:t>high-risk areas </a:t>
-            </a:r>
-          </a:p>
-          <a:p>
-            <a:r>
-              <a:rPr lang="en-GB" sz="2400" dirty="0"/>
-              <a:t>Predicting </a:t>
-            </a:r>
-            <a:r>
-              <a:rPr lang="en-GB" sz="2400" b="1" dirty="0"/>
-              <a:t>future</a:t>
-            </a:r>
-            <a:r>
-              <a:rPr lang="en-GB" sz="2400" dirty="0"/>
-              <a:t> crime levels </a:t>
-            </a:r>
-          </a:p>
-          <a:p>
-            <a:r>
-              <a:rPr lang="en-GB" sz="2400" dirty="0"/>
-              <a:t>This project uses real crime data to support better decisions for safety and planning.</a:t>
+              <a:t>Need smarter decisions</a:t>
             </a:r>
           </a:p>
         </p:txBody>
@@ -12446,172 +14057,6 @@
         </p:nvSpPr>
         <p:spPr>
           <a:xfrm>
-            <a:off x="3529137" y="65932"/>
-            <a:ext cx="4683557" cy="663371"/>
-          </a:xfrm>
-        </p:spPr>
-        <p:txBody>
-          <a:bodyPr>
-            <a:normAutofit fontScale="90000"/>
-          </a:bodyPr>
-          <a:lstStyle/>
-          <a:p>
-            <a:pPr algn="ctr"/>
-            <a:r>
-              <a:rPr lang="en-GB" sz="4000" b="1" dirty="0"/>
-              <a:t>Actual vs Predicted</a:t>
-            </a:r>
-            <a:endParaRPr lang="en-US" sz="4000" b="1" dirty="0">
-              <a:latin typeface="Times New Roman" panose="02020603050405020304" pitchFamily="18" charset="0"/>
-              <a:cs typeface="Times New Roman" panose="02020603050405020304" pitchFamily="18" charset="0"/>
-            </a:endParaRPr>
-          </a:p>
-        </p:txBody>
-      </p:sp>
-      <p:sp>
-        <p:nvSpPr>
-          <p:cNvPr id="1048629" name="Content Placeholder 2"/>
-          <p:cNvSpPr>
-            <a:spLocks noGrp="1"/>
-          </p:cNvSpPr>
-          <p:nvPr>
-            <p:ph idx="1"/>
-          </p:nvPr>
-        </p:nvSpPr>
-        <p:spPr>
-          <a:xfrm>
-            <a:off x="1543987" y="5652052"/>
-            <a:ext cx="10148341" cy="1205948"/>
-          </a:xfrm>
-        </p:spPr>
-        <p:txBody>
-          <a:bodyPr>
-            <a:normAutofit fontScale="99167" lnSpcReduction="10000"/>
-          </a:bodyPr>
-          <a:lstStyle/>
-          <a:p>
-            <a:pPr marL="0" indent="0">
-              <a:buNone/>
-            </a:pPr>
-            <a:r>
-              <a:rPr lang="en-GB" sz="2000" dirty="0"/>
-              <a:t>This graph compares actual crime counts with predicted values. The red line represents perfect predictions. Most points lie close to this line, which shows the model is performing well. A few points further away indicate some prediction errors, especially at higher crime values.</a:t>
-            </a:r>
-          </a:p>
-        </p:txBody>
-      </p:sp>
-      <p:sp>
-        <p:nvSpPr>
-          <p:cNvPr id="3" name="Slide Number Placeholder 2"/>
-          <p:cNvSpPr>
-            <a:spLocks noGrp="1"/>
-          </p:cNvSpPr>
-          <p:nvPr>
-            <p:ph type="sldNum" sz="quarter" idx="12"/>
-          </p:nvPr>
-        </p:nvSpPr>
-        <p:spPr/>
-        <p:txBody>
-          <a:bodyPr/>
-          <a:lstStyle/>
-          <a:p>
-            <a:fld id="{CB4D3031-0AEB-4687-8E23-04446010D3FF}" type="slidenum">
-              <a:rPr lang="en-US" smtClean="0"/>
-              <a:t>20</a:t>
-            </a:fld>
-            <a:endParaRPr lang="en-US"/>
-          </a:p>
-        </p:txBody>
-      </p:sp>
-      <p:pic>
-        <p:nvPicPr>
-          <p:cNvPr id="1026" name="Picture 2">
-            <a:extLst>
-              <a:ext uri="{FF2B5EF4-FFF2-40B4-BE49-F238E27FC236}">
-                <a16:creationId xmlns:a16="http://schemas.microsoft.com/office/drawing/2014/main" id="{3BF853B0-D534-1749-2089-E5CC6ECE5191}"/>
-              </a:ext>
-            </a:extLst>
-          </p:cNvPr>
-          <p:cNvPicPr>
-            <a:picLocks noChangeAspect="1" noChangeArrowheads="1"/>
-          </p:cNvPicPr>
-          <p:nvPr/>
-        </p:nvPicPr>
-        <p:blipFill>
-          <a:blip r:embed="rId3">
-            <a:extLst>
-              <a:ext uri="{28A0092B-C50C-407E-A947-70E740481C1C}">
-                <a14:useLocalDpi xmlns:a14="http://schemas.microsoft.com/office/drawing/2010/main" val="0"/>
-              </a:ext>
-            </a:extLst>
-          </a:blip>
-          <a:srcRect/>
-          <a:stretch>
-            <a:fillRect/>
-          </a:stretch>
-        </p:blipFill>
-        <p:spPr bwMode="auto">
-          <a:xfrm>
-            <a:off x="2623279" y="729303"/>
-            <a:ext cx="6254854" cy="4922749"/>
-          </a:xfrm>
-          <a:prstGeom prst="rect">
-            <a:avLst/>
-          </a:prstGeom>
-          <a:noFill/>
-          <a:extLst>
-            <a:ext uri="{909E8E84-426E-40DD-AFC4-6F175D3DCCD1}">
-              <a14:hiddenFill xmlns:a14="http://schemas.microsoft.com/office/drawing/2010/main">
-                <a:solidFill>
-                  <a:srgbClr val="FFFFFF"/>
-                </a:solidFill>
-              </a14:hiddenFill>
-            </a:ext>
-          </a:extLst>
-        </p:spPr>
-      </p:pic>
-    </p:spTree>
-    <p:extLst>
-      <p:ext uri="{BB962C8B-B14F-4D97-AF65-F5344CB8AC3E}">
-        <p14:creationId xmlns:p14="http://schemas.microsoft.com/office/powerpoint/2010/main" val="4283816116"/>
-      </p:ext>
-    </p:extLst>
-  </p:cSld>
-  <p:clrMapOvr>
-    <a:masterClrMapping/>
-  </p:clrMapOvr>
-</p:sld>
-</file>
-
-<file path=ppt/slides/slide21.xml><?xml version="1.0" encoding="utf-8"?>
-<p:sld xmlns:a="http://schemas.openxmlformats.org/drawingml/2006/main" xmlns:r="http://schemas.openxmlformats.org/officeDocument/2006/relationships" xmlns:p="http://schemas.openxmlformats.org/presentationml/2006/main">
-  <p:cSld>
-    <p:spTree>
-      <p:nvGrpSpPr>
-        <p:cNvPr id="1" name=""/>
-        <p:cNvGrpSpPr/>
-        <p:nvPr/>
-      </p:nvGrpSpPr>
-      <p:grpSpPr>
-        <a:xfrm>
-          <a:off x="0" y="0"/>
-          <a:ext cx="0" cy="0"/>
-          <a:chOff x="0" y="0"/>
-          <a:chExt cx="0" cy="0"/>
-        </a:xfrm>
-      </p:grpSpPr>
-      <p:sp>
-        <p:nvSpPr>
-          <p:cNvPr id="1048628" name="Title 1"/>
-          <p:cNvSpPr>
-            <a:spLocks noGrp="1"/>
-          </p:cNvSpPr>
-          <p:nvPr>
-            <p:ph type="title"/>
-          </p:nvPr>
-        </p:nvSpPr>
-        <p:spPr>
-          <a:xfrm>
             <a:off x="2975126" y="652535"/>
             <a:ext cx="6987655" cy="635618"/>
           </a:xfrm>
@@ -12651,7 +14096,7 @@
           <a:p>
             <a:fld id="{CB4D3031-0AEB-4687-8E23-04446010D3FF}" type="slidenum">
               <a:rPr lang="en-US" smtClean="0"/>
-              <a:t>21</a:t>
+              <a:t>20</a:t>
             </a:fld>
             <a:endParaRPr lang="en-US"/>
           </a:p>
@@ -12671,8 +14116,8 @@
         </p:nvSpPr>
         <p:spPr>
           <a:xfrm>
-            <a:off x="3561048" y="3129304"/>
-            <a:ext cx="6987655" cy="2117183"/>
+            <a:off x="2975126" y="3129303"/>
+            <a:ext cx="6987655" cy="1286186"/>
           </a:xfrm>
           <a:prstGeom prst="rect">
             <a:avLst/>
@@ -12691,16 +14136,10 @@
               </a:lnSpc>
             </a:pPr>
             <a:r>
-              <a:rPr lang="en-GB" dirty="0"/>
-              <a:t>Train RMSE: 1.83</a:t>
-            </a:r>
-            <a:br>
-              <a:rPr lang="en-GB" dirty="0"/>
-            </a:br>
-            <a:r>
-              <a:rPr lang="en-GB" dirty="0"/>
-              <a:t>Test RMSE: 4.84</a:t>
-            </a:r>
+              <a:rPr lang="en-GB" b="1" dirty="0"/>
+              <a:t>Big gap → overfitting</a:t>
+            </a:r>
+            <a:endParaRPr lang="en-GB" dirty="0"/>
           </a:p>
           <a:p>
             <a:pPr>
@@ -12709,18 +14148,6 @@
               </a:lnSpc>
             </a:pPr>
             <a:r>
-              <a:rPr lang="en-GB" b="1" dirty="0"/>
-              <a:t>Big gap → overfitting</a:t>
-            </a:r>
-            <a:endParaRPr lang="en-GB" dirty="0"/>
-          </a:p>
-          <a:p>
-            <a:pPr>
-              <a:lnSpc>
-                <a:spcPct val="150000"/>
-              </a:lnSpc>
-            </a:pPr>
-            <a:r>
               <a:rPr lang="en-GB" dirty="0"/>
               <a:t>The model performs much better on training data.</a:t>
             </a:r>
@@ -12734,6 +14161,158 @@
           </a:p>
         </p:txBody>
       </p:sp>
+      <p:graphicFrame>
+        <p:nvGraphicFramePr>
+          <p:cNvPr id="2" name="Table 1">
+            <a:extLst>
+              <a:ext uri="{FF2B5EF4-FFF2-40B4-BE49-F238E27FC236}">
+                <a16:creationId xmlns:a16="http://schemas.microsoft.com/office/drawing/2014/main" id="{F9AE4AC6-7B05-ED24-FED7-E2145D793F32}"/>
+              </a:ext>
+            </a:extLst>
+          </p:cNvPr>
+          <p:cNvGraphicFramePr>
+            <a:graphicFrameLocks noGrp="1"/>
+          </p:cNvGraphicFramePr>
+          <p:nvPr>
+            <p:extLst>
+              <p:ext uri="{D42A27DB-BD31-4B8C-83A1-F6EECF244321}">
+                <p14:modId xmlns:p14="http://schemas.microsoft.com/office/powerpoint/2010/main" val="2166158232"/>
+              </p:ext>
+            </p:extLst>
+          </p:nvPr>
+        </p:nvGraphicFramePr>
+        <p:xfrm>
+          <a:off x="3012368" y="1660088"/>
+          <a:ext cx="6167264" cy="1097280"/>
+        </p:xfrm>
+        <a:graphic>
+          <a:graphicData uri="http://schemas.openxmlformats.org/drawingml/2006/table">
+            <a:tbl>
+              <a:tblPr>
+                <a:tableStyleId>{E8B1032C-EA38-4F05-BA0D-38AFFFC7BED3}</a:tableStyleId>
+              </a:tblPr>
+              <a:tblGrid>
+                <a:gridCol w="3083632">
+                  <a:extLst>
+                    <a:ext uri="{9D8B030D-6E8A-4147-A177-3AD203B41FA5}">
+                      <a16:colId xmlns:a16="http://schemas.microsoft.com/office/drawing/2014/main" val="231882164"/>
+                    </a:ext>
+                  </a:extLst>
+                </a:gridCol>
+                <a:gridCol w="3083632">
+                  <a:extLst>
+                    <a:ext uri="{9D8B030D-6E8A-4147-A177-3AD203B41FA5}">
+                      <a16:colId xmlns:a16="http://schemas.microsoft.com/office/drawing/2014/main" val="2986881160"/>
+                    </a:ext>
+                  </a:extLst>
+                </a:gridCol>
+              </a:tblGrid>
+              <a:tr h="0">
+                <a:tc>
+                  <a:txBody>
+                    <a:bodyPr/>
+                    <a:lstStyle/>
+                    <a:p>
+                      <a:r>
+                        <a:rPr lang="en-GB" b="1" dirty="0"/>
+                        <a:t>Metric</a:t>
+                      </a:r>
+                    </a:p>
+                  </a:txBody>
+                  <a:tcPr anchor="ctr"/>
+                </a:tc>
+                <a:tc>
+                  <a:txBody>
+                    <a:bodyPr/>
+                    <a:lstStyle/>
+                    <a:p>
+                      <a:pPr algn="r"/>
+                      <a:r>
+                        <a:rPr lang="en-GB" b="1" dirty="0"/>
+                        <a:t>Value</a:t>
+                      </a:r>
+                    </a:p>
+                  </a:txBody>
+                  <a:tcPr anchor="ctr"/>
+                </a:tc>
+                <a:extLst>
+                  <a:ext uri="{0D108BD9-81ED-4DB2-BD59-A6C34878D82A}">
+                    <a16:rowId xmlns:a16="http://schemas.microsoft.com/office/drawing/2014/main" val="3176355876"/>
+                  </a:ext>
+                </a:extLst>
+              </a:tr>
+              <a:tr h="0">
+                <a:tc>
+                  <a:txBody>
+                    <a:bodyPr/>
+                    <a:lstStyle/>
+                    <a:p>
+                      <a:r>
+                        <a:rPr lang="en-GB"/>
+                        <a:t>Train RMSE</a:t>
+                      </a:r>
+                    </a:p>
+                  </a:txBody>
+                  <a:tcPr anchor="ctr"/>
+                </a:tc>
+                <a:tc>
+                  <a:txBody>
+                    <a:bodyPr/>
+                    <a:lstStyle/>
+                    <a:p>
+                      <a:pPr algn="r"/>
+                      <a:r>
+                        <a:rPr lang="en-PK"/>
+                        <a:t>1.83</a:t>
+                      </a:r>
+                    </a:p>
+                  </a:txBody>
+                  <a:tcPr anchor="ctr"/>
+                </a:tc>
+                <a:extLst>
+                  <a:ext uri="{0D108BD9-81ED-4DB2-BD59-A6C34878D82A}">
+                    <a16:rowId xmlns:a16="http://schemas.microsoft.com/office/drawing/2014/main" val="2857517708"/>
+                  </a:ext>
+                </a:extLst>
+              </a:tr>
+              <a:tr h="0">
+                <a:tc>
+                  <a:txBody>
+                    <a:bodyPr/>
+                    <a:lstStyle/>
+                    <a:p>
+                      <a:r>
+                        <a:rPr lang="en-GB"/>
+                        <a:t>Test RMSE</a:t>
+                      </a:r>
+                    </a:p>
+                  </a:txBody>
+                  <a:tcPr anchor="ctr"/>
+                </a:tc>
+                <a:tc>
+                  <a:txBody>
+                    <a:bodyPr/>
+                    <a:lstStyle/>
+                    <a:p>
+                      <a:pPr algn="r"/>
+                      <a:r>
+                        <a:rPr lang="en-PK" dirty="0"/>
+                        <a:t>4.84</a:t>
+                      </a:r>
+                    </a:p>
+                  </a:txBody>
+                  <a:tcPr anchor="ctr"/>
+                </a:tc>
+                <a:extLst>
+                  <a:ext uri="{0D108BD9-81ED-4DB2-BD59-A6C34878D82A}">
+                    <a16:rowId xmlns:a16="http://schemas.microsoft.com/office/drawing/2014/main" val="3679248593"/>
+                  </a:ext>
+                </a:extLst>
+              </a:tr>
+            </a:tbl>
+          </a:graphicData>
+        </a:graphic>
+      </p:graphicFrame>
     </p:spTree>
     <p:extLst>
       <p:ext uri="{BB962C8B-B14F-4D97-AF65-F5344CB8AC3E}">
@@ -12747,7 +14326,7 @@
 </p:sld>
 </file>
 
-<file path=ppt/slides/slide22.xml><?xml version="1.0" encoding="utf-8"?>
+<file path=ppt/slides/slide21.xml><?xml version="1.0" encoding="utf-8"?>
 <p:sld xmlns:a="http://schemas.openxmlformats.org/drawingml/2006/main" xmlns:r="http://schemas.openxmlformats.org/officeDocument/2006/relationships" xmlns:p="http://schemas.openxmlformats.org/presentationml/2006/main">
   <p:cSld>
     <p:spTree>
@@ -12788,7 +14367,7 @@
         </p:nvSpPr>
         <p:spPr>
           <a:xfrm>
-            <a:off x="2177473" y="-2190"/>
+            <a:off x="2177473" y="229996"/>
             <a:ext cx="9068282" cy="870769"/>
           </a:xfrm>
         </p:spPr>
@@ -12800,8 +14379,8 @@
           <a:p>
             <a:pPr algn="ctr"/>
             <a:r>
-              <a:rPr lang="en-GB" dirty="0"/>
-              <a:t>Regularisation</a:t>
+              <a:rPr lang="en-GB" b="1" dirty="0"/>
+              <a:t>Model Improvement</a:t>
             </a:r>
             <a:endParaRPr lang="en-US" b="1" dirty="0">
               <a:latin typeface="Times New Roman" panose="02020603050405020304" pitchFamily="18" charset="0"/>
@@ -12833,70 +14412,9 @@
           <a:p>
             <a:fld id="{CB4D3031-0AEB-4687-8E23-04446010D3FF}" type="slidenum">
               <a:rPr lang="en-US" smtClean="0"/>
-              <a:t>22</a:t>
+              <a:t>21</a:t>
             </a:fld>
             <a:endParaRPr lang="en-US"/>
-          </a:p>
-        </p:txBody>
-      </p:sp>
-      <p:sp>
-        <p:nvSpPr>
-          <p:cNvPr id="9" name="TextBox 8">
-            <a:extLst>
-              <a:ext uri="{FF2B5EF4-FFF2-40B4-BE49-F238E27FC236}">
-                <a16:creationId xmlns:a16="http://schemas.microsoft.com/office/drawing/2014/main" id="{9F7B0C50-6CE6-F279-4B6F-2E9FA49E4E3E}"/>
-              </a:ext>
-            </a:extLst>
-          </p:cNvPr>
-          <p:cNvSpPr txBox="1"/>
-          <p:nvPr/>
-        </p:nvSpPr>
-        <p:spPr>
-          <a:xfrm>
-            <a:off x="3627147" y="708133"/>
-            <a:ext cx="7107113" cy="1477328"/>
-          </a:xfrm>
-          <a:prstGeom prst="rect">
-            <a:avLst/>
-          </a:prstGeom>
-          <a:noFill/>
-        </p:spPr>
-        <p:txBody>
-          <a:bodyPr wrap="square" lIns="91440" tIns="45720" rIns="91440" bIns="45720" anchor="t">
-            <a:spAutoFit/>
-          </a:bodyPr>
-          <a:lstStyle/>
-          <a:p>
-            <a:r>
-              <a:rPr lang="en-GB" dirty="0"/>
-              <a:t>After limiting model complexity:</a:t>
-            </a:r>
-          </a:p>
-          <a:p>
-            <a:r>
-              <a:rPr lang="en-GB" dirty="0"/>
-              <a:t>Train RMSE: 3.98</a:t>
-            </a:r>
-            <a:br>
-              <a:rPr lang="en-GB" dirty="0"/>
-            </a:br>
-            <a:r>
-              <a:rPr lang="en-GB" dirty="0"/>
-              <a:t>Test RMSE: 4.85</a:t>
-            </a:r>
-          </a:p>
-          <a:p>
-            <a:r>
-              <a:rPr lang="en-GB" dirty="0"/>
-              <a:t>The gap between train and test reduces.</a:t>
-            </a:r>
-            <a:br>
-              <a:rPr lang="en-GB" dirty="0"/>
-            </a:br>
-            <a:r>
-              <a:rPr lang="en-GB" dirty="0"/>
-              <a:t>This improves generalisation.</a:t>
-            </a:r>
           </a:p>
         </p:txBody>
       </p:sp>
@@ -12929,7 +14447,7 @@
         </p:blipFill>
         <p:spPr bwMode="auto">
           <a:xfrm>
-            <a:off x="2629854" y="2185461"/>
+            <a:off x="1118409" y="1684546"/>
             <a:ext cx="6932292" cy="4551984"/>
           </a:xfrm>
           <a:prstGeom prst="rect">
@@ -12947,10 +14465,594 @@
           </a:extLst>
         </p:spPr>
       </p:pic>
+      <p:sp>
+        <p:nvSpPr>
+          <p:cNvPr id="5" name="TextBox 4">
+            <a:extLst>
+              <a:ext uri="{FF2B5EF4-FFF2-40B4-BE49-F238E27FC236}">
+                <a16:creationId xmlns:a16="http://schemas.microsoft.com/office/drawing/2014/main" id="{E4D0053E-C960-C220-E3A6-808453BB8D99}"/>
+              </a:ext>
+            </a:extLst>
+          </p:cNvPr>
+          <p:cNvSpPr txBox="1"/>
+          <p:nvPr/>
+        </p:nvSpPr>
+        <p:spPr>
+          <a:xfrm>
+            <a:off x="4392284" y="968241"/>
+            <a:ext cx="6098874" cy="369332"/>
+          </a:xfrm>
+          <a:prstGeom prst="rect">
+            <a:avLst/>
+          </a:prstGeom>
+          <a:noFill/>
+        </p:spPr>
+        <p:txBody>
+          <a:bodyPr wrap="square">
+            <a:spAutoFit/>
+          </a:bodyPr>
+          <a:lstStyle/>
+          <a:p>
+            <a:r>
+              <a:rPr lang="en-GB" b="1" dirty="0"/>
+              <a:t>Regularisation &amp; Hyperparameter Tuning</a:t>
+            </a:r>
+            <a:endParaRPr lang="en-PK" b="1" dirty="0"/>
+          </a:p>
+        </p:txBody>
+      </p:sp>
+      <p:graphicFrame>
+        <p:nvGraphicFramePr>
+          <p:cNvPr id="6" name="Table 5">
+            <a:extLst>
+              <a:ext uri="{FF2B5EF4-FFF2-40B4-BE49-F238E27FC236}">
+                <a16:creationId xmlns:a16="http://schemas.microsoft.com/office/drawing/2014/main" id="{5BF0A3AA-5F96-907D-D405-2681D85677E7}"/>
+              </a:ext>
+            </a:extLst>
+          </p:cNvPr>
+          <p:cNvGraphicFramePr>
+            <a:graphicFrameLocks noGrp="1"/>
+          </p:cNvGraphicFramePr>
+          <p:nvPr>
+            <p:extLst>
+              <p:ext uri="{D42A27DB-BD31-4B8C-83A1-F6EECF244321}">
+                <p14:modId xmlns:p14="http://schemas.microsoft.com/office/powerpoint/2010/main" val="3444455675"/>
+              </p:ext>
+            </p:extLst>
+          </p:nvPr>
+        </p:nvGraphicFramePr>
+        <p:xfrm>
+          <a:off x="8233655" y="2157769"/>
+          <a:ext cx="3757064" cy="1463040"/>
+        </p:xfrm>
+        <a:graphic>
+          <a:graphicData uri="http://schemas.openxmlformats.org/drawingml/2006/table">
+            <a:tbl>
+              <a:tblPr>
+                <a:tableStyleId>{E8B1032C-EA38-4F05-BA0D-38AFFFC7BED3}</a:tableStyleId>
+              </a:tblPr>
+              <a:tblGrid>
+                <a:gridCol w="1878532">
+                  <a:extLst>
+                    <a:ext uri="{9D8B030D-6E8A-4147-A177-3AD203B41FA5}">
+                      <a16:colId xmlns:a16="http://schemas.microsoft.com/office/drawing/2014/main" val="986115107"/>
+                    </a:ext>
+                  </a:extLst>
+                </a:gridCol>
+                <a:gridCol w="1878532">
+                  <a:extLst>
+                    <a:ext uri="{9D8B030D-6E8A-4147-A177-3AD203B41FA5}">
+                      <a16:colId xmlns:a16="http://schemas.microsoft.com/office/drawing/2014/main" val="147825107"/>
+                    </a:ext>
+                  </a:extLst>
+                </a:gridCol>
+              </a:tblGrid>
+              <a:tr h="0">
+                <a:tc>
+                  <a:txBody>
+                    <a:bodyPr/>
+                    <a:lstStyle/>
+                    <a:p>
+                      <a:r>
+                        <a:rPr lang="en-GB" b="1" dirty="0"/>
+                        <a:t>Model Version</a:t>
+                      </a:r>
+                    </a:p>
+                  </a:txBody>
+                  <a:tcPr anchor="ctr"/>
+                </a:tc>
+                <a:tc>
+                  <a:txBody>
+                    <a:bodyPr/>
+                    <a:lstStyle/>
+                    <a:p>
+                      <a:pPr algn="r"/>
+                      <a:r>
+                        <a:rPr lang="en-GB" b="1" dirty="0"/>
+                        <a:t>RMSE</a:t>
+                      </a:r>
+                    </a:p>
+                  </a:txBody>
+                  <a:tcPr anchor="ctr"/>
+                </a:tc>
+                <a:extLst>
+                  <a:ext uri="{0D108BD9-81ED-4DB2-BD59-A6C34878D82A}">
+                    <a16:rowId xmlns:a16="http://schemas.microsoft.com/office/drawing/2014/main" val="2119663002"/>
+                  </a:ext>
+                </a:extLst>
+              </a:tr>
+              <a:tr h="0">
+                <a:tc>
+                  <a:txBody>
+                    <a:bodyPr/>
+                    <a:lstStyle/>
+                    <a:p>
+                      <a:r>
+                        <a:rPr lang="en-GB"/>
+                        <a:t>Initial RF</a:t>
+                      </a:r>
+                    </a:p>
+                  </a:txBody>
+                  <a:tcPr anchor="ctr"/>
+                </a:tc>
+                <a:tc>
+                  <a:txBody>
+                    <a:bodyPr/>
+                    <a:lstStyle/>
+                    <a:p>
+                      <a:pPr algn="r"/>
+                      <a:r>
+                        <a:rPr lang="en-PK"/>
+                        <a:t>4.84</a:t>
+                      </a:r>
+                    </a:p>
+                  </a:txBody>
+                  <a:tcPr anchor="ctr"/>
+                </a:tc>
+                <a:extLst>
+                  <a:ext uri="{0D108BD9-81ED-4DB2-BD59-A6C34878D82A}">
+                    <a16:rowId xmlns:a16="http://schemas.microsoft.com/office/drawing/2014/main" val="2993278234"/>
+                  </a:ext>
+                </a:extLst>
+              </a:tr>
+              <a:tr h="0">
+                <a:tc>
+                  <a:txBody>
+                    <a:bodyPr/>
+                    <a:lstStyle/>
+                    <a:p>
+                      <a:r>
+                        <a:rPr lang="en-GB"/>
+                        <a:t>Regularised RF</a:t>
+                      </a:r>
+                    </a:p>
+                  </a:txBody>
+                  <a:tcPr anchor="ctr"/>
+                </a:tc>
+                <a:tc>
+                  <a:txBody>
+                    <a:bodyPr/>
+                    <a:lstStyle/>
+                    <a:p>
+                      <a:pPr algn="r"/>
+                      <a:r>
+                        <a:rPr lang="en-PK"/>
+                        <a:t>4.85</a:t>
+                      </a:r>
+                    </a:p>
+                  </a:txBody>
+                  <a:tcPr anchor="ctr"/>
+                </a:tc>
+                <a:extLst>
+                  <a:ext uri="{0D108BD9-81ED-4DB2-BD59-A6C34878D82A}">
+                    <a16:rowId xmlns:a16="http://schemas.microsoft.com/office/drawing/2014/main" val="2624798520"/>
+                  </a:ext>
+                </a:extLst>
+              </a:tr>
+              <a:tr h="0">
+                <a:tc>
+                  <a:txBody>
+                    <a:bodyPr/>
+                    <a:lstStyle/>
+                    <a:p>
+                      <a:r>
+                        <a:rPr lang="en-GB"/>
+                        <a:t>Tuned RF</a:t>
+                      </a:r>
+                    </a:p>
+                  </a:txBody>
+                  <a:tcPr anchor="ctr"/>
+                </a:tc>
+                <a:tc>
+                  <a:txBody>
+                    <a:bodyPr/>
+                    <a:lstStyle/>
+                    <a:p>
+                      <a:pPr algn="r"/>
+                      <a:r>
+                        <a:rPr lang="en-PK" dirty="0"/>
+                        <a:t>4.62</a:t>
+                      </a:r>
+                    </a:p>
+                  </a:txBody>
+                  <a:tcPr anchor="ctr"/>
+                </a:tc>
+                <a:extLst>
+                  <a:ext uri="{0D108BD9-81ED-4DB2-BD59-A6C34878D82A}">
+                    <a16:rowId xmlns:a16="http://schemas.microsoft.com/office/drawing/2014/main" val="652002382"/>
+                  </a:ext>
+                </a:extLst>
+              </a:tr>
+            </a:tbl>
+          </a:graphicData>
+        </a:graphic>
+      </p:graphicFrame>
+      <p:sp>
+        <p:nvSpPr>
+          <p:cNvPr id="8" name="TextBox 7">
+            <a:extLst>
+              <a:ext uri="{FF2B5EF4-FFF2-40B4-BE49-F238E27FC236}">
+                <a16:creationId xmlns:a16="http://schemas.microsoft.com/office/drawing/2014/main" id="{C1F83782-B676-BBB0-FA8E-AF4BB4DBF5BA}"/>
+              </a:ext>
+            </a:extLst>
+          </p:cNvPr>
+          <p:cNvSpPr txBox="1"/>
+          <p:nvPr/>
+        </p:nvSpPr>
+        <p:spPr>
+          <a:xfrm>
+            <a:off x="8196318" y="4117839"/>
+            <a:ext cx="6098874" cy="923330"/>
+          </a:xfrm>
+          <a:prstGeom prst="rect">
+            <a:avLst/>
+          </a:prstGeom>
+          <a:noFill/>
+        </p:spPr>
+        <p:txBody>
+          <a:bodyPr wrap="square">
+            <a:spAutoFit/>
+          </a:bodyPr>
+          <a:lstStyle/>
+          <a:p>
+            <a:r>
+              <a:rPr lang="en-GB" b="1" dirty="0"/>
+              <a:t>Key takeaway:</a:t>
+            </a:r>
+          </a:p>
+          <a:p>
+            <a:endParaRPr lang="en-GB" dirty="0"/>
+          </a:p>
+          <a:p>
+            <a:r>
+              <a:rPr lang="en-GB" dirty="0"/>
+              <a:t>Final tuned model performed best.</a:t>
+            </a:r>
+          </a:p>
+        </p:txBody>
+      </p:sp>
     </p:spTree>
     <p:extLst>
       <p:ext uri="{BB962C8B-B14F-4D97-AF65-F5344CB8AC3E}">
         <p14:creationId xmlns:p14="http://schemas.microsoft.com/office/powerpoint/2010/main" val="2257370884"/>
+      </p:ext>
+    </p:extLst>
+  </p:cSld>
+  <p:clrMapOvr>
+    <a:masterClrMapping/>
+  </p:clrMapOvr>
+</p:sld>
+</file>
+
+<file path=ppt/slides/slide22.xml><?xml version="1.0" encoding="utf-8"?>
+<p:sld xmlns:a="http://schemas.openxmlformats.org/drawingml/2006/main" xmlns:r="http://schemas.openxmlformats.org/officeDocument/2006/relationships" xmlns:p="http://schemas.openxmlformats.org/presentationml/2006/main">
+  <p:cSld>
+    <p:spTree>
+      <p:nvGrpSpPr>
+        <p:cNvPr id="1" name="">
+          <a:extLst>
+            <a:ext uri="{FF2B5EF4-FFF2-40B4-BE49-F238E27FC236}">
+              <a16:creationId xmlns:a16="http://schemas.microsoft.com/office/drawing/2014/main" id="{4EC05130-5892-8886-7770-0723CDD825FD}"/>
+            </a:ext>
+          </a:extLst>
+        </p:cNvPr>
+        <p:cNvGrpSpPr/>
+        <p:nvPr/>
+      </p:nvGrpSpPr>
+      <p:grpSpPr>
+        <a:xfrm>
+          <a:off x="0" y="0"/>
+          <a:ext cx="0" cy="0"/>
+          <a:chOff x="0" y="0"/>
+          <a:chExt cx="0" cy="0"/>
+        </a:xfrm>
+      </p:grpSpPr>
+      <p:sp>
+        <p:nvSpPr>
+          <p:cNvPr id="1048628" name="Title 1">
+            <a:extLst>
+              <a:ext uri="{FF2B5EF4-FFF2-40B4-BE49-F238E27FC236}">
+                <a16:creationId xmlns:a16="http://schemas.microsoft.com/office/drawing/2014/main" id="{C80635D5-9FF9-F884-9BF4-C73E1BFD5BF7}"/>
+              </a:ext>
+            </a:extLst>
+          </p:cNvPr>
+          <p:cNvSpPr>
+            <a:spLocks noGrp="1"/>
+          </p:cNvSpPr>
+          <p:nvPr>
+            <p:ph type="title"/>
+          </p:nvPr>
+        </p:nvSpPr>
+        <p:spPr>
+          <a:xfrm>
+            <a:off x="1666723" y="536138"/>
+            <a:ext cx="10331054" cy="870769"/>
+          </a:xfrm>
+        </p:spPr>
+        <p:txBody>
+          <a:bodyPr>
+            <a:noAutofit/>
+          </a:bodyPr>
+          <a:lstStyle/>
+          <a:p>
+            <a:pPr algn="ctr"/>
+            <a:r>
+              <a:rPr lang="en-GB" b="1" dirty="0"/>
+              <a:t>Hyperparameter Tuning</a:t>
+            </a:r>
+            <a:endParaRPr lang="en-US" b="1" dirty="0">
+              <a:latin typeface="Times New Roman"/>
+              <a:cs typeface="Times New Roman"/>
+            </a:endParaRPr>
+          </a:p>
+        </p:txBody>
+      </p:sp>
+      <p:sp>
+        <p:nvSpPr>
+          <p:cNvPr id="3" name="Slide Number Placeholder 2">
+            <a:extLst>
+              <a:ext uri="{FF2B5EF4-FFF2-40B4-BE49-F238E27FC236}">
+                <a16:creationId xmlns:a16="http://schemas.microsoft.com/office/drawing/2014/main" id="{6EE36D22-297A-34EB-851D-65CC4D2F22DB}"/>
+              </a:ext>
+            </a:extLst>
+          </p:cNvPr>
+          <p:cNvSpPr>
+            <a:spLocks noGrp="1"/>
+          </p:cNvSpPr>
+          <p:nvPr>
+            <p:ph type="sldNum" sz="quarter" idx="12"/>
+          </p:nvPr>
+        </p:nvSpPr>
+        <p:spPr/>
+        <p:txBody>
+          <a:bodyPr/>
+          <a:lstStyle/>
+          <a:p>
+            <a:fld id="{CB4D3031-0AEB-4687-8E23-04446010D3FF}" type="slidenum">
+              <a:rPr lang="en-US" smtClean="0"/>
+              <a:t>22</a:t>
+            </a:fld>
+            <a:endParaRPr lang="en-US"/>
+          </a:p>
+        </p:txBody>
+      </p:sp>
+      <p:sp>
+        <p:nvSpPr>
+          <p:cNvPr id="5" name="TextBox 4">
+            <a:extLst>
+              <a:ext uri="{FF2B5EF4-FFF2-40B4-BE49-F238E27FC236}">
+                <a16:creationId xmlns:a16="http://schemas.microsoft.com/office/drawing/2014/main" id="{15E28FE7-8675-F6AA-AC62-EB892DEE1DC5}"/>
+              </a:ext>
+            </a:extLst>
+          </p:cNvPr>
+          <p:cNvSpPr txBox="1"/>
+          <p:nvPr/>
+        </p:nvSpPr>
+        <p:spPr>
+          <a:xfrm>
+            <a:off x="2810972" y="1160401"/>
+            <a:ext cx="9381028" cy="5441105"/>
+          </a:xfrm>
+          <a:prstGeom prst="rect">
+            <a:avLst/>
+          </a:prstGeom>
+          <a:noFill/>
+        </p:spPr>
+        <p:txBody>
+          <a:bodyPr wrap="square" rtlCol="0">
+            <a:spAutoFit/>
+          </a:bodyPr>
+          <a:lstStyle/>
+          <a:p>
+            <a:pPr marL="285750" indent="-285750">
+              <a:lnSpc>
+                <a:spcPct val="150000"/>
+              </a:lnSpc>
+              <a:buFont typeface="Arial" panose="020B0604020202020204" pitchFamily="34" charset="0"/>
+              <a:buChar char="•"/>
+            </a:pPr>
+            <a:r>
+              <a:rPr lang="en-GB" dirty="0"/>
+              <a:t>Initial Random Forest</a:t>
+            </a:r>
+          </a:p>
+          <a:p>
+            <a:pPr marL="742950" lvl="1" indent="-285750">
+              <a:lnSpc>
+                <a:spcPct val="150000"/>
+              </a:lnSpc>
+              <a:buFont typeface="Courier New" panose="02070309020205020404" pitchFamily="49" charset="0"/>
+              <a:buChar char="o"/>
+            </a:pPr>
+            <a:r>
+              <a:rPr lang="en-GB" dirty="0"/>
+              <a:t>RMSE: </a:t>
+            </a:r>
+            <a:r>
+              <a:rPr lang="en-GB" b="1" dirty="0"/>
+              <a:t>4.84</a:t>
+            </a:r>
+            <a:endParaRPr lang="en-GB" dirty="0"/>
+          </a:p>
+          <a:p>
+            <a:pPr marL="742950" lvl="1" indent="-285750">
+              <a:lnSpc>
+                <a:spcPct val="150000"/>
+              </a:lnSpc>
+              <a:buFont typeface="Courier New" panose="02070309020205020404" pitchFamily="49" charset="0"/>
+              <a:buChar char="o"/>
+            </a:pPr>
+            <a:r>
+              <a:rPr lang="en-GB" dirty="0"/>
+              <a:t>Baseline model without tuning</a:t>
+            </a:r>
+          </a:p>
+          <a:p>
+            <a:pPr marL="285750" indent="-285750">
+              <a:lnSpc>
+                <a:spcPct val="150000"/>
+              </a:lnSpc>
+              <a:buFont typeface="Arial" panose="020B0604020202020204" pitchFamily="34" charset="0"/>
+              <a:buChar char="•"/>
+            </a:pPr>
+            <a:r>
+              <a:rPr lang="en-GB" dirty="0"/>
+              <a:t>Regularised Random Forest</a:t>
+            </a:r>
+          </a:p>
+          <a:p>
+            <a:pPr marL="742950" lvl="1" indent="-285750">
+              <a:lnSpc>
+                <a:spcPct val="150000"/>
+              </a:lnSpc>
+              <a:buFont typeface="Courier New" panose="02070309020205020404" pitchFamily="49" charset="0"/>
+              <a:buChar char="o"/>
+            </a:pPr>
+            <a:r>
+              <a:rPr lang="en-GB" dirty="0"/>
+              <a:t>RMSE: </a:t>
+            </a:r>
+            <a:r>
+              <a:rPr lang="en-GB" b="1" dirty="0"/>
+              <a:t>~4.86</a:t>
+            </a:r>
+            <a:endParaRPr lang="en-GB" dirty="0"/>
+          </a:p>
+          <a:p>
+            <a:pPr marL="742950" lvl="1" indent="-285750">
+              <a:lnSpc>
+                <a:spcPct val="150000"/>
+              </a:lnSpc>
+              <a:buFont typeface="Courier New" panose="02070309020205020404" pitchFamily="49" charset="0"/>
+              <a:buChar char="o"/>
+            </a:pPr>
+            <a:r>
+              <a:rPr lang="en-GB" dirty="0"/>
+              <a:t>No clear improvement</a:t>
+            </a:r>
+          </a:p>
+          <a:p>
+            <a:pPr marL="285750" indent="-285750">
+              <a:lnSpc>
+                <a:spcPct val="150000"/>
+              </a:lnSpc>
+              <a:buFont typeface="Arial" panose="020B0604020202020204" pitchFamily="34" charset="0"/>
+              <a:buChar char="•"/>
+            </a:pPr>
+            <a:r>
+              <a:rPr lang="en-GB" dirty="0"/>
+              <a:t>Hyperparameter Tuning (Randomised Search)</a:t>
+            </a:r>
+          </a:p>
+          <a:p>
+            <a:pPr marL="742950" lvl="1" indent="-285750">
+              <a:lnSpc>
+                <a:spcPct val="150000"/>
+              </a:lnSpc>
+              <a:buFont typeface="Courier New" panose="02070309020205020404" pitchFamily="49" charset="0"/>
+              <a:buChar char="o"/>
+            </a:pPr>
+            <a:r>
+              <a:rPr lang="en-GB" dirty="0"/>
+              <a:t>Tuned: tree depth, estimators, split size</a:t>
+            </a:r>
+          </a:p>
+          <a:p>
+            <a:pPr marL="742950" lvl="1" indent="-285750">
+              <a:lnSpc>
+                <a:spcPct val="150000"/>
+              </a:lnSpc>
+              <a:buFont typeface="Courier New" panose="02070309020205020404" pitchFamily="49" charset="0"/>
+              <a:buChar char="o"/>
+            </a:pPr>
+            <a:r>
+              <a:rPr lang="en-GB" dirty="0"/>
+              <a:t>Used cross-validation for better selection</a:t>
+            </a:r>
+          </a:p>
+          <a:p>
+            <a:pPr marL="285750" indent="-285750">
+              <a:lnSpc>
+                <a:spcPct val="150000"/>
+              </a:lnSpc>
+              <a:buFont typeface="Arial" panose="020B0604020202020204" pitchFamily="34" charset="0"/>
+              <a:buChar char="•"/>
+            </a:pPr>
+            <a:r>
+              <a:rPr lang="en-GB" dirty="0"/>
+              <a:t>Final Tuned Model</a:t>
+            </a:r>
+          </a:p>
+          <a:p>
+            <a:pPr marL="742950" lvl="1" indent="-285750">
+              <a:lnSpc>
+                <a:spcPct val="150000"/>
+              </a:lnSpc>
+              <a:buFont typeface="Courier New" panose="02070309020205020404" pitchFamily="49" charset="0"/>
+              <a:buChar char="o"/>
+            </a:pPr>
+            <a:r>
+              <a:rPr lang="en-GB" dirty="0"/>
+              <a:t>RMSE: </a:t>
+            </a:r>
+            <a:r>
+              <a:rPr lang="en-GB" b="1" dirty="0"/>
+              <a:t>4.62</a:t>
+            </a:r>
+            <a:endParaRPr lang="en-GB" dirty="0"/>
+          </a:p>
+          <a:p>
+            <a:pPr marL="742950" lvl="1" indent="-285750">
+              <a:lnSpc>
+                <a:spcPct val="150000"/>
+              </a:lnSpc>
+              <a:buFont typeface="Courier New" panose="02070309020205020404" pitchFamily="49" charset="0"/>
+              <a:buChar char="o"/>
+            </a:pPr>
+            <a:r>
+              <a:rPr lang="en-GB" dirty="0"/>
+              <a:t>Best performance achieved</a:t>
+            </a:r>
+          </a:p>
+          <a:p>
+            <a:pPr marL="742950" lvl="1" indent="-285750">
+              <a:lnSpc>
+                <a:spcPct val="150000"/>
+              </a:lnSpc>
+              <a:buFont typeface="Courier New" panose="02070309020205020404" pitchFamily="49" charset="0"/>
+              <a:buChar char="o"/>
+            </a:pPr>
+            <a:r>
+              <a:rPr lang="en-GB" dirty="0"/>
+              <a:t>More accurate and generalised model</a:t>
+            </a:r>
+          </a:p>
+        </p:txBody>
+      </p:sp>
+    </p:spTree>
+    <p:extLst>
+      <p:ext uri="{BB962C8B-B14F-4D97-AF65-F5344CB8AC3E}">
+        <p14:creationId xmlns:p14="http://schemas.microsoft.com/office/powerpoint/2010/main" val="250053073"/>
       </p:ext>
     </p:extLst>
   </p:cSld>
@@ -13542,8 +15644,8 @@
         </p:nvSpPr>
         <p:spPr>
           <a:xfrm>
-            <a:off x="1311579" y="5702643"/>
-            <a:ext cx="10880421" cy="1015663"/>
+            <a:off x="7863616" y="1794851"/>
+            <a:ext cx="3540505" cy="2554545"/>
           </a:xfrm>
           <a:prstGeom prst="rect">
             <a:avLst/>
@@ -13558,7 +15660,26 @@
           <a:p>
             <a:r>
               <a:rPr lang="en-GB" sz="2000" dirty="0"/>
-              <a:t>This graph shows the distribution of prediction errors (residuals). Most errors are centred around zero, which means the model predictions are close to actual values. A few larger errors exist on both sides, but overall the model is stable and performs well.</a:t>
+              <a:t>✔ Most errors are close to zero</a:t>
+            </a:r>
+          </a:p>
+          <a:p>
+            <a:br>
+              <a:rPr lang="en-GB" sz="2000" dirty="0"/>
+            </a:br>
+            <a:r>
+              <a:rPr lang="en-GB" sz="2000" dirty="0"/>
+              <a:t>✔ Predictions are generally accurate</a:t>
+            </a:r>
+            <a:br>
+              <a:rPr lang="en-GB" sz="2000" dirty="0"/>
+            </a:br>
+            <a:endParaRPr lang="en-GB" sz="2000" dirty="0"/>
+          </a:p>
+          <a:p>
+            <a:r>
+              <a:rPr lang="en-GB" sz="2000" dirty="0"/>
+              <a:t>✔ Model is stable and reliable</a:t>
             </a:r>
           </a:p>
         </p:txBody>
@@ -13592,8 +15713,8 @@
         </p:blipFill>
         <p:spPr bwMode="auto">
           <a:xfrm>
-            <a:off x="2287491" y="1084299"/>
-            <a:ext cx="7328414" cy="4618344"/>
+            <a:off x="1311579" y="1501553"/>
+            <a:ext cx="6383183" cy="4618344"/>
           </a:xfrm>
           <a:prstGeom prst="rect">
             <a:avLst/>
@@ -13660,324 +15781,6 @@
 </file>
 
 <file path=ppt/slides/slide26.xml><?xml version="1.0" encoding="utf-8"?>
-<p:sld xmlns:a="http://schemas.openxmlformats.org/drawingml/2006/main" xmlns:r="http://schemas.openxmlformats.org/officeDocument/2006/relationships" xmlns:p="http://schemas.openxmlformats.org/presentationml/2006/main">
-  <p:cSld>
-    <p:spTree>
-      <p:nvGrpSpPr>
-        <p:cNvPr id="1" name="">
-          <a:extLst>
-            <a:ext uri="{FF2B5EF4-FFF2-40B4-BE49-F238E27FC236}">
-              <a16:creationId xmlns:a16="http://schemas.microsoft.com/office/drawing/2014/main" id="{4EC05130-5892-8886-7770-0723CDD825FD}"/>
-            </a:ext>
-          </a:extLst>
-        </p:cNvPr>
-        <p:cNvGrpSpPr/>
-        <p:nvPr/>
-      </p:nvGrpSpPr>
-      <p:grpSpPr>
-        <a:xfrm>
-          <a:off x="0" y="0"/>
-          <a:ext cx="0" cy="0"/>
-          <a:chOff x="0" y="0"/>
-          <a:chExt cx="0" cy="0"/>
-        </a:xfrm>
-      </p:grpSpPr>
-      <p:sp>
-        <p:nvSpPr>
-          <p:cNvPr id="1048628" name="Title 1">
-            <a:extLst>
-              <a:ext uri="{FF2B5EF4-FFF2-40B4-BE49-F238E27FC236}">
-                <a16:creationId xmlns:a16="http://schemas.microsoft.com/office/drawing/2014/main" id="{C80635D5-9FF9-F884-9BF4-C73E1BFD5BF7}"/>
-              </a:ext>
-            </a:extLst>
-          </p:cNvPr>
-          <p:cNvSpPr>
-            <a:spLocks noGrp="1"/>
-          </p:cNvSpPr>
-          <p:nvPr>
-            <p:ph type="title"/>
-          </p:nvPr>
-        </p:nvSpPr>
-        <p:spPr>
-          <a:xfrm>
-            <a:off x="1666723" y="536138"/>
-            <a:ext cx="10331054" cy="870769"/>
-          </a:xfrm>
-        </p:spPr>
-        <p:txBody>
-          <a:bodyPr>
-            <a:noAutofit/>
-          </a:bodyPr>
-          <a:lstStyle/>
-          <a:p>
-            <a:pPr algn="ctr"/>
-            <a:r>
-              <a:rPr lang="en-GB" b="1" dirty="0"/>
-              <a:t>Hyperparameter Tuning</a:t>
-            </a:r>
-            <a:endParaRPr lang="en-US" b="1" dirty="0">
-              <a:latin typeface="Times New Roman"/>
-              <a:cs typeface="Times New Roman"/>
-            </a:endParaRPr>
-          </a:p>
-        </p:txBody>
-      </p:sp>
-      <p:sp>
-        <p:nvSpPr>
-          <p:cNvPr id="3" name="Slide Number Placeholder 2">
-            <a:extLst>
-              <a:ext uri="{FF2B5EF4-FFF2-40B4-BE49-F238E27FC236}">
-                <a16:creationId xmlns:a16="http://schemas.microsoft.com/office/drawing/2014/main" id="{6EE36D22-297A-34EB-851D-65CC4D2F22DB}"/>
-              </a:ext>
-            </a:extLst>
-          </p:cNvPr>
-          <p:cNvSpPr>
-            <a:spLocks noGrp="1"/>
-          </p:cNvSpPr>
-          <p:nvPr>
-            <p:ph type="sldNum" sz="quarter" idx="12"/>
-          </p:nvPr>
-        </p:nvSpPr>
-        <p:spPr/>
-        <p:txBody>
-          <a:bodyPr/>
-          <a:lstStyle/>
-          <a:p>
-            <a:fld id="{CB4D3031-0AEB-4687-8E23-04446010D3FF}" type="slidenum">
-              <a:rPr lang="en-US" smtClean="0"/>
-              <a:t>26</a:t>
-            </a:fld>
-            <a:endParaRPr lang="en-US"/>
-          </a:p>
-        </p:txBody>
-      </p:sp>
-      <p:sp>
-        <p:nvSpPr>
-          <p:cNvPr id="5" name="TextBox 4">
-            <a:extLst>
-              <a:ext uri="{FF2B5EF4-FFF2-40B4-BE49-F238E27FC236}">
-                <a16:creationId xmlns:a16="http://schemas.microsoft.com/office/drawing/2014/main" id="{15E28FE7-8675-F6AA-AC62-EB892DEE1DC5}"/>
-              </a:ext>
-            </a:extLst>
-          </p:cNvPr>
-          <p:cNvSpPr txBox="1"/>
-          <p:nvPr/>
-        </p:nvSpPr>
-        <p:spPr>
-          <a:xfrm>
-            <a:off x="2810972" y="1160401"/>
-            <a:ext cx="9381028" cy="5441105"/>
-          </a:xfrm>
-          <a:prstGeom prst="rect">
-            <a:avLst/>
-          </a:prstGeom>
-          <a:noFill/>
-        </p:spPr>
-        <p:txBody>
-          <a:bodyPr wrap="square" rtlCol="0">
-            <a:spAutoFit/>
-          </a:bodyPr>
-          <a:lstStyle/>
-          <a:p>
-            <a:pPr marL="285750" indent="-285750">
-              <a:lnSpc>
-                <a:spcPct val="150000"/>
-              </a:lnSpc>
-              <a:buFont typeface="Arial" panose="020B0604020202020204" pitchFamily="34" charset="0"/>
-              <a:buChar char="•"/>
-            </a:pPr>
-            <a:r>
-              <a:rPr lang="en-GB" dirty="0"/>
-              <a:t>Initial Random Forest</a:t>
-            </a:r>
-          </a:p>
-          <a:p>
-            <a:pPr marL="742950" lvl="1" indent="-285750">
-              <a:lnSpc>
-                <a:spcPct val="150000"/>
-              </a:lnSpc>
-              <a:buFont typeface="Courier New" panose="02070309020205020404" pitchFamily="49" charset="0"/>
-              <a:buChar char="o"/>
-            </a:pPr>
-            <a:r>
-              <a:rPr lang="en-GB" dirty="0"/>
-              <a:t>RMSE: </a:t>
-            </a:r>
-            <a:r>
-              <a:rPr lang="en-GB" b="1" dirty="0"/>
-              <a:t>4.84</a:t>
-            </a:r>
-            <a:endParaRPr lang="en-GB" dirty="0"/>
-          </a:p>
-          <a:p>
-            <a:pPr marL="742950" lvl="1" indent="-285750">
-              <a:lnSpc>
-                <a:spcPct val="150000"/>
-              </a:lnSpc>
-              <a:buFont typeface="Courier New" panose="02070309020205020404" pitchFamily="49" charset="0"/>
-              <a:buChar char="o"/>
-            </a:pPr>
-            <a:r>
-              <a:rPr lang="en-GB" dirty="0"/>
-              <a:t>Baseline model without tuning</a:t>
-            </a:r>
-          </a:p>
-          <a:p>
-            <a:pPr marL="285750" indent="-285750">
-              <a:lnSpc>
-                <a:spcPct val="150000"/>
-              </a:lnSpc>
-              <a:buFont typeface="Arial" panose="020B0604020202020204" pitchFamily="34" charset="0"/>
-              <a:buChar char="•"/>
-            </a:pPr>
-            <a:r>
-              <a:rPr lang="en-GB" dirty="0"/>
-              <a:t>Regularised Random Forest</a:t>
-            </a:r>
-          </a:p>
-          <a:p>
-            <a:pPr marL="742950" lvl="1" indent="-285750">
-              <a:lnSpc>
-                <a:spcPct val="150000"/>
-              </a:lnSpc>
-              <a:buFont typeface="Courier New" panose="02070309020205020404" pitchFamily="49" charset="0"/>
-              <a:buChar char="o"/>
-            </a:pPr>
-            <a:r>
-              <a:rPr lang="en-GB" dirty="0"/>
-              <a:t>RMSE: </a:t>
-            </a:r>
-            <a:r>
-              <a:rPr lang="en-GB" b="1" dirty="0"/>
-              <a:t>~4.86</a:t>
-            </a:r>
-            <a:endParaRPr lang="en-GB" dirty="0"/>
-          </a:p>
-          <a:p>
-            <a:pPr marL="742950" lvl="1" indent="-285750">
-              <a:lnSpc>
-                <a:spcPct val="150000"/>
-              </a:lnSpc>
-              <a:buFont typeface="Courier New" panose="02070309020205020404" pitchFamily="49" charset="0"/>
-              <a:buChar char="o"/>
-            </a:pPr>
-            <a:r>
-              <a:rPr lang="en-GB" dirty="0"/>
-              <a:t>No clear improvement</a:t>
-            </a:r>
-          </a:p>
-          <a:p>
-            <a:pPr marL="285750" indent="-285750">
-              <a:lnSpc>
-                <a:spcPct val="150000"/>
-              </a:lnSpc>
-              <a:buFont typeface="Arial" panose="020B0604020202020204" pitchFamily="34" charset="0"/>
-              <a:buChar char="•"/>
-            </a:pPr>
-            <a:r>
-              <a:rPr lang="en-GB" dirty="0"/>
-              <a:t>Hyperparameter Tuning (Randomised Search)</a:t>
-            </a:r>
-          </a:p>
-          <a:p>
-            <a:pPr marL="742950" lvl="1" indent="-285750">
-              <a:lnSpc>
-                <a:spcPct val="150000"/>
-              </a:lnSpc>
-              <a:buFont typeface="Courier New" panose="02070309020205020404" pitchFamily="49" charset="0"/>
-              <a:buChar char="o"/>
-            </a:pPr>
-            <a:r>
-              <a:rPr lang="en-GB" dirty="0"/>
-              <a:t>Tuned: tree depth, estimators, split size</a:t>
-            </a:r>
-          </a:p>
-          <a:p>
-            <a:pPr marL="742950" lvl="1" indent="-285750">
-              <a:lnSpc>
-                <a:spcPct val="150000"/>
-              </a:lnSpc>
-              <a:buFont typeface="Courier New" panose="02070309020205020404" pitchFamily="49" charset="0"/>
-              <a:buChar char="o"/>
-            </a:pPr>
-            <a:r>
-              <a:rPr lang="en-GB" dirty="0"/>
-              <a:t>Used cross-validation for better selection</a:t>
-            </a:r>
-          </a:p>
-          <a:p>
-            <a:pPr marL="285750" indent="-285750">
-              <a:lnSpc>
-                <a:spcPct val="150000"/>
-              </a:lnSpc>
-              <a:buFont typeface="Arial" panose="020B0604020202020204" pitchFamily="34" charset="0"/>
-              <a:buChar char="•"/>
-            </a:pPr>
-            <a:r>
-              <a:rPr lang="en-GB" dirty="0"/>
-              <a:t>Final Tuned Model</a:t>
-            </a:r>
-          </a:p>
-          <a:p>
-            <a:pPr marL="742950" lvl="1" indent="-285750">
-              <a:lnSpc>
-                <a:spcPct val="150000"/>
-              </a:lnSpc>
-              <a:buFont typeface="Courier New" panose="02070309020205020404" pitchFamily="49" charset="0"/>
-              <a:buChar char="o"/>
-            </a:pPr>
-            <a:r>
-              <a:rPr lang="en-GB" dirty="0"/>
-              <a:t>RMSE: </a:t>
-            </a:r>
-            <a:r>
-              <a:rPr lang="en-GB" b="1" dirty="0"/>
-              <a:t>4.62</a:t>
-            </a:r>
-            <a:endParaRPr lang="en-GB" dirty="0"/>
-          </a:p>
-          <a:p>
-            <a:pPr marL="742950" lvl="1" indent="-285750">
-              <a:lnSpc>
-                <a:spcPct val="150000"/>
-              </a:lnSpc>
-              <a:buFont typeface="Courier New" panose="02070309020205020404" pitchFamily="49" charset="0"/>
-              <a:buChar char="o"/>
-            </a:pPr>
-            <a:r>
-              <a:rPr lang="en-GB" dirty="0"/>
-              <a:t>Best performance achieved</a:t>
-            </a:r>
-          </a:p>
-          <a:p>
-            <a:pPr marL="742950" lvl="1" indent="-285750">
-              <a:lnSpc>
-                <a:spcPct val="150000"/>
-              </a:lnSpc>
-              <a:buFont typeface="Courier New" panose="02070309020205020404" pitchFamily="49" charset="0"/>
-              <a:buChar char="o"/>
-            </a:pPr>
-            <a:r>
-              <a:rPr lang="en-GB" dirty="0"/>
-              <a:t>More accurate and generalised model</a:t>
-            </a:r>
-          </a:p>
-        </p:txBody>
-      </p:sp>
-    </p:spTree>
-    <p:extLst>
-      <p:ext uri="{BB962C8B-B14F-4D97-AF65-F5344CB8AC3E}">
-        <p14:creationId xmlns:p14="http://schemas.microsoft.com/office/powerpoint/2010/main" val="250053073"/>
-      </p:ext>
-    </p:extLst>
-  </p:cSld>
-  <p:clrMapOvr>
-    <a:masterClrMapping/>
-  </p:clrMapOvr>
-</p:sld>
-</file>
-
-<file path=ppt/slides/slide27.xml><?xml version="1.0" encoding="utf-8"?>
 <p:sld xmlns:a="http://schemas.openxmlformats.org/drawingml/2006/main" xmlns:r="http://schemas.openxmlformats.org/officeDocument/2006/relationships" xmlns:p="http://schemas.openxmlformats.org/presentationml/2006/main">
   <p:cSld>
     <p:spTree>
@@ -14081,7 +15884,7 @@
                   <a:spcPct val="150000"/>
                 </a:lnSpc>
               </a:pPr>
-              <a:t>27</a:t>
+              <a:t>26</a:t>
             </a:fld>
             <a:endParaRPr lang="en-US"/>
           </a:p>
@@ -14194,7 +15997,7 @@
 </p:sld>
 </file>
 
-<file path=ppt/slides/slide28.xml><?xml version="1.0" encoding="utf-8"?>
+<file path=ppt/slides/slide27.xml><?xml version="1.0" encoding="utf-8"?>
 <p:sld xmlns:a="http://schemas.openxmlformats.org/drawingml/2006/main" xmlns:r="http://schemas.openxmlformats.org/officeDocument/2006/relationships" xmlns:p="http://schemas.openxmlformats.org/presentationml/2006/main">
   <p:cSld>
     <p:spTree>
@@ -14261,7 +16064,7 @@
           <a:p>
             <a:fld id="{CB4D3031-0AEB-4687-8E23-04446010D3FF}" type="slidenum">
               <a:rPr lang="en-US" smtClean="0"/>
-              <a:t>28</a:t>
+              <a:t>27</a:t>
             </a:fld>
             <a:endParaRPr lang="en-US"/>
           </a:p>
@@ -14424,7 +16227,7 @@
 </p:sld>
 </file>
 
-<file path=ppt/slides/slide29.xml><?xml version="1.0" encoding="utf-8"?>
+<file path=ppt/slides/slide28.xml><?xml version="1.0" encoding="utf-8"?>
 <p:sld xmlns:a="http://schemas.openxmlformats.org/drawingml/2006/main" xmlns:r="http://schemas.openxmlformats.org/officeDocument/2006/relationships" xmlns:p="http://schemas.openxmlformats.org/presentationml/2006/main">
   <p:cSld>
     <p:spTree>
@@ -14509,7 +16312,7 @@
           <a:p>
             <a:fld id="{CB4D3031-0AEB-4687-8E23-04446010D3FF}" type="slidenum">
               <a:rPr lang="en-US" smtClean="0"/>
-              <a:t>29</a:t>
+              <a:t>28</a:t>
             </a:fld>
             <a:endParaRPr lang="en-US"/>
           </a:p>
@@ -14641,164 +16444,7 @@
 </p:sld>
 </file>
 
-<file path=ppt/slides/slide3.xml><?xml version="1.0" encoding="utf-8"?>
-<p:sld xmlns:a="http://schemas.openxmlformats.org/drawingml/2006/main" xmlns:r="http://schemas.openxmlformats.org/officeDocument/2006/relationships" xmlns:p="http://schemas.openxmlformats.org/presentationml/2006/main">
-  <p:cSld>
-    <p:spTree>
-      <p:nvGrpSpPr>
-        <p:cNvPr id="1" name="">
-          <a:extLst>
-            <a:ext uri="{FF2B5EF4-FFF2-40B4-BE49-F238E27FC236}">
-              <a16:creationId xmlns:a16="http://schemas.microsoft.com/office/drawing/2014/main" id="{96D1B1BD-1EA3-DCE5-5A53-1AFA331CEA7E}"/>
-            </a:ext>
-          </a:extLst>
-        </p:cNvPr>
-        <p:cNvGrpSpPr/>
-        <p:nvPr/>
-      </p:nvGrpSpPr>
-      <p:grpSpPr>
-        <a:xfrm>
-          <a:off x="0" y="0"/>
-          <a:ext cx="0" cy="0"/>
-          <a:chOff x="0" y="0"/>
-          <a:chExt cx="0" cy="0"/>
-        </a:xfrm>
-      </p:grpSpPr>
-      <p:sp>
-        <p:nvSpPr>
-          <p:cNvPr id="1048633" name="Content Placeholder 2">
-            <a:extLst>
-              <a:ext uri="{FF2B5EF4-FFF2-40B4-BE49-F238E27FC236}">
-                <a16:creationId xmlns:a16="http://schemas.microsoft.com/office/drawing/2014/main" id="{4B6CEB1D-2083-BBEC-0EAC-B58254F66D80}"/>
-              </a:ext>
-            </a:extLst>
-          </p:cNvPr>
-          <p:cNvSpPr>
-            <a:spLocks noGrp="1"/>
-          </p:cNvSpPr>
-          <p:nvPr>
-            <p:ph idx="1"/>
-          </p:nvPr>
-        </p:nvSpPr>
-        <p:spPr>
-          <a:xfrm>
-            <a:off x="2261796" y="1974803"/>
-            <a:ext cx="8312425" cy="2515310"/>
-          </a:xfrm>
-        </p:spPr>
-        <p:txBody>
-          <a:bodyPr>
-            <a:normAutofit fontScale="96154"/>
-          </a:bodyPr>
-          <a:lstStyle/>
-          <a:p>
-            <a:r>
-              <a:rPr lang="en-GB" sz="2400" dirty="0"/>
-              <a:t>To analyse crime patterns over time and location </a:t>
-            </a:r>
-          </a:p>
-          <a:p>
-            <a:r>
-              <a:rPr lang="en-GB" sz="2400" dirty="0"/>
-              <a:t>To identify crime hotspots </a:t>
-            </a:r>
-          </a:p>
-          <a:p>
-            <a:r>
-              <a:rPr lang="en-GB" sz="2400" dirty="0"/>
-              <a:t>To predict future crime levels </a:t>
-            </a:r>
-          </a:p>
-          <a:p>
-            <a:r>
-              <a:rPr lang="en-GB" sz="2400" dirty="0"/>
-              <a:t>To understand which factors affect crime the most </a:t>
-            </a:r>
-          </a:p>
-        </p:txBody>
-      </p:sp>
-      <p:sp>
-        <p:nvSpPr>
-          <p:cNvPr id="2" name="TextBox 1">
-            <a:extLst>
-              <a:ext uri="{FF2B5EF4-FFF2-40B4-BE49-F238E27FC236}">
-                <a16:creationId xmlns:a16="http://schemas.microsoft.com/office/drawing/2014/main" id="{A911228F-13B6-4790-B8D1-1E879858C600}"/>
-              </a:ext>
-            </a:extLst>
-          </p:cNvPr>
-          <p:cNvSpPr txBox="1"/>
-          <p:nvPr/>
-        </p:nvSpPr>
-        <p:spPr>
-          <a:xfrm>
-            <a:off x="3024674" y="787782"/>
-            <a:ext cx="6786668" cy="830997"/>
-          </a:xfrm>
-          <a:prstGeom prst="rect">
-            <a:avLst/>
-          </a:prstGeom>
-          <a:noFill/>
-        </p:spPr>
-        <p:txBody>
-          <a:bodyPr wrap="square" rtlCol="0">
-            <a:spAutoFit/>
-          </a:bodyPr>
-          <a:lstStyle/>
-          <a:p>
-            <a:r>
-              <a:rPr lang="en-GB" sz="4800" b="1" dirty="0"/>
-              <a:t>Research Objectives</a:t>
-            </a:r>
-            <a:endParaRPr lang="en-US" sz="4500" b="1" dirty="0">
-              <a:latin typeface="Times New Roman" panose="02020603050405020304" pitchFamily="18" charset="0"/>
-              <a:cs typeface="Times New Roman" panose="02020603050405020304" pitchFamily="18" charset="0"/>
-            </a:endParaRPr>
-          </a:p>
-        </p:txBody>
-      </p:sp>
-      <p:sp>
-        <p:nvSpPr>
-          <p:cNvPr id="4" name="Slide Number Placeholder 3">
-            <a:extLst>
-              <a:ext uri="{FF2B5EF4-FFF2-40B4-BE49-F238E27FC236}">
-                <a16:creationId xmlns:a16="http://schemas.microsoft.com/office/drawing/2014/main" id="{C1E2BFDD-8A09-51C4-ED9E-32F393CD09EA}"/>
-              </a:ext>
-            </a:extLst>
-          </p:cNvPr>
-          <p:cNvSpPr>
-            <a:spLocks noGrp="1"/>
-          </p:cNvSpPr>
-          <p:nvPr>
-            <p:ph type="sldNum" sz="quarter" idx="12"/>
-          </p:nvPr>
-        </p:nvSpPr>
-        <p:spPr/>
-        <p:txBody>
-          <a:bodyPr/>
-          <a:lstStyle/>
-          <a:p>
-            <a:fld id="{CB4D3031-0AEB-4687-8E23-04446010D3FF}" type="slidenum">
-              <a:rPr lang="en-US" smtClean="0"/>
-              <a:t>3</a:t>
-            </a:fld>
-            <a:endParaRPr lang="en-US"/>
-          </a:p>
-        </p:txBody>
-      </p:sp>
-    </p:spTree>
-    <p:extLst>
-      <p:ext uri="{BB962C8B-B14F-4D97-AF65-F5344CB8AC3E}">
-        <p14:creationId xmlns:p14="http://schemas.microsoft.com/office/powerpoint/2010/main" val="988336693"/>
-      </p:ext>
-    </p:extLst>
-  </p:cSld>
-  <p:clrMapOvr>
-    <a:masterClrMapping/>
-  </p:clrMapOvr>
-</p:sld>
-</file>
-
-<file path=ppt/slides/slide30.xml><?xml version="1.0" encoding="utf-8"?>
+<file path=ppt/slides/slide29.xml><?xml version="1.0" encoding="utf-8"?>
 <p:sld xmlns:a="http://schemas.openxmlformats.org/drawingml/2006/main" xmlns:r="http://schemas.openxmlformats.org/officeDocument/2006/relationships" xmlns:p="http://schemas.openxmlformats.org/presentationml/2006/main">
   <p:cSld>
     <p:spTree>
@@ -14883,7 +16529,7 @@
           <a:p>
             <a:fld id="{CB4D3031-0AEB-4687-8E23-04446010D3FF}" type="slidenum">
               <a:rPr lang="en-US" smtClean="0"/>
-              <a:t>30</a:t>
+              <a:t>29</a:t>
             </a:fld>
             <a:endParaRPr lang="en-US"/>
           </a:p>
@@ -14955,7 +16601,238 @@
 </p:sld>
 </file>
 
-<file path=ppt/slides/slide31.xml><?xml version="1.0" encoding="utf-8"?>
+<file path=ppt/slides/slide3.xml><?xml version="1.0" encoding="utf-8"?>
+<p:sld xmlns:a="http://schemas.openxmlformats.org/drawingml/2006/main" xmlns:r="http://schemas.openxmlformats.org/officeDocument/2006/relationships" xmlns:p="http://schemas.openxmlformats.org/presentationml/2006/main">
+  <p:cSld>
+    <p:spTree>
+      <p:nvGrpSpPr>
+        <p:cNvPr id="1" name="">
+          <a:extLst>
+            <a:ext uri="{FF2B5EF4-FFF2-40B4-BE49-F238E27FC236}">
+              <a16:creationId xmlns:a16="http://schemas.microsoft.com/office/drawing/2014/main" id="{45614950-941D-CAF8-C3E7-EF9077267EB6}"/>
+            </a:ext>
+          </a:extLst>
+        </p:cNvPr>
+        <p:cNvGrpSpPr/>
+        <p:nvPr/>
+      </p:nvGrpSpPr>
+      <p:grpSpPr>
+        <a:xfrm>
+          <a:off x="0" y="0"/>
+          <a:ext cx="0" cy="0"/>
+          <a:chOff x="0" y="0"/>
+          <a:chExt cx="0" cy="0"/>
+        </a:xfrm>
+      </p:grpSpPr>
+      <p:sp>
+        <p:nvSpPr>
+          <p:cNvPr id="1048623" name="Title 1">
+            <a:extLst>
+              <a:ext uri="{FF2B5EF4-FFF2-40B4-BE49-F238E27FC236}">
+                <a16:creationId xmlns:a16="http://schemas.microsoft.com/office/drawing/2014/main" id="{EFF8F41D-00BD-B1A4-052B-E803698C37E8}"/>
+              </a:ext>
+            </a:extLst>
+          </p:cNvPr>
+          <p:cNvSpPr>
+            <a:spLocks noGrp="1"/>
+          </p:cNvSpPr>
+          <p:nvPr>
+            <p:ph type="title"/>
+          </p:nvPr>
+        </p:nvSpPr>
+        <p:spPr>
+          <a:xfrm>
+            <a:off x="3516374" y="741403"/>
+            <a:ext cx="5159252" cy="823008"/>
+          </a:xfrm>
+        </p:spPr>
+        <p:txBody>
+          <a:bodyPr>
+            <a:normAutofit/>
+          </a:bodyPr>
+          <a:lstStyle/>
+          <a:p>
+            <a:pPr algn="ctr"/>
+            <a:r>
+              <a:rPr lang="en-GB" sz="4800" b="1" dirty="0"/>
+              <a:t>Solution (RQs)</a:t>
+            </a:r>
+            <a:endParaRPr lang="en-US" sz="4500" b="1" dirty="0">
+              <a:solidFill>
+                <a:schemeClr val="tx1"/>
+              </a:solidFill>
+            </a:endParaRPr>
+          </a:p>
+        </p:txBody>
+      </p:sp>
+      <p:sp>
+        <p:nvSpPr>
+          <p:cNvPr id="1048624" name="Content Placeholder 2">
+            <a:extLst>
+              <a:ext uri="{FF2B5EF4-FFF2-40B4-BE49-F238E27FC236}">
+                <a16:creationId xmlns:a16="http://schemas.microsoft.com/office/drawing/2014/main" id="{BBAD271E-113B-FDE1-D5ED-18648D43C6BD}"/>
+              </a:ext>
+            </a:extLst>
+          </p:cNvPr>
+          <p:cNvSpPr>
+            <a:spLocks noGrp="1"/>
+          </p:cNvSpPr>
+          <p:nvPr>
+            <p:ph idx="1"/>
+          </p:nvPr>
+        </p:nvSpPr>
+        <p:spPr>
+          <a:xfrm>
+            <a:off x="2243293" y="1791939"/>
+            <a:ext cx="8661268" cy="3626222"/>
+          </a:xfrm>
+        </p:spPr>
+        <p:txBody>
+          <a:bodyPr>
+            <a:normAutofit/>
+          </a:bodyPr>
+          <a:lstStyle/>
+          <a:p>
+            <a:r>
+              <a:rPr lang="en-GB" sz="2400" dirty="0"/>
+              <a:t>Analyse patterns overtime and location</a:t>
+            </a:r>
+          </a:p>
+          <a:p>
+            <a:r>
+              <a:rPr lang="en-GB" sz="2400" dirty="0"/>
+              <a:t>Find hotspots</a:t>
+            </a:r>
+          </a:p>
+          <a:p>
+            <a:r>
+              <a:rPr lang="en-GB" sz="2400" dirty="0"/>
+              <a:t>Predict future crime and the factors affecting it.</a:t>
+            </a:r>
+          </a:p>
+        </p:txBody>
+      </p:sp>
+      <p:sp>
+        <p:nvSpPr>
+          <p:cNvPr id="3" name="Slide Number Placeholder 2">
+            <a:extLst>
+              <a:ext uri="{FF2B5EF4-FFF2-40B4-BE49-F238E27FC236}">
+                <a16:creationId xmlns:a16="http://schemas.microsoft.com/office/drawing/2014/main" id="{2ED4BE84-F37B-6338-AF45-0196C3A4BD10}"/>
+              </a:ext>
+            </a:extLst>
+          </p:cNvPr>
+          <p:cNvSpPr>
+            <a:spLocks noGrp="1"/>
+          </p:cNvSpPr>
+          <p:nvPr>
+            <p:ph type="sldNum" sz="quarter" idx="12"/>
+          </p:nvPr>
+        </p:nvSpPr>
+        <p:spPr/>
+        <p:txBody>
+          <a:bodyPr/>
+          <a:lstStyle/>
+          <a:p>
+            <a:fld id="{CB4D3031-0AEB-4687-8E23-04446010D3FF}" type="slidenum">
+              <a:rPr lang="en-US" smtClean="0"/>
+              <a:t>3</a:t>
+            </a:fld>
+            <a:endParaRPr lang="en-US"/>
+          </a:p>
+        </p:txBody>
+      </p:sp>
+      <p:sp>
+        <p:nvSpPr>
+          <p:cNvPr id="2" name="TextBox 1">
+            <a:extLst>
+              <a:ext uri="{FF2B5EF4-FFF2-40B4-BE49-F238E27FC236}">
+                <a16:creationId xmlns:a16="http://schemas.microsoft.com/office/drawing/2014/main" id="{6A7AA724-108C-016D-CE4E-4CC11588DA6A}"/>
+              </a:ext>
+            </a:extLst>
+          </p:cNvPr>
+          <p:cNvSpPr txBox="1"/>
+          <p:nvPr/>
+        </p:nvSpPr>
+        <p:spPr>
+          <a:xfrm>
+            <a:off x="2284306" y="3974381"/>
+            <a:ext cx="3760966" cy="369332"/>
+          </a:xfrm>
+          <a:prstGeom prst="rect">
+            <a:avLst/>
+          </a:prstGeom>
+          <a:noFill/>
+        </p:spPr>
+        <p:txBody>
+          <a:bodyPr wrap="none" rtlCol="0">
+            <a:spAutoFit/>
+          </a:bodyPr>
+          <a:lstStyle/>
+          <a:p>
+            <a:r>
+              <a:rPr lang="en-PK" b="1" dirty="0"/>
+              <a:t>People &amp; Police Better Decisions</a:t>
+            </a:r>
+          </a:p>
+        </p:txBody>
+      </p:sp>
+      <p:sp>
+        <p:nvSpPr>
+          <p:cNvPr id="4" name="TextBox 3">
+            <a:extLst>
+              <a:ext uri="{FF2B5EF4-FFF2-40B4-BE49-F238E27FC236}">
+                <a16:creationId xmlns:a16="http://schemas.microsoft.com/office/drawing/2014/main" id="{B2AA266A-E9ED-7427-5ED9-2B0C6781346F}"/>
+              </a:ext>
+            </a:extLst>
+          </p:cNvPr>
+          <p:cNvSpPr txBox="1"/>
+          <p:nvPr/>
+        </p:nvSpPr>
+        <p:spPr>
+          <a:xfrm>
+            <a:off x="2284306" y="4511605"/>
+            <a:ext cx="3211135" cy="369332"/>
+          </a:xfrm>
+          <a:prstGeom prst="rect">
+            <a:avLst/>
+          </a:prstGeom>
+          <a:noFill/>
+        </p:spPr>
+        <p:txBody>
+          <a:bodyPr wrap="none" rtlCol="0">
+            <a:spAutoFit/>
+          </a:bodyPr>
+          <a:lstStyle/>
+          <a:p>
+            <a:r>
+              <a:rPr lang="en-PK" b="1" dirty="0"/>
+              <a:t>USING MACHINE</a:t>
+            </a:r>
+            <a:r>
+              <a:rPr lang="en-PK" dirty="0"/>
+              <a:t> </a:t>
+            </a:r>
+            <a:r>
+              <a:rPr lang="en-PK" b="1" dirty="0"/>
+              <a:t>LEARNING</a:t>
+            </a:r>
+          </a:p>
+        </p:txBody>
+      </p:sp>
+    </p:spTree>
+    <p:extLst>
+      <p:ext uri="{BB962C8B-B14F-4D97-AF65-F5344CB8AC3E}">
+        <p14:creationId xmlns:p14="http://schemas.microsoft.com/office/powerpoint/2010/main" val="3102250163"/>
+      </p:ext>
+    </p:extLst>
+  </p:cSld>
+  <p:clrMapOvr>
+    <a:masterClrMapping/>
+  </p:clrMapOvr>
+</p:sld>
+</file>
+
+<file path=ppt/slides/slide30.xml><?xml version="1.0" encoding="utf-8"?>
 <p:sld xmlns:a="http://schemas.openxmlformats.org/drawingml/2006/main" xmlns:r="http://schemas.openxmlformats.org/officeDocument/2006/relationships" xmlns:p="http://schemas.openxmlformats.org/presentationml/2006/main">
   <p:cSld>
     <p:spTree>
@@ -15038,7 +16915,7 @@
           <a:p>
             <a:fld id="{CB4D3031-0AEB-4687-8E23-04446010D3FF}" type="slidenum">
               <a:rPr lang="en-US" smtClean="0"/>
-              <a:t>31</a:t>
+              <a:t>30</a:t>
             </a:fld>
             <a:endParaRPr lang="en-US"/>
           </a:p>
@@ -15053,157 +16930,6 @@
 </file>
 
 <file path=ppt/slides/slide4.xml><?xml version="1.0" encoding="utf-8"?>
-<p:sld xmlns:a="http://schemas.openxmlformats.org/drawingml/2006/main" xmlns:r="http://schemas.openxmlformats.org/officeDocument/2006/relationships" xmlns:p="http://schemas.openxmlformats.org/presentationml/2006/main">
-  <p:cSld>
-    <p:spTree>
-      <p:nvGrpSpPr>
-        <p:cNvPr id="1" name="">
-          <a:extLst>
-            <a:ext uri="{FF2B5EF4-FFF2-40B4-BE49-F238E27FC236}">
-              <a16:creationId xmlns:a16="http://schemas.microsoft.com/office/drawing/2014/main" id="{FDC3994A-ED48-48E8-A261-21A1BA436EF6}"/>
-            </a:ext>
-          </a:extLst>
-        </p:cNvPr>
-        <p:cNvGrpSpPr/>
-        <p:nvPr/>
-      </p:nvGrpSpPr>
-      <p:grpSpPr>
-        <a:xfrm>
-          <a:off x="0" y="0"/>
-          <a:ext cx="0" cy="0"/>
-          <a:chOff x="0" y="0"/>
-          <a:chExt cx="0" cy="0"/>
-        </a:xfrm>
-      </p:grpSpPr>
-      <p:sp>
-        <p:nvSpPr>
-          <p:cNvPr id="1048633" name="Content Placeholder 2">
-            <a:extLst>
-              <a:ext uri="{FF2B5EF4-FFF2-40B4-BE49-F238E27FC236}">
-                <a16:creationId xmlns:a16="http://schemas.microsoft.com/office/drawing/2014/main" id="{6F8BDB70-1CE5-77A8-F7D4-4AE82FA5D333}"/>
-              </a:ext>
-            </a:extLst>
-          </p:cNvPr>
-          <p:cNvSpPr>
-            <a:spLocks noGrp="1"/>
-          </p:cNvSpPr>
-          <p:nvPr>
-            <p:ph idx="1"/>
-          </p:nvPr>
-        </p:nvSpPr>
-        <p:spPr>
-          <a:xfrm>
-            <a:off x="2261796" y="1974803"/>
-            <a:ext cx="8312425" cy="2515310"/>
-          </a:xfrm>
-        </p:spPr>
-        <p:txBody>
-          <a:bodyPr>
-            <a:normAutofit fontScale="96154"/>
-          </a:bodyPr>
-          <a:lstStyle/>
-          <a:p>
-            <a:r>
-              <a:rPr lang="en-GB" sz="2400" dirty="0"/>
-              <a:t>RQ1: Which areas are crime hotspots? </a:t>
-            </a:r>
-          </a:p>
-          <a:p>
-            <a:r>
-              <a:rPr lang="en-GB" sz="2400" dirty="0"/>
-              <a:t>RQ2: Can we predict future crime levels? </a:t>
-            </a:r>
-          </a:p>
-          <a:p>
-            <a:r>
-              <a:rPr lang="en-GB" sz="2400" dirty="0"/>
-              <a:t>RQ3: Which features are most important for prediction? </a:t>
-            </a:r>
-          </a:p>
-        </p:txBody>
-      </p:sp>
-      <p:sp>
-        <p:nvSpPr>
-          <p:cNvPr id="2" name="TextBox 1">
-            <a:extLst>
-              <a:ext uri="{FF2B5EF4-FFF2-40B4-BE49-F238E27FC236}">
-                <a16:creationId xmlns:a16="http://schemas.microsoft.com/office/drawing/2014/main" id="{53FA7DF6-C812-DA3C-0353-876C36E5A02A}"/>
-              </a:ext>
-            </a:extLst>
-          </p:cNvPr>
-          <p:cNvSpPr txBox="1"/>
-          <p:nvPr/>
-        </p:nvSpPr>
-        <p:spPr>
-          <a:xfrm>
-            <a:off x="3787553" y="577929"/>
-            <a:ext cx="6022369" cy="830997"/>
-          </a:xfrm>
-          <a:prstGeom prst="rect">
-            <a:avLst/>
-          </a:prstGeom>
-          <a:noFill/>
-        </p:spPr>
-        <p:txBody>
-          <a:bodyPr wrap="square" rtlCol="0">
-            <a:spAutoFit/>
-          </a:bodyPr>
-          <a:lstStyle/>
-          <a:p>
-            <a:r>
-              <a:rPr lang="en-GB" sz="4800" b="1" dirty="0"/>
-              <a:t>Research Questions</a:t>
-            </a:r>
-            <a:endParaRPr lang="en-US" sz="4500" b="1" dirty="0">
-              <a:latin typeface="Times New Roman" panose="02020603050405020304" pitchFamily="18" charset="0"/>
-              <a:cs typeface="Times New Roman" panose="02020603050405020304" pitchFamily="18" charset="0"/>
-            </a:endParaRPr>
-          </a:p>
-        </p:txBody>
-      </p:sp>
-      <p:sp>
-        <p:nvSpPr>
-          <p:cNvPr id="4" name="Slide Number Placeholder 3">
-            <a:extLst>
-              <a:ext uri="{FF2B5EF4-FFF2-40B4-BE49-F238E27FC236}">
-                <a16:creationId xmlns:a16="http://schemas.microsoft.com/office/drawing/2014/main" id="{6CAA7980-46D1-6B75-7BFD-CAE16739006E}"/>
-              </a:ext>
-            </a:extLst>
-          </p:cNvPr>
-          <p:cNvSpPr>
-            <a:spLocks noGrp="1"/>
-          </p:cNvSpPr>
-          <p:nvPr>
-            <p:ph type="sldNum" sz="quarter" idx="12"/>
-          </p:nvPr>
-        </p:nvSpPr>
-        <p:spPr/>
-        <p:txBody>
-          <a:bodyPr/>
-          <a:lstStyle/>
-          <a:p>
-            <a:fld id="{CB4D3031-0AEB-4687-8E23-04446010D3FF}" type="slidenum">
-              <a:rPr lang="en-US" smtClean="0"/>
-              <a:t>4</a:t>
-            </a:fld>
-            <a:endParaRPr lang="en-US"/>
-          </a:p>
-        </p:txBody>
-      </p:sp>
-    </p:spTree>
-    <p:extLst>
-      <p:ext uri="{BB962C8B-B14F-4D97-AF65-F5344CB8AC3E}">
-        <p14:creationId xmlns:p14="http://schemas.microsoft.com/office/powerpoint/2010/main" val="305539144"/>
-      </p:ext>
-    </p:extLst>
-  </p:cSld>
-  <p:clrMapOvr>
-    <a:masterClrMapping/>
-  </p:clrMapOvr>
-</p:sld>
-</file>
-
-<file path=ppt/slides/slide5.xml><?xml version="1.0" encoding="utf-8"?>
 <p:sld xmlns:a="http://schemas.openxmlformats.org/drawingml/2006/main" xmlns:r="http://schemas.openxmlformats.org/officeDocument/2006/relationships" xmlns:p="http://schemas.openxmlformats.org/presentationml/2006/main">
   <p:cSld>
     <p:spTree>
@@ -15245,7 +16971,7 @@
         <p:spPr>
           <a:xfrm>
             <a:off x="2261796" y="1974803"/>
-            <a:ext cx="8312425" cy="3712738"/>
+            <a:ext cx="8312425" cy="2652615"/>
           </a:xfrm>
         </p:spPr>
         <p:txBody>
@@ -15266,19 +16992,7 @@
           <a:p>
             <a:r>
               <a:rPr lang="en-GB" dirty="0"/>
-              <a:t>Total records: 772,974 </a:t>
-            </a:r>
-          </a:p>
-          <a:p>
-            <a:r>
-              <a:rPr lang="en-GB" dirty="0"/>
-              <a:t>Time period: October 2023 to December 2025 </a:t>
-            </a:r>
-          </a:p>
-          <a:p>
-            <a:r>
-              <a:rPr lang="en-GB" dirty="0"/>
-              <a:t>Areas covered: 1963 LSOA regions </a:t>
+              <a:t>The dataset does not contain personal data and is safe for research use.</a:t>
             </a:r>
           </a:p>
           <a:p>
@@ -15298,13 +17012,7 @@
             <a:pPr lvl="1"/>
             <a:r>
               <a:rPr lang="en-GB" dirty="0"/>
-              <a:t>City of London Police </a:t>
-            </a:r>
-          </a:p>
-          <a:p>
-            <a:r>
-              <a:rPr lang="en-GB" dirty="0"/>
-              <a:t>The dataset does not contain personal data and is safe for research use.</a:t>
+              <a:t>City of London Police</a:t>
             </a:r>
           </a:p>
         </p:txBody>
@@ -15368,12 +17076,313 @@
           <a:p>
             <a:fld id="{CB4D3031-0AEB-4687-8E23-04446010D3FF}" type="slidenum">
               <a:rPr lang="en-US" smtClean="0"/>
-              <a:t>5</a:t>
+              <a:t>4</a:t>
             </a:fld>
             <a:endParaRPr lang="en-US"/>
           </a:p>
         </p:txBody>
       </p:sp>
+      <p:graphicFrame>
+        <p:nvGraphicFramePr>
+          <p:cNvPr id="3" name="Table 2">
+            <a:extLst>
+              <a:ext uri="{FF2B5EF4-FFF2-40B4-BE49-F238E27FC236}">
+                <a16:creationId xmlns:a16="http://schemas.microsoft.com/office/drawing/2014/main" id="{73948C2C-09F5-1524-8D49-7C96B0C9C8D3}"/>
+              </a:ext>
+            </a:extLst>
+          </p:cNvPr>
+          <p:cNvGraphicFramePr>
+            <a:graphicFrameLocks noGrp="1"/>
+          </p:cNvGraphicFramePr>
+          <p:nvPr>
+            <p:extLst>
+              <p:ext uri="{D42A27DB-BD31-4B8C-83A1-F6EECF244321}">
+                <p14:modId xmlns:p14="http://schemas.microsoft.com/office/powerpoint/2010/main" val="207276985"/>
+              </p:ext>
+            </p:extLst>
+          </p:nvPr>
+        </p:nvGraphicFramePr>
+        <p:xfrm>
+          <a:off x="2557768" y="4092679"/>
+          <a:ext cx="5252112" cy="1463040"/>
+        </p:xfrm>
+        <a:graphic>
+          <a:graphicData uri="http://schemas.openxmlformats.org/drawingml/2006/table">
+            <a:tbl>
+              <a:tblPr/>
+              <a:tblGrid>
+                <a:gridCol w="2626056">
+                  <a:extLst>
+                    <a:ext uri="{9D8B030D-6E8A-4147-A177-3AD203B41FA5}">
+                      <a16:colId xmlns:a16="http://schemas.microsoft.com/office/drawing/2014/main" val="4131382172"/>
+                    </a:ext>
+                  </a:extLst>
+                </a:gridCol>
+                <a:gridCol w="2626056">
+                  <a:extLst>
+                    <a:ext uri="{9D8B030D-6E8A-4147-A177-3AD203B41FA5}">
+                      <a16:colId xmlns:a16="http://schemas.microsoft.com/office/drawing/2014/main" val="2788668228"/>
+                    </a:ext>
+                  </a:extLst>
+                </a:gridCol>
+              </a:tblGrid>
+              <a:tr h="0">
+                <a:tc>
+                  <a:txBody>
+                    <a:bodyPr/>
+                    <a:lstStyle/>
+                    <a:p>
+                      <a:r>
+                        <a:rPr lang="en-GB" b="1" dirty="0"/>
+                        <a:t>Metric</a:t>
+                      </a:r>
+                    </a:p>
+                  </a:txBody>
+                  <a:tcPr anchor="ctr">
+                    <a:lnL>
+                      <a:noFill/>
+                    </a:lnL>
+                    <a:lnR>
+                      <a:noFill/>
+                    </a:lnR>
+                    <a:lnT>
+                      <a:noFill/>
+                    </a:lnT>
+                    <a:lnB>
+                      <a:noFill/>
+                    </a:lnB>
+                    <a:noFill/>
+                  </a:tcPr>
+                </a:tc>
+                <a:tc>
+                  <a:txBody>
+                    <a:bodyPr/>
+                    <a:lstStyle/>
+                    <a:p>
+                      <a:pPr algn="r"/>
+                      <a:r>
+                        <a:rPr lang="en-GB" b="1" dirty="0"/>
+                        <a:t>Value</a:t>
+                      </a:r>
+                    </a:p>
+                  </a:txBody>
+                  <a:tcPr anchor="ctr">
+                    <a:lnL>
+                      <a:noFill/>
+                    </a:lnL>
+                    <a:lnR>
+                      <a:noFill/>
+                    </a:lnR>
+                    <a:lnT>
+                      <a:noFill/>
+                    </a:lnT>
+                    <a:lnB>
+                      <a:noFill/>
+                    </a:lnB>
+                    <a:noFill/>
+                  </a:tcPr>
+                </a:tc>
+                <a:extLst>
+                  <a:ext uri="{0D108BD9-81ED-4DB2-BD59-A6C34878D82A}">
+                    <a16:rowId xmlns:a16="http://schemas.microsoft.com/office/drawing/2014/main" val="3811398984"/>
+                  </a:ext>
+                </a:extLst>
+              </a:tr>
+              <a:tr h="0">
+                <a:tc>
+                  <a:txBody>
+                    <a:bodyPr/>
+                    <a:lstStyle/>
+                    <a:p>
+                      <a:r>
+                        <a:rPr lang="en-GB"/>
+                        <a:t>Records</a:t>
+                      </a:r>
+                    </a:p>
+                  </a:txBody>
+                  <a:tcPr anchor="ctr">
+                    <a:lnL>
+                      <a:noFill/>
+                    </a:lnL>
+                    <a:lnR>
+                      <a:noFill/>
+                    </a:lnR>
+                    <a:lnT>
+                      <a:noFill/>
+                    </a:lnT>
+                    <a:lnB>
+                      <a:noFill/>
+                    </a:lnB>
+                    <a:noFill/>
+                  </a:tcPr>
+                </a:tc>
+                <a:tc>
+                  <a:txBody>
+                    <a:bodyPr/>
+                    <a:lstStyle/>
+                    <a:p>
+                      <a:pPr algn="r"/>
+                      <a:r>
+                        <a:rPr lang="en-PK" dirty="0"/>
+                        <a:t>772,974</a:t>
+                      </a:r>
+                    </a:p>
+                  </a:txBody>
+                  <a:tcPr anchor="ctr">
+                    <a:lnL>
+                      <a:noFill/>
+                    </a:lnL>
+                    <a:lnR>
+                      <a:noFill/>
+                    </a:lnR>
+                    <a:lnT>
+                      <a:noFill/>
+                    </a:lnT>
+                    <a:lnB>
+                      <a:noFill/>
+                    </a:lnB>
+                    <a:noFill/>
+                  </a:tcPr>
+                </a:tc>
+                <a:extLst>
+                  <a:ext uri="{0D108BD9-81ED-4DB2-BD59-A6C34878D82A}">
+                    <a16:rowId xmlns:a16="http://schemas.microsoft.com/office/drawing/2014/main" val="4089933441"/>
+                  </a:ext>
+                </a:extLst>
+              </a:tr>
+              <a:tr h="0">
+                <a:tc>
+                  <a:txBody>
+                    <a:bodyPr/>
+                    <a:lstStyle/>
+                    <a:p>
+                      <a:r>
+                        <a:rPr lang="en-GB"/>
+                        <a:t>Areas</a:t>
+                      </a:r>
+                    </a:p>
+                  </a:txBody>
+                  <a:tcPr anchor="ctr">
+                    <a:lnL>
+                      <a:noFill/>
+                    </a:lnL>
+                    <a:lnR>
+                      <a:noFill/>
+                    </a:lnR>
+                    <a:lnT>
+                      <a:noFill/>
+                    </a:lnT>
+                    <a:lnB>
+                      <a:noFill/>
+                    </a:lnB>
+                    <a:noFill/>
+                  </a:tcPr>
+                </a:tc>
+                <a:tc>
+                  <a:txBody>
+                    <a:bodyPr/>
+                    <a:lstStyle/>
+                    <a:p>
+                      <a:pPr algn="r"/>
+                      <a:r>
+                        <a:rPr lang="en-PK" dirty="0"/>
+                        <a:t>1,963 </a:t>
+                      </a:r>
+                      <a:r>
+                        <a:rPr lang="en-GB" dirty="0"/>
+                        <a:t>LSOA regions</a:t>
+                      </a:r>
+                      <a:endParaRPr lang="en-PK" dirty="0"/>
+                    </a:p>
+                  </a:txBody>
+                  <a:tcPr anchor="ctr">
+                    <a:lnL>
+                      <a:noFill/>
+                    </a:lnL>
+                    <a:lnR>
+                      <a:noFill/>
+                    </a:lnR>
+                    <a:lnT>
+                      <a:noFill/>
+                    </a:lnT>
+                    <a:lnB>
+                      <a:noFill/>
+                    </a:lnB>
+                    <a:noFill/>
+                  </a:tcPr>
+                </a:tc>
+                <a:extLst>
+                  <a:ext uri="{0D108BD9-81ED-4DB2-BD59-A6C34878D82A}">
+                    <a16:rowId xmlns:a16="http://schemas.microsoft.com/office/drawing/2014/main" val="2010807796"/>
+                  </a:ext>
+                </a:extLst>
+              </a:tr>
+              <a:tr h="0">
+                <a:tc>
+                  <a:txBody>
+                    <a:bodyPr/>
+                    <a:lstStyle/>
+                    <a:p>
+                      <a:r>
+                        <a:rPr lang="en-GB" dirty="0"/>
+                        <a:t>Period</a:t>
+                      </a:r>
+                    </a:p>
+                  </a:txBody>
+                  <a:tcPr anchor="ctr">
+                    <a:lnL>
+                      <a:noFill/>
+                    </a:lnL>
+                    <a:lnR>
+                      <a:noFill/>
+                    </a:lnR>
+                    <a:lnT>
+                      <a:noFill/>
+                    </a:lnT>
+                    <a:lnB>
+                      <a:noFill/>
+                    </a:lnB>
+                    <a:noFill/>
+                  </a:tcPr>
+                </a:tc>
+                <a:tc>
+                  <a:txBody>
+                    <a:bodyPr/>
+                    <a:lstStyle/>
+                    <a:p>
+                      <a:pPr algn="r"/>
+                      <a:r>
+                        <a:rPr lang="en-GB" dirty="0"/>
+                        <a:t>Oct 2023–Dec 2025</a:t>
+                      </a:r>
+                    </a:p>
+                  </a:txBody>
+                  <a:tcPr anchor="ctr">
+                    <a:lnL>
+                      <a:noFill/>
+                    </a:lnL>
+                    <a:lnR>
+                      <a:noFill/>
+                    </a:lnR>
+                    <a:lnT>
+                      <a:noFill/>
+                    </a:lnT>
+                    <a:lnB>
+                      <a:noFill/>
+                    </a:lnB>
+                    <a:noFill/>
+                  </a:tcPr>
+                </a:tc>
+                <a:extLst>
+                  <a:ext uri="{0D108BD9-81ED-4DB2-BD59-A6C34878D82A}">
+                    <a16:rowId xmlns:a16="http://schemas.microsoft.com/office/drawing/2014/main" val="314669468"/>
+                  </a:ext>
+                </a:extLst>
+              </a:tr>
+            </a:tbl>
+          </a:graphicData>
+        </a:graphic>
+      </p:graphicFrame>
     </p:spTree>
     <p:extLst>
       <p:ext uri="{BB962C8B-B14F-4D97-AF65-F5344CB8AC3E}">
@@ -15387,7 +17396,7 @@
 </p:sld>
 </file>
 
-<file path=ppt/slides/slide6.xml><?xml version="1.0" encoding="utf-8"?>
+<file path=ppt/slides/slide5.xml><?xml version="1.0" encoding="utf-8"?>
 <p:sld xmlns:a="http://schemas.openxmlformats.org/drawingml/2006/main" xmlns:r="http://schemas.openxmlformats.org/officeDocument/2006/relationships" xmlns:p="http://schemas.openxmlformats.org/presentationml/2006/main">
   <p:cSld>
     <p:spTree>
@@ -15609,7 +17618,7 @@
           <a:p>
             <a:fld id="{CB4D3031-0AEB-4687-8E23-04446010D3FF}" type="slidenum">
               <a:rPr lang="en-US" smtClean="0"/>
-              <a:t>6</a:t>
+              <a:t>5</a:t>
             </a:fld>
             <a:endParaRPr lang="en-US"/>
           </a:p>
@@ -15628,7 +17637,7 @@
 </p:sld>
 </file>
 
-<file path=ppt/slides/slide7.xml><?xml version="1.0" encoding="utf-8"?>
+<file path=ppt/slides/slide6.xml><?xml version="1.0" encoding="utf-8"?>
 <p:sld xmlns:a="http://schemas.openxmlformats.org/drawingml/2006/main" xmlns:r="http://schemas.openxmlformats.org/officeDocument/2006/relationships" xmlns:p="http://schemas.openxmlformats.org/presentationml/2006/main">
   <p:cSld>
     <p:spTree>
@@ -15653,74 +17662,6 @@
       </p:grpSpPr>
       <p:sp>
         <p:nvSpPr>
-          <p:cNvPr id="1048633" name="Content Placeholder 2">
-            <a:extLst>
-              <a:ext uri="{FF2B5EF4-FFF2-40B4-BE49-F238E27FC236}">
-                <a16:creationId xmlns:a16="http://schemas.microsoft.com/office/drawing/2014/main" id="{AC8967CE-EB91-3F5E-DA57-CED125940194}"/>
-              </a:ext>
-            </a:extLst>
-          </p:cNvPr>
-          <p:cNvSpPr>
-            <a:spLocks noGrp="1"/>
-          </p:cNvSpPr>
-          <p:nvPr>
-            <p:ph idx="1"/>
-          </p:nvPr>
-        </p:nvSpPr>
-        <p:spPr>
-          <a:xfrm>
-            <a:off x="2261796" y="1974803"/>
-            <a:ext cx="8312425" cy="3712738"/>
-          </a:xfrm>
-        </p:spPr>
-        <p:txBody>
-          <a:bodyPr vert="horz" lIns="91440" tIns="45720" rIns="91440" bIns="45720" rtlCol="0" anchor="t">
-            <a:normAutofit fontScale="96154"/>
-          </a:bodyPr>
-          <a:lstStyle/>
-          <a:p>
-            <a:r>
-              <a:rPr lang="en-GB" dirty="0"/>
-              <a:t>Combined 54 CSV files into one dataset </a:t>
-            </a:r>
-          </a:p>
-          <a:p>
-            <a:r>
-              <a:rPr lang="en-GB" dirty="0"/>
-              <a:t>Removed missing and invalid values </a:t>
-            </a:r>
-          </a:p>
-          <a:p>
-            <a:r>
-              <a:rPr lang="en-GB" dirty="0"/>
-              <a:t>Converted dates into year and month </a:t>
-            </a:r>
-          </a:p>
-          <a:p>
-            <a:r>
-              <a:rPr lang="en-GB" dirty="0"/>
-              <a:t>Grouped data into LSOA-month level </a:t>
-            </a:r>
-          </a:p>
-          <a:p>
-            <a:pPr marL="0" indent="0">
-              <a:buNone/>
-            </a:pPr>
-            <a:endParaRPr lang="en-GB" dirty="0"/>
-          </a:p>
-          <a:p>
-            <a:pPr marL="0" indent="0">
-              <a:buNone/>
-            </a:pPr>
-            <a:r>
-              <a:rPr lang="en-GB" dirty="0"/>
-              <a:t>This step made the data ready for analysis and modelling.</a:t>
-            </a:r>
-          </a:p>
-        </p:txBody>
-      </p:sp>
-      <p:sp>
-        <p:nvSpPr>
           <p:cNvPr id="2" name="TextBox 1">
             <a:extLst>
               <a:ext uri="{FF2B5EF4-FFF2-40B4-BE49-F238E27FC236}">
@@ -15733,28 +17674,144 @@
         </p:nvSpPr>
         <p:spPr>
           <a:xfrm>
-            <a:off x="3049744" y="577929"/>
-            <a:ext cx="7679960" cy="830997"/>
+            <a:off x="2592924" y="624110"/>
+            <a:ext cx="8911687" cy="1280890"/>
+          </a:xfrm>
+          <a:prstGeom prst="rect">
+            <a:avLst/>
+          </a:prstGeom>
+        </p:spPr>
+        <p:txBody>
+          <a:bodyPr vert="horz" lIns="91440" tIns="45720" rIns="91440" bIns="45720" rtlCol="0" anchor="t">
+            <a:normAutofit/>
+          </a:bodyPr>
+          <a:lstStyle/>
+          <a:p>
+            <a:pPr>
+              <a:spcBef>
+                <a:spcPct val="0"/>
+              </a:spcBef>
+              <a:spcAft>
+                <a:spcPts val="600"/>
+              </a:spcAft>
+            </a:pPr>
+            <a:r>
+              <a:rPr lang="en-US" sz="3600" b="1" kern="1200">
+                <a:solidFill>
+                  <a:schemeClr val="tx1">
+                    <a:lumMod val="85000"/>
+                    <a:lumOff val="15000"/>
+                  </a:schemeClr>
+                </a:solidFill>
+                <a:latin typeface="+mj-lt"/>
+                <a:ea typeface="+mj-ea"/>
+                <a:cs typeface="+mj-cs"/>
+              </a:rPr>
+              <a:t>Data Preparation</a:t>
+            </a:r>
+          </a:p>
+        </p:txBody>
+      </p:sp>
+      <p:sp>
+        <p:nvSpPr>
+          <p:cNvPr id="1048633" name="Content Placeholder 2">
+            <a:extLst>
+              <a:ext uri="{FF2B5EF4-FFF2-40B4-BE49-F238E27FC236}">
+                <a16:creationId xmlns:a16="http://schemas.microsoft.com/office/drawing/2014/main" id="{AC8967CE-EB91-3F5E-DA57-CED125940194}"/>
+              </a:ext>
+            </a:extLst>
+          </p:cNvPr>
+          <p:cNvSpPr>
+            <a:spLocks noGrp="1"/>
+          </p:cNvSpPr>
+          <p:nvPr>
+            <p:ph sz="half" idx="1"/>
+          </p:nvPr>
+        </p:nvSpPr>
+        <p:spPr>
+          <a:xfrm>
+            <a:off x="2589211" y="1590675"/>
+            <a:ext cx="8911687" cy="2138363"/>
+          </a:xfrm>
+        </p:spPr>
+        <p:txBody>
+          <a:bodyPr vert="horz" lIns="91440" tIns="45720" rIns="91440" bIns="45720" rtlCol="0">
+            <a:normAutofit/>
+          </a:bodyPr>
+          <a:lstStyle/>
+          <a:p>
+            <a:r>
+              <a:rPr lang="en-US" dirty="0"/>
+              <a:t>Combined 54 CSV files into one dataset </a:t>
+            </a:r>
+          </a:p>
+          <a:p>
+            <a:r>
+              <a:rPr lang="en-US" dirty="0"/>
+              <a:t>Removed missing and invalid values </a:t>
+            </a:r>
+          </a:p>
+          <a:p>
+            <a:r>
+              <a:rPr lang="en-US" dirty="0"/>
+              <a:t>Converted dates into year and month </a:t>
+            </a:r>
+          </a:p>
+          <a:p>
+            <a:r>
+              <a:rPr lang="en-US" dirty="0"/>
+              <a:t>Grouped data into LSOA-month level </a:t>
+            </a:r>
+          </a:p>
+          <a:p>
+            <a:pPr marL="0" indent="0"/>
+            <a:r>
+              <a:rPr lang="en-US" dirty="0"/>
+              <a:t>This step made the data ready for analysis and modelling.</a:t>
+            </a:r>
+          </a:p>
+        </p:txBody>
+      </p:sp>
+      <p:pic>
+        <p:nvPicPr>
+          <p:cNvPr id="3" name="Picture 2">
+            <a:extLst>
+              <a:ext uri="{FF2B5EF4-FFF2-40B4-BE49-F238E27FC236}">
+                <a16:creationId xmlns:a16="http://schemas.microsoft.com/office/drawing/2014/main" id="{1123CFC4-2D9F-902C-9C9E-EBCEABF9D1F7}"/>
+              </a:ext>
+            </a:extLst>
+          </p:cNvPr>
+          <p:cNvPicPr>
+            <a:picLocks noChangeAspect="1"/>
+          </p:cNvPicPr>
+          <p:nvPr/>
+        </p:nvPicPr>
+        <p:blipFill>
+          <a:blip r:embed="rId2" cstate="print">
+            <a:extLst>
+              <a:ext uri="{28A0092B-C50C-407E-A947-70E740481C1C}">
+                <a14:useLocalDpi xmlns:a14="http://schemas.microsoft.com/office/drawing/2010/main" val="0"/>
+              </a:ext>
+            </a:extLst>
+          </a:blip>
+          <a:stretch>
+            <a:fillRect/>
+          </a:stretch>
+        </p:blipFill>
+        <p:spPr bwMode="auto">
+          <a:xfrm>
+            <a:off x="2677148" y="3957638"/>
+            <a:ext cx="7795590" cy="1948894"/>
           </a:xfrm>
           <a:prstGeom prst="rect">
             <a:avLst/>
           </a:prstGeom>
           <a:noFill/>
+          <a:ln>
+            <a:noFill/>
+          </a:ln>
         </p:spPr>
-        <p:txBody>
-          <a:bodyPr wrap="square" lIns="91440" tIns="45720" rIns="91440" bIns="45720" rtlCol="0" anchor="t">
-            <a:spAutoFit/>
-          </a:bodyPr>
-          <a:lstStyle/>
-          <a:p>
-            <a:r>
-              <a:rPr lang="en-GB" sz="4800" b="1" dirty="0"/>
-              <a:t>Data Preparation</a:t>
-            </a:r>
-            <a:endParaRPr lang="en-US" b="1" dirty="0"/>
-          </a:p>
-        </p:txBody>
-      </p:sp>
+      </p:pic>
       <p:sp>
         <p:nvSpPr>
           <p:cNvPr id="4" name="Slide Number Placeholder 3">
@@ -15771,16 +17828,39 @@
             <p:ph type="sldNum" sz="quarter" idx="12"/>
           </p:nvPr>
         </p:nvSpPr>
-        <p:spPr/>
-        <p:txBody>
-          <a:bodyPr/>
-          <a:lstStyle/>
-          <a:p>
+        <p:spPr>
+          <a:xfrm>
+            <a:off x="531812" y="787782"/>
+            <a:ext cx="779767" cy="365125"/>
+          </a:xfrm>
+        </p:spPr>
+        <p:txBody>
+          <a:bodyPr vert="horz" lIns="91440" tIns="45720" rIns="91440" bIns="45720" rtlCol="0" anchor="ctr">
+            <a:normAutofit/>
+          </a:bodyPr>
+          <a:lstStyle/>
+          <a:p>
+            <a:pPr>
+              <a:lnSpc>
+                <a:spcPct val="90000"/>
+              </a:lnSpc>
+              <a:spcAft>
+                <a:spcPts val="600"/>
+              </a:spcAft>
+            </a:pPr>
             <a:fld id="{CB4D3031-0AEB-4687-8E23-04446010D3FF}" type="slidenum">
-              <a:rPr lang="en-US" smtClean="0"/>
-              <a:t>7</a:t>
+              <a:rPr lang="en-US" sz="1900" smtClean="0"/>
+              <a:pPr>
+                <a:lnSpc>
+                  <a:spcPct val="90000"/>
+                </a:lnSpc>
+                <a:spcAft>
+                  <a:spcPts val="600"/>
+                </a:spcAft>
+              </a:pPr>
+              <a:t>6</a:t>
             </a:fld>
-            <a:endParaRPr lang="en-US"/>
+            <a:endParaRPr lang="en-US" sz="1900"/>
           </a:p>
         </p:txBody>
       </p:sp>
@@ -15797,7 +17877,7 @@
 </p:sld>
 </file>
 
-<file path=ppt/slides/slide8.xml><?xml version="1.0" encoding="utf-8"?>
+<file path=ppt/slides/slide7.xml><?xml version="1.0" encoding="utf-8"?>
 <p:sld xmlns:a="http://schemas.openxmlformats.org/drawingml/2006/main" xmlns:r="http://schemas.openxmlformats.org/officeDocument/2006/relationships" xmlns:p="http://schemas.openxmlformats.org/presentationml/2006/main">
   <p:cSld>
     <p:spTree>
@@ -15838,7 +17918,7 @@
         </p:nvSpPr>
         <p:spPr>
           <a:xfrm>
-            <a:off x="2236211" y="520201"/>
+            <a:off x="2592924" y="624110"/>
             <a:ext cx="8911687" cy="1280890"/>
           </a:xfrm>
         </p:spPr>
@@ -15861,101 +17941,6 @@
               <a:ea typeface="+mj-ea"/>
               <a:cs typeface="+mj-cs"/>
             </a:endParaRPr>
-          </a:p>
-        </p:txBody>
-      </p:sp>
-      <p:sp>
-        <p:nvSpPr>
-          <p:cNvPr id="4" name="TextBox 3">
-            <a:extLst>
-              <a:ext uri="{FF2B5EF4-FFF2-40B4-BE49-F238E27FC236}">
-                <a16:creationId xmlns:a16="http://schemas.microsoft.com/office/drawing/2014/main" id="{FEF47304-28A4-157B-8449-C5D93263E219}"/>
-              </a:ext>
-            </a:extLst>
-          </p:cNvPr>
-          <p:cNvSpPr txBox="1"/>
-          <p:nvPr/>
-        </p:nvSpPr>
-        <p:spPr>
-          <a:xfrm>
-            <a:off x="2236211" y="1801091"/>
-            <a:ext cx="4067607" cy="3777622"/>
-          </a:xfrm>
-          <a:prstGeom prst="rect">
-            <a:avLst/>
-          </a:prstGeom>
-        </p:spPr>
-        <p:txBody>
-          <a:bodyPr vert="horz" lIns="91440" tIns="45720" rIns="91440" bIns="45720" rtlCol="0">
-            <a:normAutofit/>
-          </a:bodyPr>
-          <a:lstStyle/>
-          <a:p>
-            <a:pPr marL="342900" indent="-342900">
-              <a:spcBef>
-                <a:spcPts val="1000"/>
-              </a:spcBef>
-              <a:buClr>
-                <a:schemeClr val="accent1"/>
-              </a:buClr>
-              <a:buFont typeface="Wingdings 3" charset="2"/>
-              <a:buChar char=""/>
-            </a:pPr>
-            <a:r>
-              <a:rPr lang="en-US" dirty="0">
-                <a:solidFill>
-                  <a:schemeClr val="tx1">
-                    <a:lumMod val="75000"/>
-                    <a:lumOff val="25000"/>
-                  </a:schemeClr>
-                </a:solidFill>
-              </a:rPr>
-              <a:t>This heatmap shows how different features are related to each other. Strong positive values (red) mean features move together, while negative values (blue) show opposite trends. It helps identify important features like </a:t>
-            </a:r>
-            <a:r>
-              <a:rPr lang="en-US" i="1" dirty="0">
-                <a:solidFill>
-                  <a:schemeClr val="tx1">
-                    <a:lumMod val="75000"/>
-                    <a:lumOff val="25000"/>
-                  </a:schemeClr>
-                </a:solidFill>
-              </a:rPr>
-              <a:t>lag1</a:t>
-            </a:r>
-            <a:r>
-              <a:rPr lang="en-US" dirty="0">
-                <a:solidFill>
-                  <a:schemeClr val="tx1">
-                    <a:lumMod val="75000"/>
-                    <a:lumOff val="25000"/>
-                  </a:schemeClr>
-                </a:solidFill>
-              </a:rPr>
-              <a:t> and </a:t>
-            </a:r>
-            <a:r>
-              <a:rPr lang="en-US" i="1" dirty="0" err="1">
-                <a:solidFill>
-                  <a:schemeClr val="tx1">
-                    <a:lumMod val="75000"/>
-                    <a:lumOff val="25000"/>
-                  </a:schemeClr>
-                </a:solidFill>
-              </a:rPr>
-              <a:t>dominantTypeCount</a:t>
-            </a:r>
-            <a:r>
-              <a:rPr lang="en-US" dirty="0">
-                <a:solidFill>
-                  <a:schemeClr val="tx1">
-                    <a:lumMod val="75000"/>
-                    <a:lumOff val="25000"/>
-                  </a:schemeClr>
-                </a:solidFill>
-              </a:rPr>
-              <a:t> for prediction.</a:t>
-            </a:r>
           </a:p>
         </p:txBody>
       </p:sp>
@@ -15974,31 +17959,124 @@
           <p:nvPr/>
         </p:nvPicPr>
         <p:blipFill>
-          <a:blip r:embed="rId2">
+          <a:blip r:embed="rId3">
             <a:extLst>
               <a:ext uri="{28A0092B-C50C-407E-A947-70E740481C1C}">
                 <a14:useLocalDpi xmlns:a14="http://schemas.microsoft.com/office/drawing/2010/main" val="0"/>
               </a:ext>
             </a:extLst>
           </a:blip>
-          <a:srcRect l="7684" r="3815" b="1"/>
+          <a:srcRect l="7452" r="4047" b="1"/>
           <a:stretch>
             <a:fillRect/>
           </a:stretch>
         </p:blipFill>
         <p:spPr bwMode="auto">
           <a:xfrm>
-            <a:off x="6456101" y="1419529"/>
-            <a:ext cx="5616429" cy="4918270"/>
+            <a:off x="1603374" y="1619936"/>
+            <a:ext cx="5226052" cy="4576419"/>
           </a:xfrm>
           <a:prstGeom prst="rect">
             <a:avLst/>
           </a:prstGeom>
-          <a:solidFill>
-            <a:srgbClr val="FFFFFF"/>
-          </a:solidFill>
+          <a:noFill/>
         </p:spPr>
       </p:pic>
+      <p:sp>
+        <p:nvSpPr>
+          <p:cNvPr id="4" name="TextBox 3">
+            <a:extLst>
+              <a:ext uri="{FF2B5EF4-FFF2-40B4-BE49-F238E27FC236}">
+                <a16:creationId xmlns:a16="http://schemas.microsoft.com/office/drawing/2014/main" id="{FEF47304-28A4-157B-8449-C5D93263E219}"/>
+              </a:ext>
+            </a:extLst>
+          </p:cNvPr>
+          <p:cNvSpPr txBox="1"/>
+          <p:nvPr/>
+        </p:nvSpPr>
+        <p:spPr>
+          <a:xfrm>
+            <a:off x="7190747" y="2126222"/>
+            <a:ext cx="4313864" cy="3777622"/>
+          </a:xfrm>
+          <a:prstGeom prst="rect">
+            <a:avLst/>
+          </a:prstGeom>
+        </p:spPr>
+        <p:txBody>
+          <a:bodyPr vert="horz" lIns="91440" tIns="45720" rIns="91440" bIns="45720" rtlCol="0">
+            <a:normAutofit/>
+          </a:bodyPr>
+          <a:lstStyle/>
+          <a:p>
+            <a:pPr marL="342900" indent="-342900">
+              <a:spcBef>
+                <a:spcPts val="1000"/>
+              </a:spcBef>
+              <a:buClr>
+                <a:schemeClr val="accent1"/>
+              </a:buClr>
+              <a:buFont typeface="Wingdings 3" charset="2"/>
+              <a:buChar char=""/>
+            </a:pPr>
+            <a:r>
+              <a:rPr lang="en-US" dirty="0">
+                <a:solidFill>
+                  <a:schemeClr val="tx1">
+                    <a:lumMod val="75000"/>
+                    <a:lumOff val="25000"/>
+                  </a:schemeClr>
+                </a:solidFill>
+              </a:rPr>
+              <a:t>This heatmap shows how different features are related to each other. Strong positive values (red) mean features move together, while negative values (blue) show opposite trends. It helps identify important features like </a:t>
+            </a:r>
+            <a:r>
+              <a:rPr lang="en-US" i="1" dirty="0">
+                <a:solidFill>
+                  <a:schemeClr val="tx1">
+                    <a:lumMod val="75000"/>
+                    <a:lumOff val="25000"/>
+                  </a:schemeClr>
+                </a:solidFill>
+              </a:rPr>
+              <a:t>lag1</a:t>
+            </a:r>
+            <a:r>
+              <a:rPr lang="en-US" dirty="0">
+                <a:solidFill>
+                  <a:schemeClr val="tx1">
+                    <a:lumMod val="75000"/>
+                    <a:lumOff val="25000"/>
+                  </a:schemeClr>
+                </a:solidFill>
+              </a:rPr>
+              <a:t> and </a:t>
+            </a:r>
+            <a:r>
+              <a:rPr lang="en-US" i="1">
+                <a:solidFill>
+                  <a:schemeClr val="tx1">
+                    <a:lumMod val="75000"/>
+                    <a:lumOff val="25000"/>
+                  </a:schemeClr>
+                </a:solidFill>
+              </a:rPr>
+              <a:t>dominantTypeCount</a:t>
+            </a:r>
+            <a:r>
+              <a:rPr lang="en-US" dirty="0">
+                <a:solidFill>
+                  <a:schemeClr val="tx1">
+                    <a:lumMod val="75000"/>
+                    <a:lumOff val="25000"/>
+                  </a:schemeClr>
+                </a:solidFill>
+              </a:rPr>
+              <a:t> for prediction.</a:t>
+            </a:r>
+          </a:p>
+        </p:txBody>
+      </p:sp>
       <p:sp>
         <p:nvSpPr>
           <p:cNvPr id="3" name="Slide Number Placeholder 2">
@@ -16045,7 +18123,7 @@
                   <a:spcPts val="600"/>
                 </a:spcAft>
               </a:pPr>
-              <a:t>8</a:t>
+              <a:t>7</a:t>
             </a:fld>
             <a:endParaRPr lang="en-US" sz="1900"/>
           </a:p>
@@ -16064,7 +18142,7 @@
 </p:sld>
 </file>
 
-<file path=ppt/slides/slide9.xml><?xml version="1.0" encoding="utf-8"?>
+<file path=ppt/slides/slide8.xml><?xml version="1.0" encoding="utf-8"?>
 <p:sld xmlns:a="http://schemas.openxmlformats.org/drawingml/2006/main" xmlns:r="http://schemas.openxmlformats.org/officeDocument/2006/relationships" xmlns:p="http://schemas.openxmlformats.org/presentationml/2006/main">
   <p:cSld>
     <p:spTree>
@@ -16284,7 +18362,7 @@
                   <a:spcPts val="600"/>
                 </a:spcAft>
               </a:pPr>
-              <a:t>9</a:t>
+              <a:t>8</a:t>
             </a:fld>
             <a:endParaRPr lang="en-US" sz="1900"/>
           </a:p>
@@ -16294,6 +18372,193 @@
     <p:extLst>
       <p:ext uri="{BB962C8B-B14F-4D97-AF65-F5344CB8AC3E}">
         <p14:creationId xmlns:p14="http://schemas.microsoft.com/office/powerpoint/2010/main" val="280447984"/>
+      </p:ext>
+    </p:extLst>
+  </p:cSld>
+  <p:clrMapOvr>
+    <a:masterClrMapping/>
+  </p:clrMapOvr>
+</p:sld>
+</file>
+
+<file path=ppt/slides/slide9.xml><?xml version="1.0" encoding="utf-8"?>
+<p:sld xmlns:a="http://schemas.openxmlformats.org/drawingml/2006/main" xmlns:r="http://schemas.openxmlformats.org/officeDocument/2006/relationships" xmlns:p="http://schemas.openxmlformats.org/presentationml/2006/main">
+  <p:cSld>
+    <p:spTree>
+      <p:nvGrpSpPr>
+        <p:cNvPr id="1" name="">
+          <a:extLst>
+            <a:ext uri="{FF2B5EF4-FFF2-40B4-BE49-F238E27FC236}">
+              <a16:creationId xmlns:a16="http://schemas.microsoft.com/office/drawing/2014/main" id="{72B933DF-7640-D58C-0C1C-2B086F8E5A30}"/>
+            </a:ext>
+          </a:extLst>
+        </p:cNvPr>
+        <p:cNvGrpSpPr/>
+        <p:nvPr/>
+      </p:nvGrpSpPr>
+      <p:grpSpPr>
+        <a:xfrm>
+          <a:off x="0" y="0"/>
+          <a:ext cx="0" cy="0"/>
+          <a:chOff x="0" y="0"/>
+          <a:chExt cx="0" cy="0"/>
+        </a:xfrm>
+      </p:grpSpPr>
+      <p:sp>
+        <p:nvSpPr>
+          <p:cNvPr id="1048627" name="Title 1">
+            <a:extLst>
+              <a:ext uri="{FF2B5EF4-FFF2-40B4-BE49-F238E27FC236}">
+                <a16:creationId xmlns:a16="http://schemas.microsoft.com/office/drawing/2014/main" id="{E24EDD9B-9995-C092-64BF-95B766671D8A}"/>
+              </a:ext>
+            </a:extLst>
+          </p:cNvPr>
+          <p:cNvSpPr>
+            <a:spLocks noGrp="1"/>
+          </p:cNvSpPr>
+          <p:nvPr>
+            <p:ph type="title"/>
+          </p:nvPr>
+        </p:nvSpPr>
+        <p:spPr>
+          <a:xfrm>
+            <a:off x="1724409" y="-4720"/>
+            <a:ext cx="9792676" cy="645836"/>
+          </a:xfrm>
+        </p:spPr>
+        <p:txBody>
+          <a:bodyPr>
+            <a:normAutofit fontScale="90000"/>
+          </a:bodyPr>
+          <a:lstStyle/>
+          <a:p>
+            <a:pPr algn="ctr"/>
+            <a:r>
+              <a:rPr lang="en-GB" sz="4000" b="1" dirty="0"/>
+              <a:t>Seasonal Crime Pattern</a:t>
+            </a:r>
+            <a:endParaRPr lang="en-US" sz="4000" b="1" dirty="0">
+              <a:latin typeface="Times New Roman"/>
+              <a:cs typeface="Times New Roman"/>
+            </a:endParaRPr>
+          </a:p>
+        </p:txBody>
+      </p:sp>
+      <p:sp>
+        <p:nvSpPr>
+          <p:cNvPr id="3" name="Slide Number Placeholder 2">
+            <a:extLst>
+              <a:ext uri="{FF2B5EF4-FFF2-40B4-BE49-F238E27FC236}">
+                <a16:creationId xmlns:a16="http://schemas.microsoft.com/office/drawing/2014/main" id="{61259E8C-1655-C9C9-D4E8-8A49A0D6CCA3}"/>
+              </a:ext>
+            </a:extLst>
+          </p:cNvPr>
+          <p:cNvSpPr>
+            <a:spLocks noGrp="1"/>
+          </p:cNvSpPr>
+          <p:nvPr>
+            <p:ph type="sldNum" sz="quarter" idx="12"/>
+          </p:nvPr>
+        </p:nvSpPr>
+        <p:spPr/>
+        <p:txBody>
+          <a:bodyPr/>
+          <a:lstStyle/>
+          <a:p>
+            <a:fld id="{CB4D3031-0AEB-4687-8E23-04446010D3FF}" type="slidenum">
+              <a:rPr lang="en-US" smtClean="0"/>
+              <a:t>9</a:t>
+            </a:fld>
+            <a:endParaRPr lang="en-US"/>
+          </a:p>
+        </p:txBody>
+      </p:sp>
+      <p:sp>
+        <p:nvSpPr>
+          <p:cNvPr id="12" name="TextBox 11">
+            <a:extLst>
+              <a:ext uri="{FF2B5EF4-FFF2-40B4-BE49-F238E27FC236}">
+                <a16:creationId xmlns:a16="http://schemas.microsoft.com/office/drawing/2014/main" id="{FD755FF8-D04D-95E9-4535-9A5BC0608AD1}"/>
+              </a:ext>
+            </a:extLst>
+          </p:cNvPr>
+          <p:cNvSpPr txBox="1"/>
+          <p:nvPr/>
+        </p:nvSpPr>
+        <p:spPr>
+          <a:xfrm>
+            <a:off x="1724409" y="5798118"/>
+            <a:ext cx="9480403" cy="923330"/>
+          </a:xfrm>
+          <a:prstGeom prst="rect">
+            <a:avLst/>
+          </a:prstGeom>
+          <a:noFill/>
+        </p:spPr>
+        <p:txBody>
+          <a:bodyPr wrap="square">
+            <a:spAutoFit/>
+          </a:bodyPr>
+          <a:lstStyle/>
+          <a:p>
+            <a:r>
+              <a:rPr lang="en-GB" dirty="0"/>
+              <a:t>This graph shows how crime levels vary across different months of the year. Some months, especially towards the end of the year, have higher crime rates compared to others. This indicates that crime follows a seasonal pattern.</a:t>
+            </a:r>
+          </a:p>
+        </p:txBody>
+      </p:sp>
+      <p:pic>
+        <p:nvPicPr>
+          <p:cNvPr id="2050" name="Picture 2">
+            <a:extLst>
+              <a:ext uri="{FF2B5EF4-FFF2-40B4-BE49-F238E27FC236}">
+                <a16:creationId xmlns:a16="http://schemas.microsoft.com/office/drawing/2014/main" id="{81A5D030-9716-1234-5871-6A239C66F8EC}"/>
+              </a:ext>
+            </a:extLst>
+          </p:cNvPr>
+          <p:cNvPicPr>
+            <a:picLocks noChangeAspect="1" noChangeArrowheads="1"/>
+          </p:cNvPicPr>
+          <p:nvPr/>
+        </p:nvPicPr>
+        <p:blipFill>
+          <a:blip r:embed="rId3">
+            <a:extLst>
+              <a:ext uri="{28A0092B-C50C-407E-A947-70E740481C1C}">
+                <a14:useLocalDpi xmlns:a14="http://schemas.microsoft.com/office/drawing/2010/main" val="0"/>
+              </a:ext>
+            </a:extLst>
+          </a:blip>
+          <a:srcRect/>
+          <a:stretch>
+            <a:fillRect/>
+          </a:stretch>
+        </p:blipFill>
+        <p:spPr bwMode="auto">
+          <a:xfrm>
+            <a:off x="2093488" y="787782"/>
+            <a:ext cx="7892439" cy="5010336"/>
+          </a:xfrm>
+          <a:prstGeom prst="rect">
+            <a:avLst/>
+          </a:prstGeom>
+          <a:noFill/>
+          <a:extLst>
+            <a:ext uri="{909E8E84-426E-40DD-AFC4-6F175D3DCCD1}">
+              <a14:hiddenFill xmlns:a14="http://schemas.microsoft.com/office/drawing/2010/main">
+                <a:solidFill>
+                  <a:srgbClr val="FFFFFF"/>
+                </a:solidFill>
+              </a14:hiddenFill>
+            </a:ext>
+          </a:extLst>
+        </p:spPr>
+      </p:pic>
+    </p:spTree>
+    <p:extLst>
+      <p:ext uri="{BB962C8B-B14F-4D97-AF65-F5344CB8AC3E}">
+        <p14:creationId xmlns:p14="http://schemas.microsoft.com/office/powerpoint/2010/main" val="723906387"/>
       </p:ext>
     </p:extLst>
   </p:cSld>

--- a/Presentation Document ppt.pptx
+++ b/Presentation Document ppt.pptx
@@ -2134,6 +2134,135 @@
     <p:extLst>
       <p:ext uri="{BB962C8B-B14F-4D97-AF65-F5344CB8AC3E}">
         <p14:creationId xmlns:p14="http://schemas.microsoft.com/office/powerpoint/2010/main" val="2297642692"/>
+      </p:ext>
+    </p:extLst>
+  </p:cSld>
+  <p:clrMapOvr>
+    <a:masterClrMapping/>
+  </p:clrMapOvr>
+</p:notes>
+</file>
+
+<file path=ppt/notesSlides/notesSlide19.xml><?xml version="1.0" encoding="utf-8"?>
+<p:notes xmlns:a="http://schemas.openxmlformats.org/drawingml/2006/main" xmlns:r="http://schemas.openxmlformats.org/officeDocument/2006/relationships" xmlns:p="http://schemas.openxmlformats.org/presentationml/2006/main">
+  <p:cSld>
+    <p:spTree>
+      <p:nvGrpSpPr>
+        <p:cNvPr id="1" name=""/>
+        <p:cNvGrpSpPr/>
+        <p:nvPr/>
+      </p:nvGrpSpPr>
+      <p:grpSpPr>
+        <a:xfrm>
+          <a:off x="0" y="0"/>
+          <a:ext cx="0" cy="0"/>
+          <a:chOff x="0" y="0"/>
+          <a:chExt cx="0" cy="0"/>
+        </a:xfrm>
+      </p:grpSpPr>
+      <p:sp>
+        <p:nvSpPr>
+          <p:cNvPr id="2" name="Slide Image Placeholder 1"/>
+          <p:cNvSpPr>
+            <a:spLocks noGrp="1" noRot="1" noChangeAspect="1"/>
+          </p:cNvSpPr>
+          <p:nvPr>
+            <p:ph type="sldImg"/>
+          </p:nvPr>
+        </p:nvSpPr>
+        <p:spPr>
+          <a:xfrm>
+            <a:off x="138113" y="766763"/>
+            <a:ext cx="6823075" cy="3838575"/>
+          </a:xfrm>
+        </p:spPr>
+      </p:sp>
+      <p:sp>
+        <p:nvSpPr>
+          <p:cNvPr id="3" name="Notes Placeholder 2"/>
+          <p:cNvSpPr>
+            <a:spLocks noGrp="1"/>
+          </p:cNvSpPr>
+          <p:nvPr>
+            <p:ph type="body" idx="1"/>
+          </p:nvPr>
+        </p:nvSpPr>
+        <p:spPr/>
+        <p:txBody>
+          <a:bodyPr/>
+          <a:lstStyle/>
+          <a:p>
+            <a:r>
+              <a:rPr lang="en-GB" dirty="0"/>
+              <a:t>At the end of the notebook, I created reusable functions so the trained model can be used without running the full notebook again.</a:t>
+            </a:r>
+          </a:p>
+          <a:p>
+            <a:pPr marL="171450" indent="-171450">
+              <a:buFont typeface="Arial" panose="020B0604020202020204" pitchFamily="34" charset="0"/>
+              <a:buChar char="•"/>
+            </a:pPr>
+            <a:r>
+              <a:rPr lang="en-GB" dirty="0"/>
+              <a:t>The model is saved using </a:t>
+            </a:r>
+            <a:r>
+              <a:rPr lang="en-GB" dirty="0" err="1"/>
+              <a:t>joblib</a:t>
+            </a:r>
+            <a:r>
+              <a:rPr lang="en-GB" dirty="0"/>
+              <a:t>, along with supporting lookup data such as LSOA rows, street names, feature columns, and risk thresholds.</a:t>
+            </a:r>
+          </a:p>
+          <a:p>
+            <a:pPr marL="171450" indent="-171450">
+              <a:buFont typeface="Arial" panose="020B0604020202020204" pitchFamily="34" charset="0"/>
+              <a:buChar char="•"/>
+            </a:pPr>
+            <a:r>
+              <a:rPr lang="en-GB" dirty="0"/>
+              <a:t>The main function, </a:t>
+            </a:r>
+            <a:r>
+              <a:rPr lang="en-GB" dirty="0" err="1"/>
+              <a:t>predictNextMonthCrime</a:t>
+            </a:r>
+            <a:r>
+              <a:rPr lang="en-GB" dirty="0"/>
+              <a:t>, accepts inputs like LSOA code, street name, query, or coordinates. It finds the correct LSOA, builds the same feature structure used during training, predicts next month’s crime count, and returns a risk level such as Low, Moderate, High, or Very High.</a:t>
+            </a:r>
+            <a:endParaRPr lang="en-PK" dirty="0"/>
+          </a:p>
+        </p:txBody>
+      </p:sp>
+      <p:sp>
+        <p:nvSpPr>
+          <p:cNvPr id="4" name="Slide Number Placeholder 3"/>
+          <p:cNvSpPr>
+            <a:spLocks noGrp="1"/>
+          </p:cNvSpPr>
+          <p:nvPr>
+            <p:ph type="sldNum" sz="quarter" idx="5"/>
+          </p:nvPr>
+        </p:nvSpPr>
+        <p:spPr/>
+        <p:txBody>
+          <a:bodyPr/>
+          <a:lstStyle/>
+          <a:p>
+            <a:fld id="{A9A0EA98-5831-4853-B862-C702E6EB345C}" type="slidenum">
+              <a:rPr lang="en-US" smtClean="0"/>
+              <a:t>26</a:t>
+            </a:fld>
+            <a:endParaRPr lang="en-US"/>
+          </a:p>
+        </p:txBody>
+      </p:sp>
+    </p:spTree>
+    <p:extLst>
+      <p:ext uri="{BB962C8B-B14F-4D97-AF65-F5344CB8AC3E}">
+        <p14:creationId xmlns:p14="http://schemas.microsoft.com/office/powerpoint/2010/main" val="3109141813"/>
       </p:ext>
     </p:extLst>
   </p:cSld>

--- a/Presentation Document ppt.pptx
+++ b/Presentation Document ppt.pptx
@@ -917,15 +917,6 @@
           <a:p>
             <a:r>
               <a:rPr lang="en-GB" dirty="0"/>
-              <a:t>To answer Research Question 2, we tested two models. Linear Regression was used as a simple baseline, while Random Forest was used because crime data is often complex and non-linear</a:t>
-            </a:r>
-          </a:p>
-          <a:p>
-            <a:endParaRPr lang="en-GB" dirty="0"/>
-          </a:p>
-          <a:p>
-            <a:r>
-              <a:rPr lang="en-GB" dirty="0"/>
               <a:t>For RQ2, two regression models were used: Linear Regression and Random Forest. The goal is to predict crime count for the next month based on </a:t>
             </a:r>
             <a:r>
@@ -1321,7 +1312,15 @@
           <a:p>
             <a:r>
               <a:rPr lang="en-GB" dirty="0"/>
-              <a:t>This plot compares actual and predicted crime values for the Random Forest model. The red line represents perfect predictions. Most points lie close to this line, indicating strong model performance, especially for low and medium crime levels. However, at higher crime values, the points are more spread out and often fall below the line, showing that the model tends to underestimate extreme cases. This suggests that while the model performs well overall, predicting very high crime levels remains more challenging.</a:t>
+              <a:t>This plot compares actual and predicted crime values for the Random Forest model. The red line represents perfect predictions. Most points lie close to this line, indicating strong model performance, especially for low and medium crime levels. However, at higher crime values, the points are more spread out and often fall below the line, showing that the</a:t>
+            </a:r>
+            <a:r>
+              <a:rPr lang="en-GB" b="1" dirty="0"/>
+              <a:t> model tends to underestimate extreme cases</a:t>
+            </a:r>
+            <a:r>
+              <a:rPr lang="en-GB" dirty="0"/>
+              <a:t>. This suggests that while the model performs well overall, predicting very high crime levels remains more challenging.</a:t>
             </a:r>
             <a:endParaRPr lang="en-PK" dirty="0"/>
           </a:p>
@@ -1875,8 +1874,28 @@
           <a:lstStyle/>
           <a:p>
             <a:r>
-              <a:rPr lang="en-GB" dirty="0"/>
-              <a:t>SHAP explains how much each feature pushes a prediction up or down.</a:t>
+              <a:rPr lang="en-GB" b="1" i="1" dirty="0"/>
+              <a:t>(</a:t>
+            </a:r>
+            <a:r>
+              <a:rPr lang="en-GB" b="1" i="1" dirty="0" err="1"/>
+              <a:t>SHapley</a:t>
+            </a:r>
+            <a:r>
+              <a:rPr lang="en-GB" b="1" i="1" dirty="0"/>
+              <a:t> Additive </a:t>
+            </a:r>
+            <a:r>
+              <a:rPr lang="en-GB" b="1" i="1" dirty="0" err="1"/>
+              <a:t>exPlanations</a:t>
+            </a:r>
+            <a:r>
+              <a:rPr lang="en-GB" b="1" i="1" dirty="0"/>
+              <a:t>)</a:t>
+            </a:r>
+            <a:r>
+              <a:rPr lang="en-GB" b="1" dirty="0"/>
+              <a:t>. SHAP explains how much each feature pushes a prediction up or down.</a:t>
             </a:r>
           </a:p>
           <a:p>
@@ -3741,7 +3760,7 @@
           <a:p>
             <a:fld id="{3D6AE9DE-14C1-42EC-89CF-CB898A150C53}" type="datetime1">
               <a:rPr lang="en-US" smtClean="0"/>
-              <a:t>4/29/26</a:t>
+              <a:t>4/30/26</a:t>
             </a:fld>
             <a:endParaRPr lang="en-US"/>
           </a:p>
@@ -4084,7 +4103,7 @@
           <a:p>
             <a:fld id="{D81304C3-B8E3-446C-91D8-4B24F523B1EE}" type="datetime1">
               <a:rPr lang="en-US" smtClean="0"/>
-              <a:t>4/29/26</a:t>
+              <a:t>4/30/26</a:t>
             </a:fld>
             <a:endParaRPr lang="en-US"/>
           </a:p>
@@ -4479,7 +4498,7 @@
           <a:p>
             <a:fld id="{1C0554CE-59EF-4699-AE39-6FFD206A32FA}" type="datetime1">
               <a:rPr lang="en-US" smtClean="0"/>
-              <a:t>4/29/26</a:t>
+              <a:t>4/30/26</a:t>
             </a:fld>
             <a:endParaRPr lang="en-US"/>
           </a:p>
@@ -4813,7 +4832,7 @@
           <a:p>
             <a:fld id="{6952E827-2AB2-427E-8828-A42F60B2588F}" type="datetime1">
               <a:rPr lang="en-US" smtClean="0"/>
-              <a:t>4/29/26</a:t>
+              <a:t>4/30/26</a:t>
             </a:fld>
             <a:endParaRPr lang="en-US"/>
           </a:p>
@@ -5127,7 +5146,7 @@
           <a:p>
             <a:fld id="{34BA49D2-3DB7-4226-A7DB-AFD9BAA55DEF}" type="datetime1">
               <a:rPr lang="en-US" smtClean="0"/>
-              <a:t>4/29/26</a:t>
+              <a:t>4/30/26</a:t>
             </a:fld>
             <a:endParaRPr lang="en-US"/>
           </a:p>
@@ -5517,7 +5536,7 @@
           <a:p>
             <a:fld id="{F6F66DF9-0589-431D-8672-DC90B910BD17}" type="datetime1">
               <a:rPr lang="en-US" smtClean="0"/>
-              <a:t>4/29/26</a:t>
+              <a:t>4/30/26</a:t>
             </a:fld>
             <a:endParaRPr lang="en-US"/>
           </a:p>
@@ -5772,7 +5791,7 @@
           <a:p>
             <a:fld id="{3A818E7B-2E1C-43C3-A6DD-DC057E6BA6F1}" type="datetime1">
               <a:rPr lang="en-US" smtClean="0"/>
-              <a:t>4/29/26</a:t>
+              <a:t>4/30/26</a:t>
             </a:fld>
             <a:endParaRPr lang="en-US"/>
           </a:p>
@@ -6032,7 +6051,7 @@
           <a:p>
             <a:fld id="{60510C91-D168-484E-8A33-FD7F08A96286}" type="datetime1">
               <a:rPr lang="en-US" smtClean="0"/>
-              <a:t>4/29/26</a:t>
+              <a:t>4/30/26</a:t>
             </a:fld>
             <a:endParaRPr lang="en-US"/>
           </a:p>
@@ -6292,7 +6311,7 @@
           <a:p>
             <a:fld id="{57AE3903-2F96-43E5-B3FD-F3D7F89C074D}" type="datetime1">
               <a:rPr lang="en-US" smtClean="0"/>
-              <a:t>4/29/26</a:t>
+              <a:t>4/30/26</a:t>
             </a:fld>
             <a:endParaRPr lang="en-US"/>
           </a:p>
@@ -6626,7 +6645,7 @@
           <a:p>
             <a:fld id="{C02B9BB9-46B6-4775-AE31-DA327B45056F}" type="datetime1">
               <a:rPr lang="en-US" smtClean="0"/>
-              <a:t>4/29/26</a:t>
+              <a:t>4/30/26</a:t>
             </a:fld>
             <a:endParaRPr lang="en-US"/>
           </a:p>
@@ -6947,7 +6966,7 @@
           <a:p>
             <a:fld id="{50CA13ED-6BF8-4D10-B877-346C758DCD3A}" type="datetime1">
               <a:rPr lang="en-US" smtClean="0"/>
-              <a:t>4/29/26</a:t>
+              <a:t>4/30/26</a:t>
             </a:fld>
             <a:endParaRPr lang="en-US"/>
           </a:p>
@@ -7402,7 +7421,7 @@
           <a:p>
             <a:fld id="{D9817360-F361-4993-BBE6-4A9D23B8696F}" type="datetime1">
               <a:rPr lang="en-US" smtClean="0"/>
-              <a:t>4/29/26</a:t>
+              <a:t>4/30/26</a:t>
             </a:fld>
             <a:endParaRPr lang="en-US"/>
           </a:p>
@@ -7605,7 +7624,7 @@
           <a:p>
             <a:fld id="{868EECFF-6E5F-4144-B1A7-5F715C8B017C}" type="datetime1">
               <a:rPr lang="en-US" smtClean="0"/>
-              <a:t>4/29/26</a:t>
+              <a:t>4/30/26</a:t>
             </a:fld>
             <a:endParaRPr lang="en-US"/>
           </a:p>
@@ -7780,7 +7799,7 @@
           <a:p>
             <a:fld id="{94E2C67B-2D48-4378-BE5B-AFE93FBEE3F7}" type="datetime1">
               <a:rPr lang="en-US" smtClean="0"/>
-              <a:t>4/29/26</a:t>
+              <a:t>4/30/26</a:t>
             </a:fld>
             <a:endParaRPr lang="en-US"/>
           </a:p>
@@ -8111,7 +8130,7 @@
           <a:p>
             <a:fld id="{73DCF2FD-A8F1-4D60-90F2-0DDC7378D159}" type="datetime1">
               <a:rPr lang="en-US" smtClean="0"/>
-              <a:t>4/29/26</a:t>
+              <a:t>4/30/26</a:t>
             </a:fld>
             <a:endParaRPr lang="en-US"/>
           </a:p>
@@ -8454,7 +8473,7 @@
           <a:p>
             <a:fld id="{08167FE4-9878-4871-AC11-DACD246D7D40}" type="datetime1">
               <a:rPr lang="en-US" smtClean="0"/>
-              <a:t>4/29/26</a:t>
+              <a:t>4/30/26</a:t>
             </a:fld>
             <a:endParaRPr lang="en-US"/>
           </a:p>
@@ -10744,7 +10763,7 @@
           <a:p>
             <a:fld id="{D83D06A4-B070-4BFD-AF55-2779036C349E}" type="datetime1">
               <a:rPr lang="en-US" smtClean="0"/>
-              <a:t>4/29/26</a:t>
+              <a:t>4/30/26</a:t>
             </a:fld>
             <a:endParaRPr lang="en-US"/>
           </a:p>
